--- a/Nestle_DOM_Presentation.pptx
+++ b/Nestle_DOM_Presentation.pptx
@@ -4,17 +4,20 @@
   <p:sldMasterIdLst>
     <p:sldMasterId id="2147483648" r:id="rId1"/>
   </p:sldMasterIdLst>
+  <p:notesMasterIdLst>
+    <p:notesMasterId r:id="rId11"/>
+  </p:notesMasterIdLst>
   <p:sldIdLst>
     <p:sldId id="256" r:id="rId2"/>
     <p:sldId id="257" r:id="rId3"/>
     <p:sldId id="258" r:id="rId4"/>
-    <p:sldId id="259" r:id="rId5"/>
-    <p:sldId id="260" r:id="rId6"/>
-    <p:sldId id="261" r:id="rId7"/>
+    <p:sldId id="262" r:id="rId5"/>
+    <p:sldId id="259" r:id="rId6"/>
+    <p:sldId id="260" r:id="rId7"/>
+    <p:sldId id="263" r:id="rId8"/>
+    <p:sldId id="261" r:id="rId9"/>
+    <p:sldId id="264" r:id="rId10"/>
   </p:sldIdLst>
-  <p:notesMasterIdLst>
-    <p:notesMasterId r:id="rId8"/>
-  </p:notesMasterIdLst>
   <p:sldSz cx="12192000" cy="6858000"/>
   <p:notesSz cx="6858000" cy="12192000"/>
   <p:defaultTextStyle>
@@ -109,13 +112,20 @@
       </a:defRPr>
     </a:lvl9pPr>
   </p:defaultTextStyle>
+  <p:extLst>
+    <p:ext uri="{EFAFB233-063F-42B5-8137-9DF3F51BA10A}">
+      <p15:sldGuideLst xmlns:p15="http://schemas.microsoft.com/office/powerpoint/2012/main"/>
+    </p:ext>
+  </p:extLst>
 </p:presentation>
 </file>
 
 <file path=ppt/charts/chart1.xml><?xml version="1.0" encoding="utf-8"?>
-<c:chartSpace xmlns:c="http://schemas.openxmlformats.org/drawingml/2006/chart" xmlns:a="http://schemas.openxmlformats.org/drawingml/2006/main" xmlns:r="http://schemas.openxmlformats.org/officeDocument/2006/relationships">
+<c:chartSpace xmlns:c="http://schemas.openxmlformats.org/drawingml/2006/chart" xmlns:a="http://schemas.openxmlformats.org/drawingml/2006/main" xmlns:r="http://schemas.openxmlformats.org/officeDocument/2006/relationships" xmlns:c16r2="http://schemas.microsoft.com/office/drawing/2015/06/chart">
   <c:date1904 val="0"/>
+  <c:lang val="en-US"/>
   <c:roundedCorners val="1"/>
+  <c:style val="2"/>
   <c:chart>
     <c:title>
       <c:tx>
@@ -132,7 +142,7 @@
               </a:defRPr>
             </a:pPr>
             <a:r>
-              <a:rPr sz="1300" b="0" i="0" u="none" strike="noStrike">
+              <a:rPr lang="en-US" sz="1300" b="0" i="0" u="none" strike="noStrike">
                 <a:solidFill>
                   <a:srgbClr val="16213E"/>
                 </a:solidFill>
@@ -143,7 +153,6 @@
           </a:p>
         </c:rich>
       </c:tx>
-      <c:layout/>
       <c:overlay val="0"/>
     </c:title>
     <c:autoTitleDeleted val="0"/>
@@ -176,18 +185,26 @@
           <c:invertIfNegative val="0"/>
           <c:dLbls>
             <c:numFmt formatCode="&quot;$&quot;0.0&quot;M&quot;" sourceLinked="0"/>
+            <c:spPr>
+              <a:noFill/>
+              <a:ln>
+                <a:noFill/>
+              </a:ln>
+              <a:effectLst/>
+            </c:spPr>
             <c:txPr>
               <a:bodyPr/>
               <a:lstStyle/>
               <a:p>
                 <a:pPr>
-                  <a:defRPr b="0" i="0" strike="noStrike" sz="1100" u="none">
+                  <a:defRPr sz="1100" b="0" i="0" u="none" strike="noStrike">
                     <a:solidFill>
                       <a:srgbClr val="16213E"/>
                     </a:solidFill>
                     <a:latin typeface="Arial"/>
                   </a:defRPr>
                 </a:pPr>
+                <a:endParaRPr lang="en-US"/>
               </a:p>
             </c:txPr>
             <c:showLegendKey val="0"/>
@@ -197,28 +214,31 @@
             <c:showPercent val="0"/>
             <c:showBubbleSize val="0"/>
             <c:showLeaderLines val="0"/>
+            <c:extLst>
+              <c:ext xmlns:c15="http://schemas.microsoft.com/office/drawing/2012/chart" uri="{CE6537A1-D6FC-4f65-9D91-7224C49458BB}">
+                <c15:showLeaderLines val="0"/>
+              </c:ext>
+            </c:extLst>
           </c:dLbls>
           <c:cat>
-            <c:multiLvlStrRef>
+            <c:strRef>
               <c:f>Sheet1!$A$2:$A$4</c:f>
-              <c:multiLvlStrCache>
+              <c:strCache>
                 <c:ptCount val="3"/>
-                <c:lvl>
-                  <c:pt idx="0">
-                    <c:v>Baseline
+                <c:pt idx="0">
+                  <c:v>Baseline
 (no reassignment)</c:v>
-                  </c:pt>
-                  <c:pt idx="1">
-                    <c:v>Greedy
+                </c:pt>
+                <c:pt idx="1">
+                  <c:v>Greedy
 Reassignment</c:v>
-                  </c:pt>
-                  <c:pt idx="2">
-                    <c:v>OR-Tools
+                </c:pt>
+                <c:pt idx="2">
+                  <c:v>OR-Tools
 Reassignment</c:v>
-                  </c:pt>
-                </c:lvl>
-              </c:multiLvlStrCache>
-            </c:multiLvlStrRef>
+                </c:pt>
+              </c:strCache>
+            </c:strRef>
           </c:cat>
           <c:val>
             <c:numRef>
@@ -238,36 +258,23 @@
               </c:numCache>
             </c:numRef>
           </c:val>
+          <c:extLst>
+            <c:ext xmlns:c16="http://schemas.microsoft.com/office/drawing/2014/chart" uri="{C3380CC4-5D6E-409C-BE32-E72D297353CC}">
+              <c16:uniqueId val="{00000000-FA80-4971-B206-B0D013BC40A0}"/>
+            </c:ext>
+          </c:extLst>
         </c:ser>
         <c:dLbls>
-          <c:numFmt formatCode="&quot;$&quot;0.0&quot;M&quot;" sourceLinked="0"/>
-          <c:txPr>
-            <a:bodyPr/>
-            <a:lstStyle/>
-            <a:p>
-              <a:pPr>
-                <a:defRPr b="0" i="0" strike="noStrike" sz="1100" u="none">
-                  <a:solidFill>
-                    <a:srgbClr val="16213E"/>
-                  </a:solidFill>
-                  <a:latin typeface="Arial"/>
-                </a:defRPr>
-              </a:pPr>
-            </a:p>
-          </c:txPr>
           <c:showLegendKey val="0"/>
           <c:showVal val="1"/>
           <c:showCatName val="0"/>
           <c:showSerName val="0"/>
           <c:showPercent val="0"/>
           <c:showBubbleSize val="0"/>
-          <c:showLeaderLines val="0"/>
         </c:dLbls>
         <c:gapWidth val="40"/>
-        <c:overlap val="0"/>
         <c:axId val="2094734554"/>
         <c:axId val="2094734552"/>
-        <c:axId val="2094734556"/>
       </c:barChart>
       <c:catAx>
         <c:axId val="2094734554"/>
@@ -308,6 +315,7 @@
         <c:crosses val="autoZero"/>
         <c:auto val="1"/>
         <c:lblAlgn val="ctr"/>
+        <c:lblOffset val="100"/>
         <c:noMultiLvlLbl val="1"/>
       </c:catAx>
       <c:valAx>
@@ -370,6 +378,7 @@
     </c:plotArea>
     <c:plotVisOnly val="1"/>
     <c:dispBlanksAs val="span"/>
+    <c:showDLblsOverMax val="1"/>
   </c:chart>
   <c:spPr>
     <a:noFill/>
@@ -406,234 +415,10 @@
           <a:chExt cx="0" cy="0"/>
         </a:xfrm>
       </p:grpSpPr>
-      <p:sp>
-        <p:nvSpPr>
-          <p:cNvPr id="2" name="Header Placeholder 1"/>
-          <p:cNvSpPr>
-            <a:spLocks noGrp="1"/>
-          </p:cNvSpPr>
-          <p:nvPr>
-            <p:ph type="hdr" sz="quarter"/>
-          </p:nvPr>
-        </p:nvSpPr>
-        <p:spPr>
-          <a:xfrm>
-            <a:off x="0" y="0"/>
-            <a:ext cx="2971800" cy="458788"/>
-          </a:xfrm>
-          <a:prstGeom prst="rect">
-            <a:avLst/>
-          </a:prstGeom>
-        </p:spPr>
-        <p:txBody>
-          <a:bodyPr vert="horz" lIns="91440" tIns="45720" rIns="91440" bIns="45720" rtlCol="0"/>
-          <a:lstStyle>
-            <a:lvl1pPr algn="l">
-              <a:defRPr sz="1200"/>
-            </a:lvl1pPr>
-          </a:lstStyle>
-          <a:p>
-            <a:endParaRPr lang="en-US"/>
-          </a:p>
-        </p:txBody>
-      </p:sp>
-      <p:sp>
-        <p:nvSpPr>
-          <p:cNvPr id="3" name="Date Placeholder 2"/>
-          <p:cNvSpPr>
-            <a:spLocks noGrp="1"/>
-          </p:cNvSpPr>
-          <p:nvPr>
-            <p:ph type="dt" idx="1"/>
-          </p:nvPr>
-        </p:nvSpPr>
-        <p:spPr>
-          <a:xfrm>
-            <a:off x="3884613" y="0"/>
-            <a:ext cx="2971800" cy="458788"/>
-          </a:xfrm>
-          <a:prstGeom prst="rect">
-            <a:avLst/>
-          </a:prstGeom>
-        </p:spPr>
-        <p:txBody>
-          <a:bodyPr vert="horz" lIns="91440" tIns="45720" rIns="91440" bIns="45720" rtlCol="0"/>
-          <a:lstStyle>
-            <a:lvl1pPr algn="r">
-              <a:defRPr sz="1200"/>
-            </a:lvl1pPr>
-          </a:lstStyle>
-          <a:p>
-            <a:fld id="{5282F153-3F37-0F45-9E97-73ACFA13230C}" type="datetimeFigureOut">
-              <a:rPr lang="en-US"/>
-              <a:t>7/23/19</a:t>
-            </a:fld>
-            <a:endParaRPr lang="en-US"/>
-          </a:p>
-        </p:txBody>
-      </p:sp>
-      <p:sp>
-        <p:nvSpPr>
-          <p:cNvPr id="4" name="Slide Image Placeholder 3"/>
-          <p:cNvSpPr>
-            <a:spLocks noGrp="1" noRot="1" noChangeAspect="1"/>
-          </p:cNvSpPr>
-          <p:nvPr>
-            <p:ph type="sldImg" idx="2"/>
-          </p:nvPr>
-        </p:nvSpPr>
-        <p:spPr>
-          <a:xfrm>
-            <a:off x="685800" y="1143000"/>
-            <a:ext cx="5486400" cy="3086100"/>
-          </a:xfrm>
-          <a:prstGeom prst="rect">
-            <a:avLst/>
-          </a:prstGeom>
-          <a:noFill/>
-          <a:ln w="12700">
-            <a:solidFill>
-              <a:prstClr val="black"/>
-            </a:solidFill>
-          </a:ln>
-        </p:spPr>
-        <p:txBody>
-          <a:bodyPr vert="horz" lIns="91440" tIns="45720" rIns="91440" bIns="45720" rtlCol="0" anchor="ctr"/>
-          <a:lstStyle/>
-          <a:p>
-            <a:endParaRPr lang="en-US"/>
-          </a:p>
-        </p:txBody>
-      </p:sp>
-      <p:sp>
-        <p:nvSpPr>
-          <p:cNvPr id="5" name="Notes Placeholder 4"/>
-          <p:cNvSpPr>
-            <a:spLocks noGrp="1"/>
-          </p:cNvSpPr>
-          <p:nvPr>
-            <p:ph type="body" sz="quarter" idx="3"/>
-          </p:nvPr>
-        </p:nvSpPr>
-        <p:spPr>
-          <a:xfrm>
-            <a:off x="685800" y="4400550"/>
-            <a:ext cx="5486400" cy="3600450"/>
-          </a:xfrm>
-          <a:prstGeom prst="rect">
-            <a:avLst/>
-          </a:prstGeom>
-        </p:spPr>
-        <p:txBody>
-          <a:bodyPr vert="horz" lIns="91440" tIns="45720" rIns="91440" bIns="45720" rtlCol="0"/>
-          <a:lstStyle/>
-          <a:p>
-            <a:pPr lvl="0"/>
-            <a:r>
-              <a:rPr lang="en-US"/>
-              <a:t>Click to edit Master text styles</a:t>
-            </a:r>
-          </a:p>
-          <a:p>
-            <a:pPr lvl="1"/>
-            <a:r>
-              <a:rPr lang="en-US"/>
-              <a:t>Second level</a:t>
-            </a:r>
-          </a:p>
-          <a:p>
-            <a:pPr lvl="2"/>
-            <a:r>
-              <a:rPr lang="en-US"/>
-              <a:t>Third level</a:t>
-            </a:r>
-          </a:p>
-          <a:p>
-            <a:pPr lvl="3"/>
-            <a:r>
-              <a:rPr lang="en-US"/>
-              <a:t>Fourth level</a:t>
-            </a:r>
-          </a:p>
-          <a:p>
-            <a:pPr lvl="4"/>
-            <a:r>
-              <a:rPr lang="en-US"/>
-              <a:t>Fifth level</a:t>
-            </a:r>
-          </a:p>
-        </p:txBody>
-      </p:sp>
-      <p:sp>
-        <p:nvSpPr>
-          <p:cNvPr id="6" name="Footer Placeholder 5"/>
-          <p:cNvSpPr>
-            <a:spLocks noGrp="1"/>
-          </p:cNvSpPr>
-          <p:nvPr>
-            <p:ph type="ftr" sz="quarter" idx="4"/>
-          </p:nvPr>
-        </p:nvSpPr>
-        <p:spPr>
-          <a:xfrm>
-            <a:off x="0" y="8685213"/>
-            <a:ext cx="2971800" cy="458787"/>
-          </a:xfrm>
-          <a:prstGeom prst="rect">
-            <a:avLst/>
-          </a:prstGeom>
-        </p:spPr>
-        <p:txBody>
-          <a:bodyPr vert="horz" lIns="91440" tIns="45720" rIns="91440" bIns="45720" rtlCol="0" anchor="b"/>
-          <a:lstStyle>
-            <a:lvl1pPr algn="l">
-              <a:defRPr sz="1200"/>
-            </a:lvl1pPr>
-          </a:lstStyle>
-          <a:p>
-            <a:endParaRPr lang="en-US"/>
-          </a:p>
-        </p:txBody>
-      </p:sp>
-      <p:sp>
-        <p:nvSpPr>
-          <p:cNvPr id="7" name="Slide Number Placeholder 6"/>
-          <p:cNvSpPr>
-            <a:spLocks noGrp="1"/>
-          </p:cNvSpPr>
-          <p:nvPr>
-            <p:ph type="sldNum" sz="quarter" idx="5"/>
-          </p:nvPr>
-        </p:nvSpPr>
-        <p:spPr>
-          <a:xfrm>
-            <a:off x="3884613" y="8685213"/>
-            <a:ext cx="2971800" cy="458787"/>
-          </a:xfrm>
-          <a:prstGeom prst="rect">
-            <a:avLst/>
-          </a:prstGeom>
-        </p:spPr>
-        <p:txBody>
-          <a:bodyPr vert="horz" lIns="91440" tIns="45720" rIns="91440" bIns="45720" rtlCol="0" anchor="b"/>
-          <a:lstStyle>
-            <a:lvl1pPr algn="r">
-              <a:defRPr sz="1200"/>
-            </a:lvl1pPr>
-          </a:lstStyle>
-          <a:p>
-            <a:fld id="{CE5E9CC1-C706-0F49-92D6-E571CC5EEA8F}" type="slidenum">
-              <a:rPr lang="en-US"/>
-              <a:t>‹#›</a:t>
-            </a:fld>
-            <a:endParaRPr lang="en-US"/>
-          </a:p>
-        </p:txBody>
-      </p:sp>
     </p:spTree>
     <p:extLst>
       <p:ext uri="{BB962C8B-B14F-4D97-AF65-F5344CB8AC3E}">
-        <p14:creationId xmlns:p14="http://schemas.microsoft.com/office/powerpoint/2010/main" val="1024086991"/>
+        <p14:creationId xmlns:p14="http://schemas.microsoft.com/office/powerpoint/2010/main" val="399132602"/>
       </p:ext>
     </p:extLst>
   </p:cSld>
@@ -777,10 +562,6 @@
           <a:bodyPr/>
           <a:lstStyle/>
           <a:p>
-            <a:r>
-              <a:rPr lang="en-US" dirty="0"/>
-              <a:t/>
-            </a:r>
             <a:endParaRPr lang="en-US" dirty="0"/>
           </a:p>
         </p:txBody>
@@ -865,10 +646,6 @@
           <a:bodyPr/>
           <a:lstStyle/>
           <a:p>
-            <a:r>
-              <a:rPr lang="en-US" dirty="0"/>
-              <a:t/>
-            </a:r>
             <a:endParaRPr lang="en-US" dirty="0"/>
           </a:p>
         </p:txBody>
@@ -953,10 +730,6 @@
           <a:bodyPr/>
           <a:lstStyle/>
           <a:p>
-            <a:r>
-              <a:rPr lang="en-US" dirty="0"/>
-              <a:t/>
-            </a:r>
             <a:endParaRPr lang="en-US" dirty="0"/>
           </a:p>
         </p:txBody>
@@ -1041,10 +814,6 @@
           <a:bodyPr/>
           <a:lstStyle/>
           <a:p>
-            <a:r>
-              <a:rPr lang="en-US" dirty="0"/>
-              <a:t/>
-            </a:r>
             <a:endParaRPr lang="en-US" dirty="0"/>
           </a:p>
         </p:txBody>
@@ -1066,7 +835,7 @@
           <a:p>
             <a:fld id="{F7021451-1387-4CA6-816F-3879F97B5CBC}" type="slidenum">
               <a:rPr lang="en-US"/>
-              <a:t>4</a:t>
+              <a:t>5</a:t>
             </a:fld>
             <a:endParaRPr lang="en-US"/>
           </a:p>
@@ -1129,10 +898,6 @@
           <a:bodyPr/>
           <a:lstStyle/>
           <a:p>
-            <a:r>
-              <a:rPr lang="en-US" dirty="0"/>
-              <a:t/>
-            </a:r>
             <a:endParaRPr lang="en-US" dirty="0"/>
           </a:p>
         </p:txBody>
@@ -1154,7 +919,7 @@
           <a:p>
             <a:fld id="{F7021451-1387-4CA6-816F-3879F97B5CBC}" type="slidenum">
               <a:rPr lang="en-US"/>
-              <a:t>5</a:t>
+              <a:t>6</a:t>
             </a:fld>
             <a:endParaRPr lang="en-US"/>
           </a:p>
@@ -1217,10 +982,6 @@
           <a:bodyPr/>
           <a:lstStyle/>
           <a:p>
-            <a:r>
-              <a:rPr lang="en-US" dirty="0"/>
-              <a:t/>
-            </a:r>
             <a:endParaRPr lang="en-US" dirty="0"/>
           </a:p>
         </p:txBody>
@@ -1242,7 +1003,7 @@
           <a:p>
             <a:fld id="{F7021451-1387-4CA6-816F-3879F97B5CBC}" type="slidenum">
               <a:rPr lang="en-US"/>
-              <a:t>6</a:t>
+              <a:t>8</a:t>
             </a:fld>
             <a:endParaRPr lang="en-US"/>
           </a:p>
@@ -1294,6 +1055,11 @@
 <file path=ppt/slideMasters/slideMaster1.xml><?xml version="1.0" encoding="utf-8"?>
 <p:sldMaster xmlns:a="http://schemas.openxmlformats.org/drawingml/2006/main" xmlns:r="http://schemas.openxmlformats.org/officeDocument/2006/relationships" xmlns:p="http://schemas.openxmlformats.org/presentationml/2006/main">
   <p:cSld>
+    <p:bg>
+      <p:bgRef idx="1001">
+        <a:schemeClr val="bg1"/>
+      </p:bgRef>
+    </p:bg>
     <p:spTree>
       <p:nvGrpSpPr>
         <p:cNvPr id="1" name=""/>
@@ -1576,6 +1342,7 @@
         <a:solidFill>
           <a:srgbClr val="0F1729"/>
         </a:solidFill>
+        <a:effectLst/>
       </p:bgPr>
     </p:bg>
     <p:spTree>
@@ -1677,11 +1444,11 @@
           <a:bodyPr wrap="square" lIns="0" tIns="0" rIns="0" bIns="0" rtlCol="0" anchor="ctr"/>
           <a:lstStyle/>
           <a:p>
-            <a:pPr indent="0" marL="0">
-              <a:buNone/>
-            </a:pPr>
-            <a:r>
-              <a:rPr lang="en-US" sz="1600" b="1" spc="200" kern="0" dirty="0">
+            <a:pPr marL="0" indent="0">
+              <a:buNone/>
+            </a:pPr>
+            <a:r>
+              <a:rPr lang="en-US" sz="1600" b="1" kern="0" spc="200" dirty="0">
                 <a:solidFill>
                   <a:srgbClr val="F2A900"/>
                 </a:solidFill>
@@ -1716,7 +1483,7 @@
           <a:bodyPr wrap="square" lIns="0" tIns="0" rIns="0" bIns="0" rtlCol="0" anchor="ctr"/>
           <a:lstStyle/>
           <a:p>
-            <a:pPr indent="0" marL="0">
+            <a:pPr marL="0" indent="0">
               <a:buNone/>
             </a:pPr>
             <a:r>
@@ -1755,7 +1522,7 @@
           <a:bodyPr wrap="square" lIns="0" tIns="0" rIns="0" bIns="0" rtlCol="0" anchor="ctr"/>
           <a:lstStyle/>
           <a:p>
-            <a:pPr indent="0" marL="0">
+            <a:pPr marL="0" indent="0">
               <a:buNone/>
             </a:pPr>
             <a:r>
@@ -1817,7 +1584,7 @@
           <a:bodyPr wrap="square" lIns="0" tIns="0" rIns="0" bIns="0" rtlCol="0" anchor="ctr"/>
           <a:lstStyle/>
           <a:p>
-            <a:pPr indent="0" marL="0">
+            <a:pPr marL="0" indent="0">
               <a:buNone/>
             </a:pPr>
             <a:r>
@@ -1856,20 +1623,9 @@
           <a:bodyPr wrap="square" lIns="0" tIns="0" rIns="0" bIns="0" rtlCol="0" anchor="ctr"/>
           <a:lstStyle/>
           <a:p>
-            <a:pPr indent="0" marL="0">
-              <a:buNone/>
-            </a:pPr>
-            <a:r>
-              <a:rPr lang="en-US" sz="1300" b="1" dirty="0">
-                <a:solidFill>
-                  <a:srgbClr val="E8EEF7"/>
-                </a:solidFill>
-                <a:latin typeface="Calibri" pitchFamily="34" charset="0"/>
-                <a:ea typeface="Calibri" pitchFamily="34" charset="-122"/>
-                <a:cs typeface="Calibri" pitchFamily="34" charset="-120"/>
-              </a:rPr>
-              <a:t>Anil Naik</a:t>
-            </a:r>
+            <a:pPr marL="0" indent="0">
+              <a:buNone/>
+            </a:pPr>
             <a:endParaRPr lang="en-US" sz="1300" dirty="0"/>
           </a:p>
         </p:txBody>
@@ -1890,6 +1646,7 @@
         <a:solidFill>
           <a:srgbClr val="FFFFFF"/>
         </a:solidFill>
+        <a:effectLst/>
       </p:bgPr>
     </p:bg>
     <p:spTree>
@@ -1927,7 +1684,7 @@
           <a:bodyPr wrap="square" lIns="0" tIns="0" rIns="0" bIns="0" rtlCol="0" anchor="ctr"/>
           <a:lstStyle/>
           <a:p>
-            <a:pPr indent="0" marL="0">
+            <a:pPr marL="0" indent="0">
               <a:buNone/>
             </a:pPr>
             <a:r>
@@ -1966,7 +1723,7 @@
           <a:bodyPr wrap="square" lIns="0" tIns="0" rIns="0" bIns="0" rtlCol="0" anchor="ctr"/>
           <a:lstStyle/>
           <a:p>
-            <a:pPr indent="0" marL="0">
+            <a:pPr marL="0" indent="0">
               <a:buNone/>
             </a:pPr>
             <a:r>
@@ -2025,7 +1782,7 @@
           <a:bodyPr wrap="square" lIns="0" tIns="0" rIns="0" bIns="0" rtlCol="0" anchor="ctr"/>
           <a:lstStyle/>
           <a:p>
-            <a:pPr algn="ctr" indent="0" marL="0">
+            <a:pPr marL="0" indent="0" algn="ctr">
               <a:buNone/>
             </a:pPr>
             <a:r>
@@ -2064,7 +1821,7 @@
           <a:bodyPr wrap="square" lIns="0" tIns="0" rIns="0" bIns="0" rtlCol="0" anchor="ctr"/>
           <a:lstStyle/>
           <a:p>
-            <a:pPr indent="0" marL="0">
+            <a:pPr marL="0" indent="0">
               <a:buNone/>
             </a:pPr>
             <a:r>
@@ -2103,7 +1860,7 @@
           <a:bodyPr wrap="square" lIns="0" tIns="0" rIns="0" bIns="0" rtlCol="0" anchor="ctr"/>
           <a:lstStyle/>
           <a:p>
-            <a:pPr indent="0" marL="0">
+            <a:pPr marL="0" indent="0">
               <a:buNone/>
             </a:pPr>
             <a:r>
@@ -2162,7 +1919,7 @@
           <a:bodyPr wrap="square" lIns="0" tIns="0" rIns="0" bIns="0" rtlCol="0" anchor="ctr"/>
           <a:lstStyle/>
           <a:p>
-            <a:pPr algn="ctr" indent="0" marL="0">
+            <a:pPr marL="0" indent="0" algn="ctr">
               <a:buNone/>
             </a:pPr>
             <a:r>
@@ -2201,7 +1958,7 @@
           <a:bodyPr wrap="square" lIns="0" tIns="0" rIns="0" bIns="0" rtlCol="0" anchor="ctr"/>
           <a:lstStyle/>
           <a:p>
-            <a:pPr indent="0" marL="0">
+            <a:pPr marL="0" indent="0">
               <a:buNone/>
             </a:pPr>
             <a:r>
@@ -2240,7 +1997,7 @@
           <a:bodyPr wrap="square" lIns="0" tIns="0" rIns="0" bIns="0" rtlCol="0" anchor="ctr"/>
           <a:lstStyle/>
           <a:p>
-            <a:pPr indent="0" marL="0">
+            <a:pPr marL="0" indent="0">
               <a:buNone/>
             </a:pPr>
             <a:r>
@@ -2299,7 +2056,7 @@
           <a:bodyPr wrap="square" lIns="0" tIns="0" rIns="0" bIns="0" rtlCol="0" anchor="ctr"/>
           <a:lstStyle/>
           <a:p>
-            <a:pPr algn="ctr" indent="0" marL="0">
+            <a:pPr marL="0" indent="0" algn="ctr">
               <a:buNone/>
             </a:pPr>
             <a:r>
@@ -2338,7 +2095,7 @@
           <a:bodyPr wrap="square" lIns="0" tIns="0" rIns="0" bIns="0" rtlCol="0" anchor="ctr"/>
           <a:lstStyle/>
           <a:p>
-            <a:pPr indent="0" marL="0">
+            <a:pPr marL="0" indent="0">
               <a:buNone/>
             </a:pPr>
             <a:r>
@@ -2377,7 +2134,7 @@
           <a:bodyPr wrap="square" lIns="0" tIns="0" rIns="0" bIns="0" rtlCol="0" anchor="ctr"/>
           <a:lstStyle/>
           <a:p>
-            <a:pPr indent="0" marL="0">
+            <a:pPr marL="0" indent="0">
               <a:buNone/>
             </a:pPr>
             <a:r>
@@ -2436,11 +2193,11 @@
           <a:bodyPr wrap="square" lIns="0" tIns="0" rIns="0" bIns="0" rtlCol="0" anchor="ctr"/>
           <a:lstStyle/>
           <a:p>
-            <a:pPr indent="0" marL="0">
-              <a:buNone/>
-            </a:pPr>
-            <a:r>
-              <a:rPr lang="en-US" sz="1200" b="1" spc="100" kern="0" dirty="0">
+            <a:pPr marL="0" indent="0">
+              <a:buNone/>
+            </a:pPr>
+            <a:r>
+              <a:rPr lang="en-US" sz="1200" b="1" kern="0" spc="100" dirty="0">
                 <a:solidFill>
                   <a:srgbClr val="F2A900"/>
                 </a:solidFill>
@@ -2475,7 +2232,7 @@
           <a:bodyPr wrap="square" lIns="0" tIns="0" rIns="0" bIns="0" rtlCol="0" anchor="ctr"/>
           <a:lstStyle/>
           <a:p>
-            <a:pPr algn="l" indent="0" marL="0">
+            <a:pPr marL="0" indent="0" algn="l">
               <a:buNone/>
             </a:pPr>
             <a:r>
@@ -2514,7 +2271,7 @@
           <a:bodyPr wrap="square" lIns="0" tIns="0" rIns="0" bIns="0" rtlCol="0" anchor="ctr"/>
           <a:lstStyle/>
           <a:p>
-            <a:pPr algn="l" indent="0" marL="0">
+            <a:pPr marL="0" indent="0" algn="l">
               <a:buNone/>
             </a:pPr>
             <a:r>
@@ -2553,7 +2310,7 @@
           <a:bodyPr wrap="square" lIns="0" tIns="0" rIns="0" bIns="0" rtlCol="0" anchor="ctr"/>
           <a:lstStyle/>
           <a:p>
-            <a:pPr algn="l" indent="0" marL="0">
+            <a:pPr marL="0" indent="0" algn="l">
               <a:buNone/>
             </a:pPr>
             <a:r>
@@ -2592,7 +2349,7 @@
           <a:bodyPr wrap="square" lIns="0" tIns="0" rIns="0" bIns="0" rtlCol="0" anchor="ctr"/>
           <a:lstStyle/>
           <a:p>
-            <a:pPr algn="l" indent="0" marL="0">
+            <a:pPr marL="0" indent="0" algn="l">
               <a:buNone/>
             </a:pPr>
             <a:r>
@@ -2631,7 +2388,7 @@
           <a:bodyPr wrap="square" lIns="0" tIns="0" rIns="0" bIns="0" rtlCol="0" anchor="ctr"/>
           <a:lstStyle/>
           <a:p>
-            <a:pPr algn="l" indent="0" marL="0">
+            <a:pPr marL="0" indent="0" algn="l">
               <a:buNone/>
             </a:pPr>
             <a:r>
@@ -2670,7 +2427,7 @@
           <a:bodyPr wrap="square" lIns="0" tIns="0" rIns="0" bIns="0" rtlCol="0" anchor="ctr"/>
           <a:lstStyle/>
           <a:p>
-            <a:pPr algn="l" indent="0" marL="0">
+            <a:pPr marL="0" indent="0" algn="l">
               <a:buNone/>
             </a:pPr>
             <a:r>
@@ -2709,7 +2466,7 @@
           <a:bodyPr wrap="square" lIns="0" tIns="0" rIns="0" bIns="0" rtlCol="0" anchor="ctr"/>
           <a:lstStyle/>
           <a:p>
-            <a:pPr algn="l" indent="0" marL="0">
+            <a:pPr marL="0" indent="0" algn="l">
               <a:buNone/>
             </a:pPr>
             <a:r>
@@ -2748,7 +2505,7 @@
           <a:bodyPr wrap="square" lIns="0" tIns="0" rIns="0" bIns="0" rtlCol="0" anchor="ctr"/>
           <a:lstStyle/>
           <a:p>
-            <a:pPr algn="l" indent="0" marL="0">
+            <a:pPr marL="0" indent="0" algn="l">
               <a:buNone/>
             </a:pPr>
             <a:r>
@@ -2787,7 +2544,7 @@
           <a:bodyPr wrap="square" lIns="0" tIns="0" rIns="0" bIns="0" rtlCol="0" anchor="ctr"/>
           <a:lstStyle/>
           <a:p>
-            <a:pPr indent="0" marL="0">
+            <a:pPr marL="0" indent="0">
               <a:buNone/>
             </a:pPr>
             <a:r>
@@ -2826,7 +2583,7 @@
           <a:bodyPr wrap="square" lIns="0" tIns="0" rIns="0" bIns="0" rtlCol="0" anchor="ctr"/>
           <a:lstStyle/>
           <a:p>
-            <a:pPr algn="r" indent="0" marL="0">
+            <a:pPr marL="0" indent="0" algn="r">
               <a:buNone/>
             </a:pPr>
             <a:r>
@@ -2860,6 +2617,7 @@
         <a:solidFill>
           <a:srgbClr val="FFFFFF"/>
         </a:solidFill>
+        <a:effectLst/>
       </p:bgPr>
     </p:bg>
     <p:spTree>
@@ -2897,7 +2655,7 @@
           <a:bodyPr wrap="square" lIns="0" tIns="0" rIns="0" bIns="0" rtlCol="0" anchor="ctr"/>
           <a:lstStyle/>
           <a:p>
-            <a:pPr indent="0" marL="0">
+            <a:pPr marL="0" indent="0">
               <a:buNone/>
             </a:pPr>
             <a:r>
@@ -2936,7 +2694,7 @@
           <a:bodyPr wrap="square" lIns="0" tIns="0" rIns="0" bIns="0" rtlCol="0" anchor="ctr"/>
           <a:lstStyle/>
           <a:p>
-            <a:pPr indent="0" marL="0">
+            <a:pPr marL="0" indent="0">
               <a:buNone/>
             </a:pPr>
             <a:r>
@@ -2995,11 +2753,11 @@
           <a:bodyPr wrap="square" lIns="0" tIns="0" rIns="0" bIns="0" rtlCol="0" anchor="ctr"/>
           <a:lstStyle/>
           <a:p>
-            <a:pPr indent="0" marL="0">
-              <a:buNone/>
-            </a:pPr>
-            <a:r>
-              <a:rPr lang="en-US" sz="1100" b="1" spc="150" kern="0" dirty="0">
+            <a:pPr marL="0" indent="0">
+              <a:buNone/>
+            </a:pPr>
+            <a:r>
+              <a:rPr lang="en-US" sz="1100" b="1" kern="0" spc="150" dirty="0">
                 <a:solidFill>
                   <a:srgbClr val="F2A900"/>
                 </a:solidFill>
@@ -3034,7 +2792,7 @@
           <a:bodyPr wrap="square" lIns="0" tIns="0" rIns="0" bIns="0" rtlCol="0" anchor="ctr"/>
           <a:lstStyle/>
           <a:p>
-            <a:pPr indent="0" marL="0">
+            <a:pPr marL="0" indent="0">
               <a:buNone/>
             </a:pPr>
             <a:r>
@@ -3073,7 +2831,7 @@
           <a:bodyPr wrap="square" lIns="0" tIns="0" rIns="0" bIns="0" rtlCol="0" anchor="ctr"/>
           <a:lstStyle/>
           <a:p>
-            <a:pPr indent="0" marL="0">
+            <a:pPr marL="0" indent="0">
               <a:buNone/>
             </a:pPr>
             <a:r>
@@ -3132,11 +2890,11 @@
           <a:bodyPr wrap="square" lIns="0" tIns="0" rIns="0" bIns="0" rtlCol="0" anchor="ctr"/>
           <a:lstStyle/>
           <a:p>
-            <a:pPr indent="0" marL="0">
-              <a:buNone/>
-            </a:pPr>
-            <a:r>
-              <a:rPr lang="en-US" sz="1100" b="1" spc="150" kern="0" dirty="0">
+            <a:pPr marL="0" indent="0">
+              <a:buNone/>
+            </a:pPr>
+            <a:r>
+              <a:rPr lang="en-US" sz="1100" b="1" kern="0" spc="150" dirty="0">
                 <a:solidFill>
                   <a:srgbClr val="F2A900"/>
                 </a:solidFill>
@@ -3171,7 +2929,7 @@
           <a:bodyPr wrap="square" lIns="0" tIns="0" rIns="0" bIns="0" rtlCol="0" anchor="ctr"/>
           <a:lstStyle/>
           <a:p>
-            <a:pPr indent="0" marL="0">
+            <a:pPr marL="0" indent="0">
               <a:buNone/>
             </a:pPr>
             <a:r>
@@ -3210,7 +2968,7 @@
           <a:bodyPr wrap="square" lIns="0" tIns="0" rIns="0" bIns="0" rtlCol="0" anchor="ctr"/>
           <a:lstStyle/>
           <a:p>
-            <a:pPr indent="0" marL="0">
+            <a:pPr marL="0" indent="0">
               <a:buNone/>
             </a:pPr>
             <a:r>
@@ -3269,11 +3027,11 @@
           <a:bodyPr wrap="square" lIns="0" tIns="0" rIns="0" bIns="0" rtlCol="0" anchor="ctr"/>
           <a:lstStyle/>
           <a:p>
-            <a:pPr indent="0" marL="0">
-              <a:buNone/>
-            </a:pPr>
-            <a:r>
-              <a:rPr lang="en-US" sz="1100" b="1" spc="150" kern="0" dirty="0">
+            <a:pPr marL="0" indent="0">
+              <a:buNone/>
+            </a:pPr>
+            <a:r>
+              <a:rPr lang="en-US" sz="1100" b="1" kern="0" spc="150" dirty="0">
                 <a:solidFill>
                   <a:srgbClr val="F2A900"/>
                 </a:solidFill>
@@ -3308,7 +3066,7 @@
           <a:bodyPr wrap="square" lIns="0" tIns="0" rIns="0" bIns="0" rtlCol="0" anchor="ctr"/>
           <a:lstStyle/>
           <a:p>
-            <a:pPr indent="0" marL="0">
+            <a:pPr marL="0" indent="0">
               <a:buNone/>
             </a:pPr>
             <a:r>
@@ -3347,7 +3105,7 @@
           <a:bodyPr wrap="square" lIns="0" tIns="0" rIns="0" bIns="0" rtlCol="0" anchor="ctr"/>
           <a:lstStyle/>
           <a:p>
-            <a:pPr indent="0" marL="0">
+            <a:pPr marL="0" indent="0">
               <a:buNone/>
             </a:pPr>
             <a:r>
@@ -3406,7 +3164,7 @@
           <a:bodyPr wrap="square" lIns="0" tIns="0" rIns="0" bIns="0" rtlCol="0" anchor="ctr"/>
           <a:lstStyle/>
           <a:p>
-            <a:pPr indent="0" marL="0">
+            <a:pPr marL="0" indent="0">
               <a:buNone/>
             </a:pPr>
             <a:r>
@@ -3445,7 +3203,7 @@
           <a:bodyPr wrap="square" lIns="0" tIns="0" rIns="0" bIns="0" rtlCol="0" anchor="ctr"/>
           <a:lstStyle/>
           <a:p>
-            <a:pPr indent="0" marL="0">
+            <a:pPr marL="0" indent="0">
               <a:buNone/>
             </a:pPr>
             <a:r>
@@ -3484,7 +3242,7 @@
           <a:bodyPr wrap="square" lIns="0" tIns="0" rIns="0" bIns="0" rtlCol="0" anchor="ctr"/>
           <a:lstStyle/>
           <a:p>
-            <a:pPr algn="r" indent="0" marL="0">
+            <a:pPr marL="0" indent="0" algn="r">
               <a:buNone/>
             </a:pPr>
             <a:r>
@@ -3512,12 +3270,13 @@
 
 <file path=ppt/slides/slide4.xml><?xml version="1.0" encoding="utf-8"?>
 <p:sld xmlns:a="http://schemas.openxmlformats.org/drawingml/2006/main" xmlns:r="http://schemas.openxmlformats.org/officeDocument/2006/relationships" xmlns:p="http://schemas.openxmlformats.org/presentationml/2006/main">
-  <p:cSld name="Slide 4">
+  <p:cSld name="Slide 7">
     <p:bg>
       <p:bgPr>
         <a:solidFill>
           <a:srgbClr val="FFFFFF"/>
         </a:solidFill>
+        <a:effectLst/>
       </p:bgPr>
     </p:bg>
     <p:spTree>
@@ -3536,30 +3295,30 @@
       </p:grpSpPr>
       <p:sp>
         <p:nvSpPr>
-          <p:cNvPr id="2" name="Text 0"/>
-          <p:cNvSpPr/>
-          <p:nvPr/>
-        </p:nvSpPr>
-        <p:spPr>
-          <a:xfrm>
-            <a:off x="548640" y="411480"/>
-            <a:ext cx="7772400" cy="640080"/>
-          </a:xfrm>
-          <a:prstGeom prst="rect">
-            <a:avLst/>
-          </a:prstGeom>
-          <a:noFill/>
-          <a:ln/>
-        </p:spPr>
-        <p:txBody>
-          <a:bodyPr wrap="square" lIns="0" tIns="0" rIns="0" bIns="0" rtlCol="0" anchor="ctr"/>
-          <a:lstStyle/>
-          <a:p>
-            <a:pPr indent="0" marL="0">
-              <a:buNone/>
-            </a:pPr>
-            <a:r>
-              <a:rPr lang="en-US" sz="3200" b="1" dirty="0">
+          <p:cNvPr id="2" name="Text Title"/>
+          <p:cNvSpPr/>
+          <p:nvPr/>
+        </p:nvSpPr>
+        <p:spPr>
+          <a:xfrm>
+            <a:off x="548640" y="365760"/>
+            <a:ext cx="11064240" cy="594360"/>
+          </a:xfrm>
+          <a:prstGeom prst="rect">
+            <a:avLst/>
+          </a:prstGeom>
+          <a:noFill/>
+          <a:ln/>
+        </p:spPr>
+        <p:txBody>
+          <a:bodyPr wrap="square" lIns="0" tIns="0" rIns="0" bIns="0" rtlCol="0" anchor="ctr"/>
+          <a:lstStyle/>
+          <a:p>
+            <a:pPr marL="0" indent="0" algn="l">
+              <a:buNone/>
+            </a:pPr>
+            <a:r>
+              <a:rPr lang="en-US" sz="2800" b="1" dirty="0">
                 <a:solidFill>
                   <a:srgbClr val="16213E"/>
                 </a:solidFill>
@@ -3567,38 +3326,38 @@
                 <a:ea typeface="Cambria" pitchFamily="34" charset="-122"/>
                 <a:cs typeface="Cambria" pitchFamily="34" charset="-120"/>
               </a:rPr>
-              <a:t>The Headline Result</a:t>
-            </a:r>
-            <a:endParaRPr lang="en-US" sz="3200" dirty="0"/>
-          </a:p>
-        </p:txBody>
-      </p:sp>
-      <p:sp>
-        <p:nvSpPr>
-          <p:cNvPr id="3" name="Text 1"/>
-          <p:cNvSpPr/>
-          <p:nvPr/>
-        </p:nvSpPr>
-        <p:spPr>
-          <a:xfrm>
-            <a:off x="548640" y="1051560"/>
-            <a:ext cx="10058400" cy="365760"/>
-          </a:xfrm>
-          <a:prstGeom prst="rect">
-            <a:avLst/>
-          </a:prstGeom>
-          <a:noFill/>
-          <a:ln/>
-        </p:spPr>
-        <p:txBody>
-          <a:bodyPr wrap="square" lIns="0" tIns="0" rIns="0" bIns="0" rtlCol="0" anchor="ctr"/>
-          <a:lstStyle/>
-          <a:p>
-            <a:pPr indent="0" marL="0">
-              <a:buNone/>
-            </a:pPr>
-            <a:r>
-              <a:rPr lang="en-US" sz="1400" dirty="0">
+              <a:t>Proposed Hybrid Optimization Solution</a:t>
+            </a:r>
+            <a:endParaRPr lang="en-US" sz="2800" dirty="0"/>
+          </a:p>
+        </p:txBody>
+      </p:sp>
+      <p:sp>
+        <p:nvSpPr>
+          <p:cNvPr id="3" name="Text Subtitle"/>
+          <p:cNvSpPr/>
+          <p:nvPr/>
+        </p:nvSpPr>
+        <p:spPr>
+          <a:xfrm>
+            <a:off x="548640" y="990600"/>
+            <a:ext cx="11064240" cy="365760"/>
+          </a:xfrm>
+          <a:prstGeom prst="rect">
+            <a:avLst/>
+          </a:prstGeom>
+          <a:noFill/>
+          <a:ln/>
+        </p:spPr>
+        <p:txBody>
+          <a:bodyPr wrap="square" lIns="0" tIns="0" rIns="0" bIns="0" rtlCol="0" anchor="ctr"/>
+          <a:lstStyle/>
+          <a:p>
+            <a:pPr marL="0" indent="0" algn="l">
+              <a:buNone/>
+            </a:pPr>
+            <a:r>
+              <a:rPr lang="en-US" sz="1350" dirty="0">
                 <a:solidFill>
                   <a:srgbClr val="44506A"/>
                 </a:solidFill>
@@ -3606,233 +3365,315 @@
                 <a:ea typeface="Calibri" pitchFamily="34" charset="-122"/>
                 <a:cs typeface="Calibri" pitchFamily="34" charset="-120"/>
               </a:rPr>
-              <a:t>Full 25,193-order dataset — solved exactly by OR-Tools in under 3 seconds</a:t>
-            </a:r>
-            <a:endParaRPr lang="en-US" sz="1400" dirty="0"/>
-          </a:p>
-        </p:txBody>
-      </p:sp>
-      <p:sp>
-        <p:nvSpPr>
-          <p:cNvPr id="4" name="Text 2"/>
-          <p:cNvSpPr/>
-          <p:nvPr/>
-        </p:nvSpPr>
-        <p:spPr>
-          <a:xfrm>
-            <a:off x="548640" y="1600200"/>
-            <a:ext cx="3291840" cy="914400"/>
-          </a:xfrm>
-          <a:prstGeom prst="rect">
-            <a:avLst/>
-          </a:prstGeom>
-          <a:noFill/>
-          <a:ln/>
-        </p:spPr>
-        <p:txBody>
-          <a:bodyPr wrap="square" lIns="0" tIns="0" rIns="0" bIns="0" rtlCol="0" anchor="ctr"/>
-          <a:lstStyle/>
-          <a:p>
-            <a:pPr algn="l" indent="0" marL="0">
-              <a:buNone/>
-            </a:pPr>
-            <a:r>
-              <a:rPr lang="en-US" sz="4000" b="1" dirty="0">
-                <a:solidFill>
-                  <a:srgbClr val="F2A900"/>
+              <a:t>From raw orders to plant assignments — classical and quantum optimization feeding one recommendation, surfaced through a live dashboard and AI assistant.</a:t>
+            </a:r>
+            <a:endParaRPr lang="en-US" sz="1350" dirty="0"/>
+          </a:p>
+        </p:txBody>
+      </p:sp>
+      <p:sp>
+        <p:nvSpPr>
+          <p:cNvPr id="4" name="FlowBox4"/>
+          <p:cNvSpPr/>
+          <p:nvPr/>
+        </p:nvSpPr>
+        <p:spPr>
+          <a:xfrm>
+            <a:off x="698640" y="1531620"/>
+            <a:ext cx="4400000" cy="438912"/>
+          </a:xfrm>
+          <a:prstGeom prst="roundRect">
+            <a:avLst>
+              <a:gd name="adj" fmla="val 8000"/>
+            </a:avLst>
+          </a:prstGeom>
+          <a:solidFill>
+            <a:srgbClr val="F4F7FC"/>
+          </a:solidFill>
+          <a:ln/>
+        </p:spPr>
+        <p:txBody>
+          <a:bodyPr/>
+          <a:lstStyle/>
+          <a:p>
+            <a:endParaRPr lang="en-US"/>
+          </a:p>
+        </p:txBody>
+      </p:sp>
+      <p:sp>
+        <p:nvSpPr>
+          <p:cNvPr id="5" name="FlowText5"/>
+          <p:cNvSpPr/>
+          <p:nvPr/>
+        </p:nvSpPr>
+        <p:spPr>
+          <a:xfrm>
+            <a:off x="790080" y="1531620"/>
+            <a:ext cx="4217120" cy="438912"/>
+          </a:xfrm>
+          <a:prstGeom prst="rect">
+            <a:avLst/>
+          </a:prstGeom>
+          <a:noFill/>
+          <a:ln/>
+        </p:spPr>
+        <p:txBody>
+          <a:bodyPr wrap="square" lIns="0" tIns="0" rIns="0" bIns="0" rtlCol="0" anchor="ctr"/>
+          <a:lstStyle/>
+          <a:p>
+            <a:pPr marL="0" indent="0" algn="ctr">
+              <a:buNone/>
+            </a:pPr>
+            <a:r>
+              <a:rPr lang="en-US" sz="1500" b="1" dirty="0">
+                <a:solidFill>
+                  <a:srgbClr val="16213E"/>
                 </a:solidFill>
                 <a:latin typeface="Cambria" pitchFamily="34" charset="0"/>
                 <a:ea typeface="Cambria" pitchFamily="34" charset="-122"/>
                 <a:cs typeface="Cambria" pitchFamily="34" charset="-120"/>
               </a:rPr>
-              <a:t>$7.5M</a:t>
-            </a:r>
-            <a:endParaRPr lang="en-US" sz="4000" dirty="0"/>
-          </a:p>
-        </p:txBody>
-      </p:sp>
-      <p:sp>
-        <p:nvSpPr>
-          <p:cNvPr id="5" name="Text 3"/>
-          <p:cNvSpPr/>
-          <p:nvPr/>
-        </p:nvSpPr>
-        <p:spPr>
-          <a:xfrm>
-            <a:off x="548640" y="2377440"/>
-            <a:ext cx="3291840" cy="457200"/>
-          </a:xfrm>
-          <a:prstGeom prst="rect">
-            <a:avLst/>
-          </a:prstGeom>
-          <a:noFill/>
-          <a:ln/>
-        </p:spPr>
-        <p:txBody>
-          <a:bodyPr wrap="square" lIns="0" tIns="0" rIns="0" bIns="0" rtlCol="0" anchor="ctr"/>
-          <a:lstStyle/>
-          <a:p>
-            <a:pPr algn="l" indent="0" marL="0">
-              <a:buNone/>
-            </a:pPr>
-            <a:r>
-              <a:rPr lang="en-US" sz="1200" dirty="0">
-                <a:solidFill>
-                  <a:srgbClr val="44506A"/>
-                </a:solidFill>
-                <a:latin typeface="Calibri" pitchFamily="34" charset="0"/>
-                <a:ea typeface="Calibri" pitchFamily="34" charset="-122"/>
-                <a:cs typeface="Calibri" pitchFamily="34" charset="-120"/>
-              </a:rPr>
-              <a:t>shipping cost cut, same revenue</a:t>
-            </a:r>
-            <a:endParaRPr lang="en-US" sz="1200" dirty="0"/>
-          </a:p>
-        </p:txBody>
-      </p:sp>
-      <p:sp>
-        <p:nvSpPr>
-          <p:cNvPr id="6" name="Text 4"/>
-          <p:cNvSpPr/>
-          <p:nvPr/>
-        </p:nvSpPr>
-        <p:spPr>
-          <a:xfrm>
-            <a:off x="3931920" y="1600200"/>
-            <a:ext cx="3291840" cy="914400"/>
-          </a:xfrm>
-          <a:prstGeom prst="rect">
-            <a:avLst/>
-          </a:prstGeom>
-          <a:noFill/>
-          <a:ln/>
-        </p:spPr>
-        <p:txBody>
-          <a:bodyPr wrap="square" lIns="0" tIns="0" rIns="0" bIns="0" rtlCol="0" anchor="ctr"/>
-          <a:lstStyle/>
-          <a:p>
-            <a:pPr algn="l" indent="0" marL="0">
-              <a:buNone/>
-            </a:pPr>
-            <a:r>
-              <a:rPr lang="en-US" sz="4000" b="1" dirty="0">
+              <a:t>Customer Orders</a:t>
+            </a:r>
+            <a:endParaRPr lang="en-US" sz="1500" dirty="0"/>
+          </a:p>
+        </p:txBody>
+      </p:sp>
+      <p:sp>
+        <p:nvSpPr>
+          <p:cNvPr id="6" name="Arrow6"/>
+          <p:cNvSpPr/>
+          <p:nvPr/>
+        </p:nvSpPr>
+        <p:spPr>
+          <a:xfrm>
+            <a:off x="698640" y="1970532"/>
+            <a:ext cx="4400000" cy="182880"/>
+          </a:xfrm>
+          <a:prstGeom prst="rect">
+            <a:avLst/>
+          </a:prstGeom>
+          <a:noFill/>
+          <a:ln/>
+        </p:spPr>
+        <p:txBody>
+          <a:bodyPr wrap="square" lIns="0" tIns="0" rIns="0" bIns="0" rtlCol="0" anchor="ctr"/>
+          <a:lstStyle/>
+          <a:p>
+            <a:pPr marL="0" indent="0" algn="ctr">
+              <a:buNone/>
+            </a:pPr>
+            <a:r>
+              <a:rPr lang="en-US" sz="1400" b="1" dirty="0">
                 <a:solidFill>
                   <a:srgbClr val="F2A900"/>
+                </a:solidFill>
+                <a:latin typeface="Calibri" pitchFamily="34" charset="0"/>
+                <a:ea typeface="Calibri" pitchFamily="34" charset="-122"/>
+                <a:cs typeface="Calibri" pitchFamily="34" charset="-120"/>
+              </a:rPr>
+              <a:t>▼</a:t>
+            </a:r>
+            <a:endParaRPr lang="en-US" sz="1400" dirty="0"/>
+          </a:p>
+        </p:txBody>
+      </p:sp>
+      <p:sp>
+        <p:nvSpPr>
+          <p:cNvPr id="7" name="FlowBox7"/>
+          <p:cNvSpPr/>
+          <p:nvPr/>
+        </p:nvSpPr>
+        <p:spPr>
+          <a:xfrm>
+            <a:off x="698640" y="2153412"/>
+            <a:ext cx="4400000" cy="548640"/>
+          </a:xfrm>
+          <a:prstGeom prst="roundRect">
+            <a:avLst>
+              <a:gd name="adj" fmla="val 8000"/>
+            </a:avLst>
+          </a:prstGeom>
+          <a:solidFill>
+            <a:srgbClr val="F4F7FC"/>
+          </a:solidFill>
+          <a:ln/>
+        </p:spPr>
+        <p:txBody>
+          <a:bodyPr/>
+          <a:lstStyle/>
+          <a:p>
+            <a:endParaRPr lang="en-US"/>
+          </a:p>
+        </p:txBody>
+      </p:sp>
+      <p:sp>
+        <p:nvSpPr>
+          <p:cNvPr id="8" name="FlowText8"/>
+          <p:cNvSpPr/>
+          <p:nvPr/>
+        </p:nvSpPr>
+        <p:spPr>
+          <a:xfrm>
+            <a:off x="790080" y="2153412"/>
+            <a:ext cx="4217120" cy="548640"/>
+          </a:xfrm>
+          <a:prstGeom prst="rect">
+            <a:avLst/>
+          </a:prstGeom>
+          <a:noFill/>
+          <a:ln/>
+        </p:spPr>
+        <p:txBody>
+          <a:bodyPr wrap="square" lIns="0" tIns="0" rIns="0" bIns="0" rtlCol="0" anchor="ctr"/>
+          <a:lstStyle/>
+          <a:p>
+            <a:pPr marL="0" indent="0" algn="ctr">
+              <a:buNone/>
+            </a:pPr>
+            <a:r>
+              <a:rPr lang="en-US" sz="1350" b="1" dirty="0">
+                <a:solidFill>
+                  <a:srgbClr val="16213E"/>
                 </a:solidFill>
                 <a:latin typeface="Cambria" pitchFamily="34" charset="0"/>
                 <a:ea typeface="Cambria" pitchFamily="34" charset="-122"/>
                 <a:cs typeface="Cambria" pitchFamily="34" charset="-120"/>
               </a:rPr>
-              <a:t>99.54%</a:t>
-            </a:r>
-            <a:endParaRPr lang="en-US" sz="4000" dirty="0"/>
-          </a:p>
-        </p:txBody>
-      </p:sp>
-      <p:sp>
-        <p:nvSpPr>
-          <p:cNvPr id="7" name="Text 5"/>
-          <p:cNvSpPr/>
-          <p:nvPr/>
-        </p:nvSpPr>
-        <p:spPr>
-          <a:xfrm>
-            <a:off x="3931920" y="2377440"/>
-            <a:ext cx="3291840" cy="457200"/>
-          </a:xfrm>
-          <a:prstGeom prst="rect">
-            <a:avLst/>
-          </a:prstGeom>
-          <a:noFill/>
-          <a:ln/>
-        </p:spPr>
-        <p:txBody>
-          <a:bodyPr wrap="square" lIns="0" tIns="0" rIns="0" bIns="0" rtlCol="0" anchor="ctr"/>
-          <a:lstStyle/>
-          <a:p>
-            <a:pPr algn="l" indent="0" marL="0">
-              <a:buNone/>
-            </a:pPr>
-            <a:r>
-              <a:rPr lang="en-US" sz="1200" dirty="0">
-                <a:solidFill>
-                  <a:srgbClr val="44506A"/>
-                </a:solidFill>
-                <a:latin typeface="Calibri" pitchFamily="34" charset="0"/>
-                <a:ea typeface="Calibri" pitchFamily="34" charset="-122"/>
-                <a:cs typeface="Calibri" pitchFamily="34" charset="-120"/>
-              </a:rPr>
-              <a:t>fill rate (from 98.92%)</a:t>
-            </a:r>
-            <a:endParaRPr lang="en-US" sz="1200" dirty="0"/>
-          </a:p>
-        </p:txBody>
-      </p:sp>
-      <p:sp>
-        <p:nvSpPr>
-          <p:cNvPr id="8" name="Text 6"/>
-          <p:cNvSpPr/>
-          <p:nvPr/>
-        </p:nvSpPr>
-        <p:spPr>
-          <a:xfrm>
-            <a:off x="7315200" y="1600200"/>
-            <a:ext cx="3291840" cy="914400"/>
-          </a:xfrm>
-          <a:prstGeom prst="rect">
-            <a:avLst/>
-          </a:prstGeom>
-          <a:noFill/>
-          <a:ln/>
-        </p:spPr>
-        <p:txBody>
-          <a:bodyPr wrap="square" lIns="0" tIns="0" rIns="0" bIns="0" rtlCol="0" anchor="ctr"/>
-          <a:lstStyle/>
-          <a:p>
-            <a:pPr algn="l" indent="0" marL="0">
-              <a:buNone/>
-            </a:pPr>
-            <a:r>
-              <a:rPr lang="en-US" sz="4000" b="1" dirty="0">
+              <a:t>Data Processing</a:t>
+            </a:r>
+            <a:endParaRPr lang="en-US" sz="1350" dirty="0"/>
+          </a:p>
+          <a:p>
+            <a:pPr marL="0" indent="0" algn="ctr">
+              <a:buNone/>
+            </a:pPr>
+            <a:r>
+              <a:rPr lang="en-US" sz="1050" b="1" dirty="0">
+                <a:solidFill>
+                  <a:srgbClr val="16213E"/>
+                </a:solidFill>
+                <a:latin typeface="Calibri" pitchFamily="34" charset="0"/>
+                <a:ea typeface="Calibri" pitchFamily="34" charset="-122"/>
+                <a:cs typeface="Calibri" pitchFamily="34" charset="-120"/>
+              </a:rPr>
+              <a:t>(Data Cleaning &amp; Validation)</a:t>
+            </a:r>
+            <a:endParaRPr lang="en-US" sz="1050" dirty="0"/>
+          </a:p>
+        </p:txBody>
+      </p:sp>
+      <p:sp>
+        <p:nvSpPr>
+          <p:cNvPr id="9" name="Arrow9"/>
+          <p:cNvSpPr/>
+          <p:nvPr/>
+        </p:nvSpPr>
+        <p:spPr>
+          <a:xfrm>
+            <a:off x="698640" y="2702052"/>
+            <a:ext cx="4400000" cy="182880"/>
+          </a:xfrm>
+          <a:prstGeom prst="rect">
+            <a:avLst/>
+          </a:prstGeom>
+          <a:noFill/>
+          <a:ln/>
+        </p:spPr>
+        <p:txBody>
+          <a:bodyPr wrap="square" lIns="0" tIns="0" rIns="0" bIns="0" rtlCol="0" anchor="ctr"/>
+          <a:lstStyle/>
+          <a:p>
+            <a:pPr marL="0" indent="0" algn="ctr">
+              <a:buNone/>
+            </a:pPr>
+            <a:r>
+              <a:rPr lang="en-US" sz="1400" b="1" dirty="0">
                 <a:solidFill>
                   <a:srgbClr val="F2A900"/>
+                </a:solidFill>
+                <a:latin typeface="Calibri" pitchFamily="34" charset="0"/>
+                <a:ea typeface="Calibri" pitchFamily="34" charset="-122"/>
+                <a:cs typeface="Calibri" pitchFamily="34" charset="-120"/>
+              </a:rPr>
+              <a:t>▼</a:t>
+            </a:r>
+            <a:endParaRPr lang="en-US" sz="1400" dirty="0"/>
+          </a:p>
+        </p:txBody>
+      </p:sp>
+      <p:sp>
+        <p:nvSpPr>
+          <p:cNvPr id="10" name="ClassicalBox"/>
+          <p:cNvSpPr/>
+          <p:nvPr/>
+        </p:nvSpPr>
+        <p:spPr>
+          <a:xfrm>
+            <a:off x="698640" y="2884932"/>
+            <a:ext cx="2000000" cy="640080"/>
+          </a:xfrm>
+          <a:prstGeom prst="roundRect">
+            <a:avLst>
+              <a:gd name="adj" fmla="val 8000"/>
+            </a:avLst>
+          </a:prstGeom>
+          <a:solidFill>
+            <a:srgbClr val="F4F7FC"/>
+          </a:solidFill>
+          <a:ln/>
+        </p:spPr>
+        <p:txBody>
+          <a:bodyPr/>
+          <a:lstStyle/>
+          <a:p>
+            <a:endParaRPr lang="en-US"/>
+          </a:p>
+        </p:txBody>
+      </p:sp>
+      <p:sp>
+        <p:nvSpPr>
+          <p:cNvPr id="11" name="ClassicalText"/>
+          <p:cNvSpPr/>
+          <p:nvPr/>
+        </p:nvSpPr>
+        <p:spPr>
+          <a:xfrm>
+            <a:off x="744360" y="2884932"/>
+            <a:ext cx="1908560" cy="640080"/>
+          </a:xfrm>
+          <a:prstGeom prst="rect">
+            <a:avLst/>
+          </a:prstGeom>
+          <a:noFill/>
+          <a:ln/>
+        </p:spPr>
+        <p:txBody>
+          <a:bodyPr wrap="square" lIns="0" tIns="0" rIns="0" bIns="0" rtlCol="0" anchor="ctr"/>
+          <a:lstStyle/>
+          <a:p>
+            <a:pPr marL="0" indent="0" algn="ctr">
+              <a:buNone/>
+            </a:pPr>
+            <a:r>
+              <a:rPr lang="en-US" sz="1150" b="1" dirty="0">
+                <a:solidFill>
+                  <a:srgbClr val="16213E"/>
                 </a:solidFill>
                 <a:latin typeface="Cambria" pitchFamily="34" charset="0"/>
                 <a:ea typeface="Cambria" pitchFamily="34" charset="-122"/>
                 <a:cs typeface="Cambria" pitchFamily="34" charset="-120"/>
               </a:rPr>
-              <a:t>18,899</a:t>
-            </a:r>
-            <a:endParaRPr lang="en-US" sz="4000" dirty="0"/>
-          </a:p>
-        </p:txBody>
-      </p:sp>
-      <p:sp>
-        <p:nvSpPr>
-          <p:cNvPr id="9" name="Text 7"/>
-          <p:cNvSpPr/>
-          <p:nvPr/>
-        </p:nvSpPr>
-        <p:spPr>
-          <a:xfrm>
-            <a:off x="7315200" y="2377440"/>
-            <a:ext cx="3291840" cy="457200"/>
-          </a:xfrm>
-          <a:prstGeom prst="rect">
-            <a:avLst/>
-          </a:prstGeom>
-          <a:noFill/>
-          <a:ln/>
-        </p:spPr>
-        <p:txBody>
-          <a:bodyPr wrap="square" lIns="0" tIns="0" rIns="0" bIns="0" rtlCol="0" anchor="ctr"/>
-          <a:lstStyle/>
-          <a:p>
-            <a:pPr algn="l" indent="0" marL="0">
-              <a:buNone/>
-            </a:pPr>
-            <a:r>
-              <a:rPr lang="en-US" sz="1200" dirty="0">
+              <a:t>Classical Optimization</a:t>
+            </a:r>
+            <a:endParaRPr lang="en-US" sz="1150" dirty="0"/>
+          </a:p>
+          <a:p>
+            <a:pPr marL="0" indent="0" algn="ctr">
+              <a:buNone/>
+            </a:pPr>
+            <a:r>
+              <a:rPr lang="en-US" sz="950" dirty="0">
                 <a:solidFill>
                   <a:srgbClr val="44506A"/>
                 </a:solidFill>
@@ -3840,74 +3681,483 @@
                 <a:ea typeface="Calibri" pitchFamily="34" charset="-122"/>
                 <a:cs typeface="Calibri" pitchFamily="34" charset="-120"/>
               </a:rPr>
-              <a:t>orders redirected to a better plant</a:t>
-            </a:r>
-            <a:endParaRPr lang="en-US" sz="1200" dirty="0"/>
-          </a:p>
-        </p:txBody>
-      </p:sp>
-      <p:graphicFrame>
-        <p:nvGraphicFramePr>
-          <p:cNvPr id="10" name="Chart 0" descr=""/>
-          <p:cNvGraphicFramePr/>
-          <p:nvPr/>
-        </p:nvGraphicFramePr>
-        <p:xfrm>
-          <a:off x="548640" y="2880360"/>
-          <a:ext cx="6675120" cy="3383280"/>
-        </p:xfrm>
-        <a:graphic xmlns:a="http://schemas.openxmlformats.org/drawingml/2006/main">
-          <a:graphicData uri="http://schemas.openxmlformats.org/drawingml/2006/chart">
-            <c:chart xmlns:c="http://schemas.openxmlformats.org/drawingml/2006/chart" r:id="rId1"/>
-          </a:graphicData>
-        </a:graphic>
-      </p:graphicFrame>
-      <p:sp>
-        <p:nvSpPr>
-          <p:cNvPr id="11" name="Shape 8"/>
-          <p:cNvSpPr/>
-          <p:nvPr/>
-        </p:nvSpPr>
-        <p:spPr>
-          <a:xfrm>
-            <a:off x="7498080" y="2880360"/>
-            <a:ext cx="4114800" cy="3383280"/>
-          </a:xfrm>
-          <a:prstGeom prst="rect">
-            <a:avLst/>
+              <a:t>(Google OR-Tools)</a:t>
+            </a:r>
+            <a:endParaRPr lang="en-US" sz="950" dirty="0"/>
+          </a:p>
+        </p:txBody>
+      </p:sp>
+      <p:sp>
+        <p:nvSpPr>
+          <p:cNvPr id="12" name="PlusSign"/>
+          <p:cNvSpPr/>
+          <p:nvPr/>
+        </p:nvSpPr>
+        <p:spPr>
+          <a:xfrm>
+            <a:off x="2698640" y="2884932"/>
+            <a:ext cx="400000" cy="640080"/>
+          </a:xfrm>
+          <a:prstGeom prst="rect">
+            <a:avLst/>
+          </a:prstGeom>
+          <a:noFill/>
+          <a:ln/>
+        </p:spPr>
+        <p:txBody>
+          <a:bodyPr wrap="square" lIns="0" tIns="0" rIns="0" bIns="0" rtlCol="0" anchor="ctr"/>
+          <a:lstStyle/>
+          <a:p>
+            <a:pPr marL="0" indent="0" algn="ctr">
+              <a:buNone/>
+            </a:pPr>
+            <a:r>
+              <a:rPr lang="en-US" sz="1800" b="1" dirty="0">
+                <a:solidFill>
+                  <a:srgbClr val="F2A900"/>
+                </a:solidFill>
+                <a:latin typeface="Calibri" pitchFamily="34" charset="0"/>
+                <a:ea typeface="Calibri" pitchFamily="34" charset="-122"/>
+                <a:cs typeface="Calibri" pitchFamily="34" charset="-120"/>
+              </a:rPr>
+              <a:t>+</a:t>
+            </a:r>
+            <a:endParaRPr lang="en-US" sz="1800" dirty="0"/>
+          </a:p>
+        </p:txBody>
+      </p:sp>
+      <p:sp>
+        <p:nvSpPr>
+          <p:cNvPr id="13" name="QuantumBox"/>
+          <p:cNvSpPr/>
+          <p:nvPr/>
+        </p:nvSpPr>
+        <p:spPr>
+          <a:xfrm>
+            <a:off x="3098640" y="2884932"/>
+            <a:ext cx="2000000" cy="640080"/>
+          </a:xfrm>
+          <a:prstGeom prst="roundRect">
+            <a:avLst>
+              <a:gd name="adj" fmla="val 8000"/>
+            </a:avLst>
+          </a:prstGeom>
+          <a:solidFill>
+            <a:srgbClr val="F4F7FC"/>
+          </a:solidFill>
+          <a:ln/>
+        </p:spPr>
+        <p:txBody>
+          <a:bodyPr/>
+          <a:lstStyle/>
+          <a:p>
+            <a:endParaRPr lang="en-US"/>
+          </a:p>
+        </p:txBody>
+      </p:sp>
+      <p:sp>
+        <p:nvSpPr>
+          <p:cNvPr id="14" name="QuantumText"/>
+          <p:cNvSpPr/>
+          <p:nvPr/>
+        </p:nvSpPr>
+        <p:spPr>
+          <a:xfrm>
+            <a:off x="3144360" y="2884932"/>
+            <a:ext cx="1908560" cy="640080"/>
+          </a:xfrm>
+          <a:prstGeom prst="rect">
+            <a:avLst/>
+          </a:prstGeom>
+          <a:noFill/>
+          <a:ln/>
+        </p:spPr>
+        <p:txBody>
+          <a:bodyPr wrap="square" lIns="0" tIns="0" rIns="0" bIns="0" rtlCol="0" anchor="ctr"/>
+          <a:lstStyle/>
+          <a:p>
+            <a:pPr marL="0" indent="0" algn="ctr">
+              <a:buNone/>
+            </a:pPr>
+            <a:r>
+              <a:rPr lang="en-US" sz="1150" b="1" dirty="0">
+                <a:solidFill>
+                  <a:srgbClr val="16213E"/>
+                </a:solidFill>
+                <a:latin typeface="Cambria" pitchFamily="34" charset="0"/>
+                <a:ea typeface="Cambria" pitchFamily="34" charset="-122"/>
+                <a:cs typeface="Cambria" pitchFamily="34" charset="-120"/>
+              </a:rPr>
+              <a:t>Quantum Optimization</a:t>
+            </a:r>
+            <a:endParaRPr lang="en-US" sz="1150" dirty="0"/>
+          </a:p>
+          <a:p>
+            <a:pPr marL="0" indent="0" algn="ctr">
+              <a:buNone/>
+            </a:pPr>
+            <a:r>
+              <a:rPr lang="en-US" sz="950" dirty="0">
+                <a:solidFill>
+                  <a:srgbClr val="44506A"/>
+                </a:solidFill>
+                <a:latin typeface="Calibri" pitchFamily="34" charset="0"/>
+                <a:ea typeface="Calibri" pitchFamily="34" charset="-122"/>
+                <a:cs typeface="Calibri" pitchFamily="34" charset="-120"/>
+              </a:rPr>
+              <a:t>(QAOA using Qiskit)</a:t>
+            </a:r>
+            <a:endParaRPr lang="en-US" sz="950" dirty="0"/>
+          </a:p>
+        </p:txBody>
+      </p:sp>
+      <p:sp>
+        <p:nvSpPr>
+          <p:cNvPr id="15" name="Arrow15"/>
+          <p:cNvSpPr/>
+          <p:nvPr/>
+        </p:nvSpPr>
+        <p:spPr>
+          <a:xfrm>
+            <a:off x="698640" y="3525012"/>
+            <a:ext cx="4400000" cy="182880"/>
+          </a:xfrm>
+          <a:prstGeom prst="rect">
+            <a:avLst/>
+          </a:prstGeom>
+          <a:noFill/>
+          <a:ln/>
+        </p:spPr>
+        <p:txBody>
+          <a:bodyPr wrap="square" lIns="0" tIns="0" rIns="0" bIns="0" rtlCol="0" anchor="ctr"/>
+          <a:lstStyle/>
+          <a:p>
+            <a:pPr marL="0" indent="0" algn="ctr">
+              <a:buNone/>
+            </a:pPr>
+            <a:r>
+              <a:rPr lang="en-US" sz="1400" b="1" dirty="0">
+                <a:solidFill>
+                  <a:srgbClr val="F2A900"/>
+                </a:solidFill>
+                <a:latin typeface="Calibri" pitchFamily="34" charset="0"/>
+                <a:ea typeface="Calibri" pitchFamily="34" charset="-122"/>
+                <a:cs typeface="Calibri" pitchFamily="34" charset="-120"/>
+              </a:rPr>
+              <a:t>▼</a:t>
+            </a:r>
+            <a:endParaRPr lang="en-US" sz="1400" dirty="0"/>
+          </a:p>
+        </p:txBody>
+      </p:sp>
+      <p:sp>
+        <p:nvSpPr>
+          <p:cNvPr id="16" name="FlowBox16"/>
+          <p:cNvSpPr/>
+          <p:nvPr/>
+        </p:nvSpPr>
+        <p:spPr>
+          <a:xfrm>
+            <a:off x="698640" y="3707892"/>
+            <a:ext cx="4400000" cy="438912"/>
+          </a:xfrm>
+          <a:prstGeom prst="roundRect">
+            <a:avLst>
+              <a:gd name="adj" fmla="val 8000"/>
+            </a:avLst>
+          </a:prstGeom>
+          <a:solidFill>
+            <a:srgbClr val="F2A900"/>
+          </a:solidFill>
+          <a:ln/>
+        </p:spPr>
+        <p:txBody>
+          <a:bodyPr/>
+          <a:lstStyle/>
+          <a:p>
+            <a:endParaRPr lang="en-US"/>
+          </a:p>
+        </p:txBody>
+      </p:sp>
+      <p:sp>
+        <p:nvSpPr>
+          <p:cNvPr id="17" name="FlowText17"/>
+          <p:cNvSpPr/>
+          <p:nvPr/>
+        </p:nvSpPr>
+        <p:spPr>
+          <a:xfrm>
+            <a:off x="790080" y="3707892"/>
+            <a:ext cx="4217120" cy="438912"/>
+          </a:xfrm>
+          <a:prstGeom prst="rect">
+            <a:avLst/>
+          </a:prstGeom>
+          <a:noFill/>
+          <a:ln/>
+        </p:spPr>
+        <p:txBody>
+          <a:bodyPr wrap="square" lIns="0" tIns="0" rIns="0" bIns="0" rtlCol="0" anchor="ctr"/>
+          <a:lstStyle/>
+          <a:p>
+            <a:pPr marL="0" indent="0" algn="ctr">
+              <a:buNone/>
+            </a:pPr>
+            <a:r>
+              <a:rPr lang="en-US" sz="1350" b="1" dirty="0">
+                <a:solidFill>
+                  <a:srgbClr val="16213E"/>
+                </a:solidFill>
+                <a:latin typeface="Cambria" pitchFamily="34" charset="0"/>
+                <a:ea typeface="Cambria" pitchFamily="34" charset="-122"/>
+                <a:cs typeface="Cambria" pitchFamily="34" charset="-120"/>
+              </a:rPr>
+              <a:t>Best Warehouse Assignment</a:t>
+            </a:r>
+            <a:endParaRPr lang="en-US" sz="1350" dirty="0"/>
+          </a:p>
+        </p:txBody>
+      </p:sp>
+      <p:sp>
+        <p:nvSpPr>
+          <p:cNvPr id="18" name="Arrow18"/>
+          <p:cNvSpPr/>
+          <p:nvPr/>
+        </p:nvSpPr>
+        <p:spPr>
+          <a:xfrm>
+            <a:off x="698640" y="4146804"/>
+            <a:ext cx="4400000" cy="182880"/>
+          </a:xfrm>
+          <a:prstGeom prst="rect">
+            <a:avLst/>
+          </a:prstGeom>
+          <a:noFill/>
+          <a:ln/>
+        </p:spPr>
+        <p:txBody>
+          <a:bodyPr wrap="square" lIns="0" tIns="0" rIns="0" bIns="0" rtlCol="0" anchor="ctr"/>
+          <a:lstStyle/>
+          <a:p>
+            <a:pPr marL="0" indent="0" algn="ctr">
+              <a:buNone/>
+            </a:pPr>
+            <a:r>
+              <a:rPr lang="en-US" sz="1400" b="1" dirty="0">
+                <a:solidFill>
+                  <a:srgbClr val="F2A900"/>
+                </a:solidFill>
+                <a:latin typeface="Calibri" pitchFamily="34" charset="0"/>
+                <a:ea typeface="Calibri" pitchFamily="34" charset="-122"/>
+                <a:cs typeface="Calibri" pitchFamily="34" charset="-120"/>
+              </a:rPr>
+              <a:t>▼</a:t>
+            </a:r>
+            <a:endParaRPr lang="en-US" sz="1400" dirty="0"/>
+          </a:p>
+        </p:txBody>
+      </p:sp>
+      <p:sp>
+        <p:nvSpPr>
+          <p:cNvPr id="19" name="FlowBox19"/>
+          <p:cNvSpPr/>
+          <p:nvPr/>
+        </p:nvSpPr>
+        <p:spPr>
+          <a:xfrm>
+            <a:off x="698640" y="4329684"/>
+            <a:ext cx="4400000" cy="438912"/>
+          </a:xfrm>
+          <a:prstGeom prst="roundRect">
+            <a:avLst>
+              <a:gd name="adj" fmla="val 8000"/>
+            </a:avLst>
+          </a:prstGeom>
+          <a:solidFill>
+            <a:srgbClr val="F4F7FC"/>
+          </a:solidFill>
+          <a:ln/>
+        </p:spPr>
+        <p:txBody>
+          <a:bodyPr/>
+          <a:lstStyle/>
+          <a:p>
+            <a:endParaRPr lang="en-US"/>
+          </a:p>
+        </p:txBody>
+      </p:sp>
+      <p:sp>
+        <p:nvSpPr>
+          <p:cNvPr id="20" name="FlowText20"/>
+          <p:cNvSpPr/>
+          <p:nvPr/>
+        </p:nvSpPr>
+        <p:spPr>
+          <a:xfrm>
+            <a:off x="790080" y="4329684"/>
+            <a:ext cx="4217120" cy="438912"/>
+          </a:xfrm>
+          <a:prstGeom prst="rect">
+            <a:avLst/>
+          </a:prstGeom>
+          <a:noFill/>
+          <a:ln/>
+        </p:spPr>
+        <p:txBody>
+          <a:bodyPr wrap="square" lIns="0" tIns="0" rIns="0" bIns="0" rtlCol="0" anchor="ctr"/>
+          <a:lstStyle/>
+          <a:p>
+            <a:pPr marL="0" indent="0" algn="ctr">
+              <a:buNone/>
+            </a:pPr>
+            <a:r>
+              <a:rPr lang="en-US" sz="1350" b="1" dirty="0">
+                <a:solidFill>
+                  <a:srgbClr val="16213E"/>
+                </a:solidFill>
+                <a:latin typeface="Cambria" pitchFamily="34" charset="0"/>
+                <a:ea typeface="Cambria" pitchFamily="34" charset="-122"/>
+                <a:cs typeface="Cambria" pitchFamily="34" charset="-120"/>
+              </a:rPr>
+              <a:t>Interactive Streamlit Dashboard</a:t>
+            </a:r>
+            <a:endParaRPr lang="en-US" sz="1350" dirty="0"/>
+          </a:p>
+        </p:txBody>
+      </p:sp>
+      <p:sp>
+        <p:nvSpPr>
+          <p:cNvPr id="21" name="Arrow21"/>
+          <p:cNvSpPr/>
+          <p:nvPr/>
+        </p:nvSpPr>
+        <p:spPr>
+          <a:xfrm>
+            <a:off x="698640" y="4768596"/>
+            <a:ext cx="4400000" cy="182880"/>
+          </a:xfrm>
+          <a:prstGeom prst="rect">
+            <a:avLst/>
+          </a:prstGeom>
+          <a:noFill/>
+          <a:ln/>
+        </p:spPr>
+        <p:txBody>
+          <a:bodyPr wrap="square" lIns="0" tIns="0" rIns="0" bIns="0" rtlCol="0" anchor="ctr"/>
+          <a:lstStyle/>
+          <a:p>
+            <a:pPr marL="0" indent="0" algn="ctr">
+              <a:buNone/>
+            </a:pPr>
+            <a:r>
+              <a:rPr lang="en-US" sz="1400" b="1" dirty="0">
+                <a:solidFill>
+                  <a:srgbClr val="F2A900"/>
+                </a:solidFill>
+                <a:latin typeface="Calibri" pitchFamily="34" charset="0"/>
+                <a:ea typeface="Calibri" pitchFamily="34" charset="-122"/>
+                <a:cs typeface="Calibri" pitchFamily="34" charset="-120"/>
+              </a:rPr>
+              <a:t>▼</a:t>
+            </a:r>
+            <a:endParaRPr lang="en-US" sz="1400" dirty="0"/>
+          </a:p>
+        </p:txBody>
+      </p:sp>
+      <p:sp>
+        <p:nvSpPr>
+          <p:cNvPr id="22" name="FlowBox22"/>
+          <p:cNvSpPr/>
+          <p:nvPr/>
+        </p:nvSpPr>
+        <p:spPr>
+          <a:xfrm>
+            <a:off x="698640" y="4951476"/>
+            <a:ext cx="4400000" cy="438912"/>
+          </a:xfrm>
+          <a:prstGeom prst="roundRect">
+            <a:avLst>
+              <a:gd name="adj" fmla="val 8000"/>
+            </a:avLst>
           </a:prstGeom>
           <a:solidFill>
             <a:srgbClr val="16213E"/>
           </a:solidFill>
           <a:ln/>
         </p:spPr>
-      </p:sp>
-      <p:sp>
-        <p:nvSpPr>
-          <p:cNvPr id="12" name="Text 9"/>
-          <p:cNvSpPr/>
-          <p:nvPr/>
-        </p:nvSpPr>
-        <p:spPr>
-          <a:xfrm>
-            <a:off x="7772400" y="3108960"/>
-            <a:ext cx="3566160" cy="320040"/>
-          </a:xfrm>
-          <a:prstGeom prst="rect">
-            <a:avLst/>
-          </a:prstGeom>
-          <a:noFill/>
-          <a:ln/>
-        </p:spPr>
-        <p:txBody>
-          <a:bodyPr wrap="square" lIns="0" tIns="0" rIns="0" bIns="0" rtlCol="0" anchor="ctr"/>
-          <a:lstStyle/>
-          <a:p>
-            <a:pPr indent="0" marL="0">
-              <a:buNone/>
-            </a:pPr>
-            <a:r>
-              <a:rPr lang="en-US" sz="1100" b="1" spc="100" kern="0" dirty="0">
+        <p:txBody>
+          <a:bodyPr/>
+          <a:lstStyle/>
+          <a:p>
+            <a:endParaRPr lang="en-US"/>
+          </a:p>
+        </p:txBody>
+      </p:sp>
+      <p:sp>
+        <p:nvSpPr>
+          <p:cNvPr id="23" name="FlowText23"/>
+          <p:cNvSpPr/>
+          <p:nvPr/>
+        </p:nvSpPr>
+        <p:spPr>
+          <a:xfrm>
+            <a:off x="790080" y="4951476"/>
+            <a:ext cx="4217120" cy="438912"/>
+          </a:xfrm>
+          <a:prstGeom prst="rect">
+            <a:avLst/>
+          </a:prstGeom>
+          <a:noFill/>
+          <a:ln/>
+        </p:spPr>
+        <p:txBody>
+          <a:bodyPr wrap="square" lIns="0" tIns="0" rIns="0" bIns="0" rtlCol="0" anchor="ctr"/>
+          <a:lstStyle/>
+          <a:p>
+            <a:pPr marL="0" indent="0" algn="ctr">
+              <a:buNone/>
+            </a:pPr>
+            <a:r>
+              <a:rPr lang="en-US" sz="1350" b="1" dirty="0">
+                <a:solidFill>
+                  <a:srgbClr val="FFFFFF"/>
+                </a:solidFill>
+                <a:latin typeface="Cambria" pitchFamily="34" charset="0"/>
+                <a:ea typeface="Cambria" pitchFamily="34" charset="-122"/>
+                <a:cs typeface="Cambria" pitchFamily="34" charset="-120"/>
+              </a:rPr>
+              <a:t>Qora AI Assistant</a:t>
+            </a:r>
+            <a:endParaRPr lang="en-US" sz="1350" dirty="0"/>
+          </a:p>
+        </p:txBody>
+      </p:sp>
+      <p:sp>
+        <p:nvSpPr>
+          <p:cNvPr id="24" name="BenefitsHeader"/>
+          <p:cNvSpPr/>
+          <p:nvPr/>
+        </p:nvSpPr>
+        <p:spPr>
+          <a:xfrm>
+            <a:off x="6400800" y="1531620"/>
+            <a:ext cx="5143500" cy="320040"/>
+          </a:xfrm>
+          <a:prstGeom prst="rect">
+            <a:avLst/>
+          </a:prstGeom>
+          <a:noFill/>
+          <a:ln/>
+        </p:spPr>
+        <p:txBody>
+          <a:bodyPr wrap="square" lIns="0" tIns="0" rIns="0" bIns="0" rtlCol="0" anchor="ctr"/>
+          <a:lstStyle/>
+          <a:p>
+            <a:pPr marL="0" indent="0" algn="l">
+              <a:buNone/>
+            </a:pPr>
+            <a:r>
+              <a:rPr lang="en-US" sz="1300" b="1" dirty="0">
                 <a:solidFill>
                   <a:srgbClr val="F2A900"/>
                 </a:solidFill>
@@ -3915,46 +4165,7 @@
                 <a:ea typeface="Calibri" pitchFamily="34" charset="-122"/>
                 <a:cs typeface="Calibri" pitchFamily="34" charset="-120"/>
               </a:rPr>
-              <a:t>WHAT THIS MEANS</a:t>
-            </a:r>
-            <a:endParaRPr lang="en-US" sz="1100" dirty="0"/>
-          </a:p>
-        </p:txBody>
-      </p:sp>
-      <p:sp>
-        <p:nvSpPr>
-          <p:cNvPr id="13" name="Text 10"/>
-          <p:cNvSpPr/>
-          <p:nvPr/>
-        </p:nvSpPr>
-        <p:spPr>
-          <a:xfrm>
-            <a:off x="7772400" y="3520440"/>
-            <a:ext cx="3566160" cy="1188720"/>
-          </a:xfrm>
-          <a:prstGeom prst="rect">
-            <a:avLst/>
-          </a:prstGeom>
-          <a:noFill/>
-          <a:ln/>
-        </p:spPr>
-        <p:txBody>
-          <a:bodyPr wrap="square" lIns="0" tIns="0" rIns="0" bIns="0" rtlCol="0" anchor="ctr"/>
-          <a:lstStyle/>
-          <a:p>
-            <a:pPr indent="0" marL="0">
-              <a:buNone/>
-            </a:pPr>
-            <a:r>
-              <a:rPr lang="en-US" sz="1300" dirty="0">
-                <a:solidFill>
-                  <a:srgbClr val="E8EEF7"/>
-                </a:solidFill>
-                <a:latin typeface="Calibri" pitchFamily="34" charset="0"/>
-                <a:ea typeface="Calibri" pitchFamily="34" charset="-122"/>
-                <a:cs typeface="Calibri" pitchFamily="34" charset="-120"/>
-              </a:rPr>
-              <a:t>Revenue barely needs to change — today's process is already close to revenue-optimal. The real opportunity is shipping efficiency, not accepting more orders.</a:t>
+              <a:t>BUSINESS BENEFITS</a:t>
             </a:r>
             <a:endParaRPr lang="en-US" sz="1300" dirty="0"/>
           </a:p>
@@ -3962,46 +4173,361 @@
       </p:sp>
       <p:sp>
         <p:nvSpPr>
-          <p:cNvPr id="14" name="Text 11"/>
-          <p:cNvSpPr/>
-          <p:nvPr/>
-        </p:nvSpPr>
-        <p:spPr>
-          <a:xfrm>
-            <a:off x="7772400" y="4846320"/>
-            <a:ext cx="3566160" cy="1280160"/>
-          </a:xfrm>
-          <a:prstGeom prst="rect">
-            <a:avLst/>
-          </a:prstGeom>
-          <a:noFill/>
-          <a:ln/>
-        </p:spPr>
-        <p:txBody>
-          <a:bodyPr wrap="square" lIns="0" tIns="0" rIns="0" bIns="0" rtlCol="0" anchor="ctr"/>
-          <a:lstStyle/>
-          <a:p>
-            <a:pPr indent="0" marL="0">
-              <a:buNone/>
-            </a:pPr>
-            <a:r>
-              <a:rPr lang="en-US" sz="1200" i="1" dirty="0">
-                <a:solidFill>
-                  <a:srgbClr val="B8C4DC"/>
-                </a:solidFill>
-                <a:latin typeface="Calibri" pitchFamily="34" charset="0"/>
-                <a:ea typeface="Calibri" pitchFamily="34" charset="-122"/>
-                <a:cs typeface="Calibri" pitchFamily="34" charset="-120"/>
-              </a:rPr>
-              <a:t>Trade-off: optimizing hard for shipping cost concentrates volume into fewer, cheaper-to-ship-from plants — utilization evenness drops as a result. Cost and network balance are different goals.</a:t>
-            </a:r>
-            <a:endParaRPr lang="en-US" sz="1200" dirty="0"/>
-          </a:p>
-        </p:txBody>
-      </p:sp>
-      <p:sp>
-        <p:nvSpPr>
-          <p:cNvPr id="15" name="Text 12"/>
+          <p:cNvPr id="25" name="Dot25"/>
+          <p:cNvSpPr/>
+          <p:nvPr/>
+        </p:nvSpPr>
+        <p:spPr>
+          <a:xfrm>
+            <a:off x="6400800" y="2286000"/>
+            <a:ext cx="91440" cy="91440"/>
+          </a:xfrm>
+          <a:prstGeom prst="ellipse">
+            <a:avLst/>
+          </a:prstGeom>
+          <a:solidFill>
+            <a:srgbClr val="F2A900"/>
+          </a:solidFill>
+          <a:ln/>
+        </p:spPr>
+      </p:sp>
+      <p:sp>
+        <p:nvSpPr>
+          <p:cNvPr id="26" name="BenefitText26"/>
+          <p:cNvSpPr/>
+          <p:nvPr/>
+        </p:nvSpPr>
+        <p:spPr>
+          <a:xfrm>
+            <a:off x="6629400" y="2057400"/>
+            <a:ext cx="4914900" cy="457200"/>
+          </a:xfrm>
+          <a:prstGeom prst="rect">
+            <a:avLst/>
+          </a:prstGeom>
+          <a:noFill/>
+          <a:ln/>
+        </p:spPr>
+        <p:txBody>
+          <a:bodyPr wrap="square" lIns="0" tIns="0" rIns="0" bIns="0" rtlCol="0" anchor="ctr"/>
+          <a:lstStyle/>
+          <a:p>
+            <a:pPr marL="0" indent="0" algn="l">
+              <a:buNone/>
+            </a:pPr>
+            <a:r>
+              <a:rPr lang="en-US" sz="1350" dirty="0">
+                <a:solidFill>
+                  <a:srgbClr val="44506A"/>
+                </a:solidFill>
+                <a:latin typeface="Calibri" pitchFamily="34" charset="0"/>
+                <a:ea typeface="Calibri" pitchFamily="34" charset="-122"/>
+                <a:cs typeface="Calibri" pitchFamily="34" charset="-120"/>
+              </a:rPr>
+              <a:t>Better order assignment</a:t>
+            </a:r>
+            <a:endParaRPr lang="en-US" sz="1350" dirty="0"/>
+          </a:p>
+        </p:txBody>
+      </p:sp>
+      <p:sp>
+        <p:nvSpPr>
+          <p:cNvPr id="27" name="Dot27"/>
+          <p:cNvSpPr/>
+          <p:nvPr/>
+        </p:nvSpPr>
+        <p:spPr>
+          <a:xfrm>
+            <a:off x="6400800" y="2880360"/>
+            <a:ext cx="91440" cy="91440"/>
+          </a:xfrm>
+          <a:prstGeom prst="ellipse">
+            <a:avLst/>
+          </a:prstGeom>
+          <a:solidFill>
+            <a:srgbClr val="F2A900"/>
+          </a:solidFill>
+          <a:ln/>
+        </p:spPr>
+      </p:sp>
+      <p:sp>
+        <p:nvSpPr>
+          <p:cNvPr id="28" name="BenefitText28"/>
+          <p:cNvSpPr/>
+          <p:nvPr/>
+        </p:nvSpPr>
+        <p:spPr>
+          <a:xfrm>
+            <a:off x="6629400" y="2651760"/>
+            <a:ext cx="4914900" cy="457200"/>
+          </a:xfrm>
+          <a:prstGeom prst="rect">
+            <a:avLst/>
+          </a:prstGeom>
+          <a:noFill/>
+          <a:ln/>
+        </p:spPr>
+        <p:txBody>
+          <a:bodyPr wrap="square" lIns="0" tIns="0" rIns="0" bIns="0" rtlCol="0" anchor="ctr"/>
+          <a:lstStyle/>
+          <a:p>
+            <a:pPr marL="0" indent="0" algn="l">
+              <a:buNone/>
+            </a:pPr>
+            <a:r>
+              <a:rPr lang="en-US" sz="1350" dirty="0">
+                <a:solidFill>
+                  <a:srgbClr val="44506A"/>
+                </a:solidFill>
+                <a:latin typeface="Calibri" pitchFamily="34" charset="0"/>
+                <a:ea typeface="Calibri" pitchFamily="34" charset="-122"/>
+                <a:cs typeface="Calibri" pitchFamily="34" charset="-120"/>
+              </a:rPr>
+              <a:t>Higher fill rate</a:t>
+            </a:r>
+            <a:endParaRPr lang="en-US" sz="1350" dirty="0"/>
+          </a:p>
+        </p:txBody>
+      </p:sp>
+      <p:sp>
+        <p:nvSpPr>
+          <p:cNvPr id="29" name="Dot29"/>
+          <p:cNvSpPr/>
+          <p:nvPr/>
+        </p:nvSpPr>
+        <p:spPr>
+          <a:xfrm>
+            <a:off x="6400800" y="3474720"/>
+            <a:ext cx="91440" cy="91440"/>
+          </a:xfrm>
+          <a:prstGeom prst="ellipse">
+            <a:avLst/>
+          </a:prstGeom>
+          <a:solidFill>
+            <a:srgbClr val="F2A900"/>
+          </a:solidFill>
+          <a:ln/>
+        </p:spPr>
+      </p:sp>
+      <p:sp>
+        <p:nvSpPr>
+          <p:cNvPr id="30" name="BenefitText30"/>
+          <p:cNvSpPr/>
+          <p:nvPr/>
+        </p:nvSpPr>
+        <p:spPr>
+          <a:xfrm>
+            <a:off x="6629400" y="3246120"/>
+            <a:ext cx="4914900" cy="457200"/>
+          </a:xfrm>
+          <a:prstGeom prst="rect">
+            <a:avLst/>
+          </a:prstGeom>
+          <a:noFill/>
+          <a:ln/>
+        </p:spPr>
+        <p:txBody>
+          <a:bodyPr wrap="square" lIns="0" tIns="0" rIns="0" bIns="0" rtlCol="0" anchor="ctr"/>
+          <a:lstStyle/>
+          <a:p>
+            <a:pPr marL="0" indent="0" algn="l">
+              <a:buNone/>
+            </a:pPr>
+            <a:r>
+              <a:rPr lang="en-US" sz="1350" dirty="0">
+                <a:solidFill>
+                  <a:srgbClr val="44506A"/>
+                </a:solidFill>
+                <a:latin typeface="Calibri" pitchFamily="34" charset="0"/>
+                <a:ea typeface="Calibri" pitchFamily="34" charset="-122"/>
+                <a:cs typeface="Calibri" pitchFamily="34" charset="-120"/>
+              </a:rPr>
+              <a:t>Lower logistics cost</a:t>
+            </a:r>
+            <a:endParaRPr lang="en-US" sz="1350" dirty="0"/>
+          </a:p>
+        </p:txBody>
+      </p:sp>
+      <p:sp>
+        <p:nvSpPr>
+          <p:cNvPr id="31" name="Dot31"/>
+          <p:cNvSpPr/>
+          <p:nvPr/>
+        </p:nvSpPr>
+        <p:spPr>
+          <a:xfrm>
+            <a:off x="6400800" y="4069080"/>
+            <a:ext cx="91440" cy="91440"/>
+          </a:xfrm>
+          <a:prstGeom prst="ellipse">
+            <a:avLst/>
+          </a:prstGeom>
+          <a:solidFill>
+            <a:srgbClr val="F2A900"/>
+          </a:solidFill>
+          <a:ln/>
+        </p:spPr>
+      </p:sp>
+      <p:sp>
+        <p:nvSpPr>
+          <p:cNvPr id="32" name="BenefitText32"/>
+          <p:cNvSpPr/>
+          <p:nvPr/>
+        </p:nvSpPr>
+        <p:spPr>
+          <a:xfrm>
+            <a:off x="6629400" y="3840480"/>
+            <a:ext cx="4914900" cy="457200"/>
+          </a:xfrm>
+          <a:prstGeom prst="rect">
+            <a:avLst/>
+          </a:prstGeom>
+          <a:noFill/>
+          <a:ln/>
+        </p:spPr>
+        <p:txBody>
+          <a:bodyPr wrap="square" lIns="0" tIns="0" rIns="0" bIns="0" rtlCol="0" anchor="ctr"/>
+          <a:lstStyle/>
+          <a:p>
+            <a:pPr marL="0" indent="0" algn="l">
+              <a:buNone/>
+            </a:pPr>
+            <a:r>
+              <a:rPr lang="en-US" sz="1350" dirty="0">
+                <a:solidFill>
+                  <a:srgbClr val="44506A"/>
+                </a:solidFill>
+                <a:latin typeface="Calibri" pitchFamily="34" charset="0"/>
+                <a:ea typeface="Calibri" pitchFamily="34" charset="-122"/>
+                <a:cs typeface="Calibri" pitchFamily="34" charset="-120"/>
+              </a:rPr>
+              <a:t>Improved warehouse utilization</a:t>
+            </a:r>
+            <a:endParaRPr lang="en-US" sz="1350" dirty="0"/>
+          </a:p>
+        </p:txBody>
+      </p:sp>
+      <p:sp>
+        <p:nvSpPr>
+          <p:cNvPr id="33" name="Dot33"/>
+          <p:cNvSpPr/>
+          <p:nvPr/>
+        </p:nvSpPr>
+        <p:spPr>
+          <a:xfrm>
+            <a:off x="6400800" y="4663440"/>
+            <a:ext cx="91440" cy="91440"/>
+          </a:xfrm>
+          <a:prstGeom prst="ellipse">
+            <a:avLst/>
+          </a:prstGeom>
+          <a:solidFill>
+            <a:srgbClr val="F2A900"/>
+          </a:solidFill>
+          <a:ln/>
+        </p:spPr>
+      </p:sp>
+      <p:sp>
+        <p:nvSpPr>
+          <p:cNvPr id="34" name="BenefitText34"/>
+          <p:cNvSpPr/>
+          <p:nvPr/>
+        </p:nvSpPr>
+        <p:spPr>
+          <a:xfrm>
+            <a:off x="6629400" y="4434840"/>
+            <a:ext cx="4914900" cy="457200"/>
+          </a:xfrm>
+          <a:prstGeom prst="rect">
+            <a:avLst/>
+          </a:prstGeom>
+          <a:noFill/>
+          <a:ln/>
+        </p:spPr>
+        <p:txBody>
+          <a:bodyPr wrap="square" lIns="0" tIns="0" rIns="0" bIns="0" rtlCol="0" anchor="ctr"/>
+          <a:lstStyle/>
+          <a:p>
+            <a:pPr marL="0" indent="0" algn="l">
+              <a:buNone/>
+            </a:pPr>
+            <a:r>
+              <a:rPr lang="en-US" sz="1350" dirty="0">
+                <a:solidFill>
+                  <a:srgbClr val="44506A"/>
+                </a:solidFill>
+                <a:latin typeface="Calibri" pitchFamily="34" charset="0"/>
+                <a:ea typeface="Calibri" pitchFamily="34" charset="-122"/>
+                <a:cs typeface="Calibri" pitchFamily="34" charset="-120"/>
+              </a:rPr>
+              <a:t>Explainable recommendations</a:t>
+            </a:r>
+            <a:endParaRPr lang="en-US" sz="1350" dirty="0"/>
+          </a:p>
+        </p:txBody>
+      </p:sp>
+      <p:sp>
+        <p:nvSpPr>
+          <p:cNvPr id="35" name="Dot35"/>
+          <p:cNvSpPr/>
+          <p:nvPr/>
+        </p:nvSpPr>
+        <p:spPr>
+          <a:xfrm>
+            <a:off x="6400800" y="5257800"/>
+            <a:ext cx="91440" cy="91440"/>
+          </a:xfrm>
+          <a:prstGeom prst="ellipse">
+            <a:avLst/>
+          </a:prstGeom>
+          <a:solidFill>
+            <a:srgbClr val="F2A900"/>
+          </a:solidFill>
+          <a:ln/>
+        </p:spPr>
+      </p:sp>
+      <p:sp>
+        <p:nvSpPr>
+          <p:cNvPr id="36" name="BenefitText36"/>
+          <p:cNvSpPr/>
+          <p:nvPr/>
+        </p:nvSpPr>
+        <p:spPr>
+          <a:xfrm>
+            <a:off x="6629400" y="5029200"/>
+            <a:ext cx="4914900" cy="457200"/>
+          </a:xfrm>
+          <a:prstGeom prst="rect">
+            <a:avLst/>
+          </a:prstGeom>
+          <a:noFill/>
+          <a:ln/>
+        </p:spPr>
+        <p:txBody>
+          <a:bodyPr wrap="square" lIns="0" tIns="0" rIns="0" bIns="0" rtlCol="0" anchor="ctr"/>
+          <a:lstStyle/>
+          <a:p>
+            <a:pPr marL="0" indent="0" algn="l">
+              <a:buNone/>
+            </a:pPr>
+            <a:r>
+              <a:rPr lang="en-US" sz="1350" dirty="0">
+                <a:solidFill>
+                  <a:srgbClr val="44506A"/>
+                </a:solidFill>
+                <a:latin typeface="Calibri" pitchFamily="34" charset="0"/>
+                <a:ea typeface="Calibri" pitchFamily="34" charset="-122"/>
+                <a:cs typeface="Calibri" pitchFamily="34" charset="-120"/>
+              </a:rPr>
+              <a:t>AI-assisted planner decisions</a:t>
+            </a:r>
+            <a:endParaRPr lang="en-US" sz="1350" dirty="0"/>
+          </a:p>
+        </p:txBody>
+      </p:sp>
+      <p:sp>
+        <p:nvSpPr>
+          <p:cNvPr id="37" name="FooterLeft"/>
           <p:cNvSpPr/>
           <p:nvPr/>
         </p:nvSpPr>
@@ -4020,7 +4546,7 @@
           <a:bodyPr wrap="square" lIns="0" tIns="0" rIns="0" bIns="0" rtlCol="0" anchor="ctr"/>
           <a:lstStyle/>
           <a:p>
-            <a:pPr indent="0" marL="0">
+            <a:pPr marL="0" indent="0" algn="l">
               <a:buNone/>
             </a:pPr>
             <a:r>
@@ -4040,7 +4566,7 @@
       </p:sp>
       <p:sp>
         <p:nvSpPr>
-          <p:cNvPr id="16" name="Text 13"/>
+          <p:cNvPr id="38" name="FooterRight"/>
           <p:cNvSpPr/>
           <p:nvPr/>
         </p:nvSpPr>
@@ -4059,7 +4585,7 @@
           <a:bodyPr wrap="square" lIns="0" tIns="0" rIns="0" bIns="0" rtlCol="0" anchor="ctr"/>
           <a:lstStyle/>
           <a:p>
-            <a:pPr algn="r" indent="0" marL="0">
+            <a:pPr marL="0" indent="0" algn="r">
               <a:buNone/>
             </a:pPr>
             <a:r>
@@ -4087,12 +4613,13 @@
 
 <file path=ppt/slides/slide5.xml><?xml version="1.0" encoding="utf-8"?>
 <p:sld xmlns:a="http://schemas.openxmlformats.org/drawingml/2006/main" xmlns:r="http://schemas.openxmlformats.org/officeDocument/2006/relationships" xmlns:p="http://schemas.openxmlformats.org/presentationml/2006/main">
-  <p:cSld name="Slide 5">
+  <p:cSld name="Slide 4">
     <p:bg>
       <p:bgPr>
         <a:solidFill>
           <a:srgbClr val="FFFFFF"/>
         </a:solidFill>
+        <a:effectLst/>
       </p:bgPr>
     </p:bg>
     <p:spTree>
@@ -4130,7 +4657,7 @@
           <a:bodyPr wrap="square" lIns="0" tIns="0" rIns="0" bIns="0" rtlCol="0" anchor="ctr"/>
           <a:lstStyle/>
           <a:p>
-            <a:pPr indent="0" marL="0">
+            <a:pPr marL="0" indent="0">
               <a:buNone/>
             </a:pPr>
             <a:r>
@@ -4142,7 +4669,7 @@
                 <a:ea typeface="Cambria" pitchFamily="34" charset="-122"/>
                 <a:cs typeface="Cambria" pitchFamily="34" charset="-120"/>
               </a:rPr>
-              <a:t>Quantum Benchmark</a:t>
+              <a:t>The Headline Result</a:t>
             </a:r>
             <a:endParaRPr lang="en-US" sz="3200" dirty="0"/>
           </a:p>
@@ -4157,19 +4684,19 @@
         <p:spPr>
           <a:xfrm>
             <a:off x="548640" y="1051560"/>
-            <a:ext cx="10515600" cy="365760"/>
-          </a:xfrm>
-          <a:prstGeom prst="rect">
-            <a:avLst/>
-          </a:prstGeom>
-          <a:noFill/>
-          <a:ln/>
-        </p:spPr>
-        <p:txBody>
-          <a:bodyPr wrap="square" lIns="0" tIns="0" rIns="0" bIns="0" rtlCol="0" anchor="ctr"/>
-          <a:lstStyle/>
-          <a:p>
-            <a:pPr indent="0" marL="0">
+            <a:ext cx="10058400" cy="365760"/>
+          </a:xfrm>
+          <a:prstGeom prst="rect">
+            <a:avLst/>
+          </a:prstGeom>
+          <a:noFill/>
+          <a:ln/>
+        </p:spPr>
+        <p:txBody>
+          <a:bodyPr wrap="square" lIns="0" tIns="0" rIns="0" bIns="0" rtlCol="0" anchor="ctr"/>
+          <a:lstStyle/>
+          <a:p>
+            <a:pPr marL="0" indent="0">
               <a:buNone/>
             </a:pPr>
             <a:r>
@@ -4181,7 +4708,7 @@
                 <a:ea typeface="Calibri" pitchFamily="34" charset="-122"/>
                 <a:cs typeface="Calibri" pitchFamily="34" charset="-120"/>
               </a:rPr>
-              <a:t>Real 4-order batch (Plant 5385 / SKU 12386067, capacity 8 units) — same problem, three solvers</a:t>
+              <a:t>Full 25,193-order dataset — solved exactly by OR-Tools in under 3 seconds</a:t>
             </a:r>
             <a:endParaRPr lang="en-US" sz="1400" dirty="0"/>
           </a:p>
@@ -4195,32 +4722,71 @@
         </p:nvSpPr>
         <p:spPr>
           <a:xfrm>
-            <a:off x="548640" y="1874520"/>
-            <a:ext cx="3108960" cy="365760"/>
-          </a:xfrm>
-          <a:prstGeom prst="rect">
-            <a:avLst/>
-          </a:prstGeom>
-          <a:noFill/>
-          <a:ln/>
-        </p:spPr>
-        <p:txBody>
-          <a:bodyPr wrap="square" lIns="0" tIns="0" rIns="0" bIns="0" rtlCol="0" anchor="ctr"/>
-          <a:lstStyle/>
-          <a:p>
-            <a:pPr indent="0" marL="0">
-              <a:buNone/>
-            </a:pPr>
-            <a:r>
-              <a:rPr lang="en-US" sz="1200" b="1" dirty="0">
-                <a:solidFill>
-                  <a:srgbClr val="16213E"/>
-                </a:solidFill>
-                <a:latin typeface="Calibri" pitchFamily="34" charset="0"/>
-                <a:ea typeface="Calibri" pitchFamily="34" charset="-122"/>
-                <a:cs typeface="Calibri" pitchFamily="34" charset="-120"/>
-              </a:rPr>
-              <a:t>Method</a:t>
+            <a:off x="548640" y="1600200"/>
+            <a:ext cx="3291840" cy="914400"/>
+          </a:xfrm>
+          <a:prstGeom prst="rect">
+            <a:avLst/>
+          </a:prstGeom>
+          <a:noFill/>
+          <a:ln/>
+        </p:spPr>
+        <p:txBody>
+          <a:bodyPr wrap="square" lIns="0" tIns="0" rIns="0" bIns="0" rtlCol="0" anchor="ctr"/>
+          <a:lstStyle/>
+          <a:p>
+            <a:pPr marL="0" indent="0" algn="l">
+              <a:buNone/>
+            </a:pPr>
+            <a:r>
+              <a:rPr lang="en-US" sz="4000" b="1" dirty="0">
+                <a:solidFill>
+                  <a:srgbClr val="F2A900"/>
+                </a:solidFill>
+                <a:latin typeface="Cambria" pitchFamily="34" charset="0"/>
+                <a:ea typeface="Cambria" pitchFamily="34" charset="-122"/>
+                <a:cs typeface="Cambria" pitchFamily="34" charset="-120"/>
+              </a:rPr>
+              <a:t>$7.5M</a:t>
+            </a:r>
+            <a:endParaRPr lang="en-US" sz="4000" dirty="0"/>
+          </a:p>
+        </p:txBody>
+      </p:sp>
+      <p:sp>
+        <p:nvSpPr>
+          <p:cNvPr id="5" name="Text 3"/>
+          <p:cNvSpPr/>
+          <p:nvPr/>
+        </p:nvSpPr>
+        <p:spPr>
+          <a:xfrm>
+            <a:off x="548640" y="2377440"/>
+            <a:ext cx="3291840" cy="457200"/>
+          </a:xfrm>
+          <a:prstGeom prst="rect">
+            <a:avLst/>
+          </a:prstGeom>
+          <a:noFill/>
+          <a:ln/>
+        </p:spPr>
+        <p:txBody>
+          <a:bodyPr wrap="square" lIns="0" tIns="0" rIns="0" bIns="0" rtlCol="0" anchor="ctr"/>
+          <a:lstStyle/>
+          <a:p>
+            <a:pPr marL="0" indent="0" algn="l">
+              <a:buNone/>
+            </a:pPr>
+            <a:r>
+              <a:rPr lang="en-US" sz="1200" dirty="0">
+                <a:solidFill>
+                  <a:srgbClr val="44506A"/>
+                </a:solidFill>
+                <a:latin typeface="Calibri" pitchFamily="34" charset="0"/>
+                <a:ea typeface="Calibri" pitchFamily="34" charset="-122"/>
+                <a:cs typeface="Calibri" pitchFamily="34" charset="-120"/>
+              </a:rPr>
+              <a:t>shipping cost cut, same revenue</a:t>
             </a:r>
             <a:endParaRPr lang="en-US" sz="1200" dirty="0"/>
           </a:p>
@@ -4228,38 +4794,77 @@
       </p:sp>
       <p:sp>
         <p:nvSpPr>
-          <p:cNvPr id="5" name="Text 3"/>
-          <p:cNvSpPr/>
-          <p:nvPr/>
-        </p:nvSpPr>
-        <p:spPr>
-          <a:xfrm>
-            <a:off x="3749040" y="1874520"/>
-            <a:ext cx="1645920" cy="365760"/>
-          </a:xfrm>
-          <a:prstGeom prst="rect">
-            <a:avLst/>
-          </a:prstGeom>
-          <a:noFill/>
-          <a:ln/>
-        </p:spPr>
-        <p:txBody>
-          <a:bodyPr wrap="square" lIns="0" tIns="0" rIns="0" bIns="0" rtlCol="0" anchor="ctr"/>
-          <a:lstStyle/>
-          <a:p>
-            <a:pPr indent="0" marL="0">
-              <a:buNone/>
-            </a:pPr>
-            <a:r>
-              <a:rPr lang="en-US" sz="1200" b="1" dirty="0">
-                <a:solidFill>
-                  <a:srgbClr val="16213E"/>
-                </a:solidFill>
-                <a:latin typeface="Calibri" pitchFamily="34" charset="0"/>
-                <a:ea typeface="Calibri" pitchFamily="34" charset="-122"/>
-                <a:cs typeface="Calibri" pitchFamily="34" charset="-120"/>
-              </a:rPr>
-              <a:t>Objective</a:t>
+          <p:cNvPr id="6" name="Text 4"/>
+          <p:cNvSpPr/>
+          <p:nvPr/>
+        </p:nvSpPr>
+        <p:spPr>
+          <a:xfrm>
+            <a:off x="3931920" y="1600200"/>
+            <a:ext cx="3291840" cy="914400"/>
+          </a:xfrm>
+          <a:prstGeom prst="rect">
+            <a:avLst/>
+          </a:prstGeom>
+          <a:noFill/>
+          <a:ln/>
+        </p:spPr>
+        <p:txBody>
+          <a:bodyPr wrap="square" lIns="0" tIns="0" rIns="0" bIns="0" rtlCol="0" anchor="ctr"/>
+          <a:lstStyle/>
+          <a:p>
+            <a:pPr marL="0" indent="0" algn="l">
+              <a:buNone/>
+            </a:pPr>
+            <a:r>
+              <a:rPr lang="en-US" sz="4000" b="1" dirty="0">
+                <a:solidFill>
+                  <a:srgbClr val="F2A900"/>
+                </a:solidFill>
+                <a:latin typeface="Cambria" pitchFamily="34" charset="0"/>
+                <a:ea typeface="Cambria" pitchFamily="34" charset="-122"/>
+                <a:cs typeface="Cambria" pitchFamily="34" charset="-120"/>
+              </a:rPr>
+              <a:t>99.54%</a:t>
+            </a:r>
+            <a:endParaRPr lang="en-US" sz="4000" dirty="0"/>
+          </a:p>
+        </p:txBody>
+      </p:sp>
+      <p:sp>
+        <p:nvSpPr>
+          <p:cNvPr id="7" name="Text 5"/>
+          <p:cNvSpPr/>
+          <p:nvPr/>
+        </p:nvSpPr>
+        <p:spPr>
+          <a:xfrm>
+            <a:off x="3931920" y="2377440"/>
+            <a:ext cx="3291840" cy="457200"/>
+          </a:xfrm>
+          <a:prstGeom prst="rect">
+            <a:avLst/>
+          </a:prstGeom>
+          <a:noFill/>
+          <a:ln/>
+        </p:spPr>
+        <p:txBody>
+          <a:bodyPr wrap="square" lIns="0" tIns="0" rIns="0" bIns="0" rtlCol="0" anchor="ctr"/>
+          <a:lstStyle/>
+          <a:p>
+            <a:pPr marL="0" indent="0" algn="l">
+              <a:buNone/>
+            </a:pPr>
+            <a:r>
+              <a:rPr lang="en-US" sz="1200" dirty="0">
+                <a:solidFill>
+                  <a:srgbClr val="44506A"/>
+                </a:solidFill>
+                <a:latin typeface="Calibri" pitchFamily="34" charset="0"/>
+                <a:ea typeface="Calibri" pitchFamily="34" charset="-122"/>
+                <a:cs typeface="Calibri" pitchFamily="34" charset="-120"/>
+              </a:rPr>
+              <a:t>fill rate (from 98.92%)</a:t>
             </a:r>
             <a:endParaRPr lang="en-US" sz="1200" dirty="0"/>
           </a:p>
@@ -4267,466 +4872,108 @@
       </p:sp>
       <p:sp>
         <p:nvSpPr>
-          <p:cNvPr id="6" name="Text 4"/>
-          <p:cNvSpPr/>
-          <p:nvPr/>
-        </p:nvSpPr>
-        <p:spPr>
-          <a:xfrm>
-            <a:off x="5486400" y="1874520"/>
-            <a:ext cx="1645920" cy="365760"/>
-          </a:xfrm>
-          <a:prstGeom prst="rect">
-            <a:avLst/>
-          </a:prstGeom>
-          <a:noFill/>
-          <a:ln/>
-        </p:spPr>
-        <p:txBody>
-          <a:bodyPr wrap="square" lIns="0" tIns="0" rIns="0" bIns="0" rtlCol="0" anchor="ctr"/>
-          <a:lstStyle/>
-          <a:p>
-            <a:pPr indent="0" marL="0">
-              <a:buNone/>
-            </a:pPr>
-            <a:r>
-              <a:rPr lang="en-US" sz="1200" b="1" dirty="0">
-                <a:solidFill>
-                  <a:srgbClr val="16213E"/>
-                </a:solidFill>
-                <a:latin typeface="Calibri" pitchFamily="34" charset="0"/>
-                <a:ea typeface="Calibri" pitchFamily="34" charset="-122"/>
-                <a:cs typeface="Calibri" pitchFamily="34" charset="-120"/>
-              </a:rPr>
-              <a:t>Runtime</a:t>
+          <p:cNvPr id="8" name="Text 6"/>
+          <p:cNvSpPr/>
+          <p:nvPr/>
+        </p:nvSpPr>
+        <p:spPr>
+          <a:xfrm>
+            <a:off x="7315200" y="1600200"/>
+            <a:ext cx="3291840" cy="914400"/>
+          </a:xfrm>
+          <a:prstGeom prst="rect">
+            <a:avLst/>
+          </a:prstGeom>
+          <a:noFill/>
+          <a:ln/>
+        </p:spPr>
+        <p:txBody>
+          <a:bodyPr wrap="square" lIns="0" tIns="0" rIns="0" bIns="0" rtlCol="0" anchor="ctr"/>
+          <a:lstStyle/>
+          <a:p>
+            <a:pPr marL="0" indent="0" algn="l">
+              <a:buNone/>
+            </a:pPr>
+            <a:r>
+              <a:rPr lang="en-US" sz="4000" b="1" dirty="0">
+                <a:solidFill>
+                  <a:srgbClr val="F2A900"/>
+                </a:solidFill>
+                <a:latin typeface="Cambria" pitchFamily="34" charset="0"/>
+                <a:ea typeface="Cambria" pitchFamily="34" charset="-122"/>
+                <a:cs typeface="Cambria" pitchFamily="34" charset="-120"/>
+              </a:rPr>
+              <a:t>18,899</a:t>
+            </a:r>
+            <a:endParaRPr lang="en-US" sz="4000" dirty="0"/>
+          </a:p>
+        </p:txBody>
+      </p:sp>
+      <p:sp>
+        <p:nvSpPr>
+          <p:cNvPr id="9" name="Text 7"/>
+          <p:cNvSpPr/>
+          <p:nvPr/>
+        </p:nvSpPr>
+        <p:spPr>
+          <a:xfrm>
+            <a:off x="7315200" y="2377440"/>
+            <a:ext cx="3291840" cy="457200"/>
+          </a:xfrm>
+          <a:prstGeom prst="rect">
+            <a:avLst/>
+          </a:prstGeom>
+          <a:noFill/>
+          <a:ln/>
+        </p:spPr>
+        <p:txBody>
+          <a:bodyPr wrap="square" lIns="0" tIns="0" rIns="0" bIns="0" rtlCol="0" anchor="ctr"/>
+          <a:lstStyle/>
+          <a:p>
+            <a:pPr marL="0" indent="0" algn="l">
+              <a:buNone/>
+            </a:pPr>
+            <a:r>
+              <a:rPr lang="en-US" sz="1200" dirty="0">
+                <a:solidFill>
+                  <a:srgbClr val="44506A"/>
+                </a:solidFill>
+                <a:latin typeface="Calibri" pitchFamily="34" charset="0"/>
+                <a:ea typeface="Calibri" pitchFamily="34" charset="-122"/>
+                <a:cs typeface="Calibri" pitchFamily="34" charset="-120"/>
+              </a:rPr>
+              <a:t>orders redirected to a better plant</a:t>
             </a:r>
             <a:endParaRPr lang="en-US" sz="1200" dirty="0"/>
           </a:p>
         </p:txBody>
       </p:sp>
-      <p:sp>
-        <p:nvSpPr>
-          <p:cNvPr id="7" name="Shape 5"/>
-          <p:cNvSpPr/>
-          <p:nvPr/>
-        </p:nvSpPr>
-        <p:spPr>
-          <a:xfrm>
-            <a:off x="548640" y="2286000"/>
-            <a:ext cx="6583680" cy="0"/>
-          </a:xfrm>
-          <a:prstGeom prst="line">
-            <a:avLst/>
-          </a:prstGeom>
-          <a:noFill/>
-          <a:ln w="12700">
-            <a:solidFill>
-              <a:srgbClr val="D5DCE8"/>
-            </a:solidFill>
-            <a:prstDash val="solid"/>
-          </a:ln>
-        </p:spPr>
-      </p:sp>
-      <p:sp>
-        <p:nvSpPr>
-          <p:cNvPr id="8" name="Text 6"/>
-          <p:cNvSpPr/>
-          <p:nvPr/>
-        </p:nvSpPr>
-        <p:spPr>
-          <a:xfrm>
-            <a:off x="548640" y="2395728"/>
-            <a:ext cx="3108960" cy="365760"/>
-          </a:xfrm>
-          <a:prstGeom prst="rect">
-            <a:avLst/>
-          </a:prstGeom>
-          <a:noFill/>
-          <a:ln/>
-        </p:spPr>
-        <p:txBody>
-          <a:bodyPr wrap="square" lIns="0" tIns="0" rIns="0" bIns="0" rtlCol="0" anchor="ctr"/>
-          <a:lstStyle/>
-          <a:p>
-            <a:pPr indent="0" marL="0">
-              <a:buNone/>
-            </a:pPr>
-            <a:r>
-              <a:rPr lang="en-US" sz="1300" dirty="0">
-                <a:solidFill>
-                  <a:srgbClr val="44506A"/>
-                </a:solidFill>
-                <a:latin typeface="Calibri" pitchFamily="34" charset="0"/>
-                <a:ea typeface="Calibri" pitchFamily="34" charset="-122"/>
-                <a:cs typeface="Calibri" pitchFamily="34" charset="-120"/>
-              </a:rPr>
-              <a:t>Exact (brute-force)</a:t>
-            </a:r>
-            <a:endParaRPr lang="en-US" sz="1300" dirty="0"/>
-          </a:p>
-        </p:txBody>
-      </p:sp>
-      <p:sp>
-        <p:nvSpPr>
-          <p:cNvPr id="9" name="Text 7"/>
-          <p:cNvSpPr/>
-          <p:nvPr/>
-        </p:nvSpPr>
-        <p:spPr>
-          <a:xfrm>
-            <a:off x="3749040" y="2395728"/>
-            <a:ext cx="1645920" cy="365760"/>
-          </a:xfrm>
-          <a:prstGeom prst="rect">
-            <a:avLst/>
-          </a:prstGeom>
-          <a:noFill/>
-          <a:ln/>
-        </p:spPr>
-        <p:txBody>
-          <a:bodyPr wrap="square" lIns="0" tIns="0" rIns="0" bIns="0" rtlCol="0" anchor="ctr"/>
-          <a:lstStyle/>
-          <a:p>
-            <a:pPr indent="0" marL="0">
-              <a:buNone/>
-            </a:pPr>
-            <a:r>
-              <a:rPr lang="en-US" sz="1300" b="1" dirty="0">
-                <a:solidFill>
-                  <a:srgbClr val="16213E"/>
-                </a:solidFill>
-                <a:latin typeface="Calibri" pitchFamily="34" charset="0"/>
-                <a:ea typeface="Calibri" pitchFamily="34" charset="-122"/>
-                <a:cs typeface="Calibri" pitchFamily="34" charset="-120"/>
-              </a:rPr>
-              <a:t>378</a:t>
-            </a:r>
-            <a:endParaRPr lang="en-US" sz="1300" dirty="0"/>
-          </a:p>
-        </p:txBody>
-      </p:sp>
-      <p:sp>
-        <p:nvSpPr>
-          <p:cNvPr id="10" name="Text 8"/>
-          <p:cNvSpPr/>
-          <p:nvPr/>
-        </p:nvSpPr>
-        <p:spPr>
-          <a:xfrm>
-            <a:off x="5486400" y="2395728"/>
-            <a:ext cx="1645920" cy="365760"/>
-          </a:xfrm>
-          <a:prstGeom prst="rect">
-            <a:avLst/>
-          </a:prstGeom>
-          <a:noFill/>
-          <a:ln/>
-        </p:spPr>
-        <p:txBody>
-          <a:bodyPr wrap="square" lIns="0" tIns="0" rIns="0" bIns="0" rtlCol="0" anchor="ctr"/>
-          <a:lstStyle/>
-          <a:p>
-            <a:pPr indent="0" marL="0">
-              <a:buNone/>
-            </a:pPr>
-            <a:r>
-              <a:rPr lang="en-US" sz="1300" dirty="0">
-                <a:solidFill>
-                  <a:srgbClr val="44506A"/>
-                </a:solidFill>
-                <a:latin typeface="Calibri" pitchFamily="34" charset="0"/>
-                <a:ea typeface="Calibri" pitchFamily="34" charset="-122"/>
-                <a:cs typeface="Calibri" pitchFamily="34" charset="-120"/>
-              </a:rPr>
-              <a:t>0.0002s</a:t>
-            </a:r>
-            <a:endParaRPr lang="en-US" sz="1300" dirty="0"/>
-          </a:p>
-        </p:txBody>
-      </p:sp>
-      <p:sp>
-        <p:nvSpPr>
-          <p:cNvPr id="11" name="Text 9"/>
-          <p:cNvSpPr/>
-          <p:nvPr/>
-        </p:nvSpPr>
-        <p:spPr>
-          <a:xfrm>
-            <a:off x="548640" y="2898648"/>
-            <a:ext cx="3108960" cy="365760"/>
-          </a:xfrm>
-          <a:prstGeom prst="rect">
-            <a:avLst/>
-          </a:prstGeom>
-          <a:noFill/>
-          <a:ln/>
-        </p:spPr>
-        <p:txBody>
-          <a:bodyPr wrap="square" lIns="0" tIns="0" rIns="0" bIns="0" rtlCol="0" anchor="ctr"/>
-          <a:lstStyle/>
-          <a:p>
-            <a:pPr indent="0" marL="0">
-              <a:buNone/>
-            </a:pPr>
-            <a:r>
-              <a:rPr lang="en-US" sz="1300" dirty="0">
-                <a:solidFill>
-                  <a:srgbClr val="44506A"/>
-                </a:solidFill>
-                <a:latin typeface="Calibri" pitchFamily="34" charset="0"/>
-                <a:ea typeface="Calibri" pitchFamily="34" charset="-122"/>
-                <a:cs typeface="Calibri" pitchFamily="34" charset="-120"/>
-              </a:rPr>
-              <a:t>Greedy heuristic</a:t>
-            </a:r>
-            <a:endParaRPr lang="en-US" sz="1300" dirty="0"/>
-          </a:p>
-        </p:txBody>
-      </p:sp>
-      <p:sp>
-        <p:nvSpPr>
-          <p:cNvPr id="12" name="Text 10"/>
-          <p:cNvSpPr/>
-          <p:nvPr/>
-        </p:nvSpPr>
-        <p:spPr>
-          <a:xfrm>
-            <a:off x="3749040" y="2898648"/>
-            <a:ext cx="1645920" cy="365760"/>
-          </a:xfrm>
-          <a:prstGeom prst="rect">
-            <a:avLst/>
-          </a:prstGeom>
-          <a:noFill/>
-          <a:ln/>
-        </p:spPr>
-        <p:txBody>
-          <a:bodyPr wrap="square" lIns="0" tIns="0" rIns="0" bIns="0" rtlCol="0" anchor="ctr"/>
-          <a:lstStyle/>
-          <a:p>
-            <a:pPr indent="0" marL="0">
-              <a:buNone/>
-            </a:pPr>
-            <a:r>
-              <a:rPr lang="en-US" sz="1300" b="1" dirty="0">
-                <a:solidFill>
-                  <a:srgbClr val="16213E"/>
-                </a:solidFill>
-                <a:latin typeface="Calibri" pitchFamily="34" charset="0"/>
-                <a:ea typeface="Calibri" pitchFamily="34" charset="-122"/>
-                <a:cs typeface="Calibri" pitchFamily="34" charset="-120"/>
-              </a:rPr>
-              <a:t>378</a:t>
-            </a:r>
-            <a:endParaRPr lang="en-US" sz="1300" dirty="0"/>
-          </a:p>
-        </p:txBody>
-      </p:sp>
-      <p:sp>
-        <p:nvSpPr>
-          <p:cNvPr id="13" name="Text 11"/>
-          <p:cNvSpPr/>
-          <p:nvPr/>
-        </p:nvSpPr>
-        <p:spPr>
-          <a:xfrm>
-            <a:off x="5486400" y="2898648"/>
-            <a:ext cx="1645920" cy="365760"/>
-          </a:xfrm>
-          <a:prstGeom prst="rect">
-            <a:avLst/>
-          </a:prstGeom>
-          <a:noFill/>
-          <a:ln/>
-        </p:spPr>
-        <p:txBody>
-          <a:bodyPr wrap="square" lIns="0" tIns="0" rIns="0" bIns="0" rtlCol="0" anchor="ctr"/>
-          <a:lstStyle/>
-          <a:p>
-            <a:pPr indent="0" marL="0">
-              <a:buNone/>
-            </a:pPr>
-            <a:r>
-              <a:rPr lang="en-US" sz="1300" dirty="0">
-                <a:solidFill>
-                  <a:srgbClr val="44506A"/>
-                </a:solidFill>
-                <a:latin typeface="Calibri" pitchFamily="34" charset="0"/>
-                <a:ea typeface="Calibri" pitchFamily="34" charset="-122"/>
-                <a:cs typeface="Calibri" pitchFamily="34" charset="-120"/>
-              </a:rPr>
-              <a:t>0.0000s</a:t>
-            </a:r>
-            <a:endParaRPr lang="en-US" sz="1300" dirty="0"/>
-          </a:p>
-        </p:txBody>
-      </p:sp>
-      <p:sp>
-        <p:nvSpPr>
-          <p:cNvPr id="14" name="Text 12"/>
-          <p:cNvSpPr/>
-          <p:nvPr/>
-        </p:nvSpPr>
-        <p:spPr>
-          <a:xfrm>
-            <a:off x="548640" y="3401568"/>
-            <a:ext cx="3108960" cy="365760"/>
-          </a:xfrm>
-          <a:prstGeom prst="rect">
-            <a:avLst/>
-          </a:prstGeom>
-          <a:noFill/>
-          <a:ln/>
-        </p:spPr>
-        <p:txBody>
-          <a:bodyPr wrap="square" lIns="0" tIns="0" rIns="0" bIns="0" rtlCol="0" anchor="ctr"/>
-          <a:lstStyle/>
-          <a:p>
-            <a:pPr indent="0" marL="0">
-              <a:buNone/>
-            </a:pPr>
-            <a:r>
-              <a:rPr lang="en-US" sz="1300" dirty="0">
-                <a:solidFill>
-                  <a:srgbClr val="44506A"/>
-                </a:solidFill>
-                <a:latin typeface="Calibri" pitchFamily="34" charset="0"/>
-                <a:ea typeface="Calibri" pitchFamily="34" charset="-122"/>
-                <a:cs typeface="Calibri" pitchFamily="34" charset="-120"/>
-              </a:rPr>
-              <a:t>QAOA (Qiskit simulator)</a:t>
-            </a:r>
-            <a:endParaRPr lang="en-US" sz="1300" dirty="0"/>
-          </a:p>
-        </p:txBody>
-      </p:sp>
-      <p:sp>
-        <p:nvSpPr>
-          <p:cNvPr id="15" name="Text 13"/>
-          <p:cNvSpPr/>
-          <p:nvPr/>
-        </p:nvSpPr>
-        <p:spPr>
-          <a:xfrm>
-            <a:off x="3749040" y="3401568"/>
-            <a:ext cx="1645920" cy="365760"/>
-          </a:xfrm>
-          <a:prstGeom prst="rect">
-            <a:avLst/>
-          </a:prstGeom>
-          <a:noFill/>
-          <a:ln/>
-        </p:spPr>
-        <p:txBody>
-          <a:bodyPr wrap="square" lIns="0" tIns="0" rIns="0" bIns="0" rtlCol="0" anchor="ctr"/>
-          <a:lstStyle/>
-          <a:p>
-            <a:pPr indent="0" marL="0">
-              <a:buNone/>
-            </a:pPr>
-            <a:r>
-              <a:rPr lang="en-US" sz="1300" b="1" dirty="0">
-                <a:solidFill>
-                  <a:srgbClr val="16213E"/>
-                </a:solidFill>
-                <a:latin typeface="Calibri" pitchFamily="34" charset="0"/>
-                <a:ea typeface="Calibri" pitchFamily="34" charset="-122"/>
-                <a:cs typeface="Calibri" pitchFamily="34" charset="-120"/>
-              </a:rPr>
-              <a:t>378</a:t>
-            </a:r>
-            <a:endParaRPr lang="en-US" sz="1300" dirty="0"/>
-          </a:p>
-        </p:txBody>
-      </p:sp>
-      <p:sp>
-        <p:nvSpPr>
-          <p:cNvPr id="16" name="Text 14"/>
-          <p:cNvSpPr/>
-          <p:nvPr/>
-        </p:nvSpPr>
-        <p:spPr>
-          <a:xfrm>
-            <a:off x="5486400" y="3401568"/>
-            <a:ext cx="1645920" cy="365760"/>
-          </a:xfrm>
-          <a:prstGeom prst="rect">
-            <a:avLst/>
-          </a:prstGeom>
-          <a:noFill/>
-          <a:ln/>
-        </p:spPr>
-        <p:txBody>
-          <a:bodyPr wrap="square" lIns="0" tIns="0" rIns="0" bIns="0" rtlCol="0" anchor="ctr"/>
-          <a:lstStyle/>
-          <a:p>
-            <a:pPr indent="0" marL="0">
-              <a:buNone/>
-            </a:pPr>
-            <a:r>
-              <a:rPr lang="en-US" sz="1300" dirty="0">
-                <a:solidFill>
-                  <a:srgbClr val="44506A"/>
-                </a:solidFill>
-                <a:latin typeface="Calibri" pitchFamily="34" charset="0"/>
-                <a:ea typeface="Calibri" pitchFamily="34" charset="-122"/>
-                <a:cs typeface="Calibri" pitchFamily="34" charset="-120"/>
-              </a:rPr>
-              <a:t>~33s</a:t>
-            </a:r>
-            <a:endParaRPr lang="en-US" sz="1300" dirty="0"/>
-          </a:p>
-        </p:txBody>
-      </p:sp>
-      <p:sp>
-        <p:nvSpPr>
-          <p:cNvPr id="17" name="Text 15"/>
-          <p:cNvSpPr/>
-          <p:nvPr/>
-        </p:nvSpPr>
-        <p:spPr>
-          <a:xfrm>
-            <a:off x="548640" y="4041648"/>
-            <a:ext cx="6583680" cy="548640"/>
-          </a:xfrm>
-          <a:prstGeom prst="rect">
-            <a:avLst/>
-          </a:prstGeom>
-          <a:noFill/>
-          <a:ln/>
-        </p:spPr>
-        <p:txBody>
-          <a:bodyPr wrap="square" lIns="0" tIns="0" rIns="0" bIns="0" rtlCol="0" anchor="ctr"/>
-          <a:lstStyle/>
-          <a:p>
-            <a:pPr indent="0" marL="0">
-              <a:buNone/>
-            </a:pPr>
-            <a:r>
-              <a:rPr lang="en-US" sz="1200" i="1" dirty="0">
-                <a:solidFill>
-                  <a:srgbClr val="44506A"/>
-                </a:solidFill>
-                <a:latin typeface="Calibri" pitchFamily="34" charset="0"/>
-                <a:ea typeface="Calibri" pitchFamily="34" charset="-122"/>
-                <a:cs typeface="Calibri" pitchFamily="34" charset="-120"/>
-              </a:rPr>
-              <a:t>Classical is ~165,000× faster here — expected for a problem this structured, not a quantum shortfall.</a:t>
-            </a:r>
-            <a:endParaRPr lang="en-US" sz="1200" dirty="0"/>
-          </a:p>
-        </p:txBody>
-      </p:sp>
-      <p:sp>
-        <p:nvSpPr>
-          <p:cNvPr id="18" name="Shape 16"/>
-          <p:cNvSpPr/>
-          <p:nvPr/>
-        </p:nvSpPr>
-        <p:spPr>
-          <a:xfrm>
-            <a:off x="7498080" y="1874520"/>
-            <a:ext cx="4114800" cy="4434840"/>
+      <p:graphicFrame>
+        <p:nvGraphicFramePr>
+          <p:cNvPr id="10" name="Chart 0"/>
+          <p:cNvGraphicFramePr/>
+          <p:nvPr/>
+        </p:nvGraphicFramePr>
+        <p:xfrm>
+          <a:off x="548640" y="2880360"/>
+          <a:ext cx="6675120" cy="3383280"/>
+        </p:xfrm>
+        <a:graphic>
+          <a:graphicData uri="http://schemas.openxmlformats.org/drawingml/2006/chart">
+            <c:chart xmlns:c="http://schemas.openxmlformats.org/drawingml/2006/chart" xmlns:r="http://schemas.openxmlformats.org/officeDocument/2006/relationships" r:id="rId3"/>
+          </a:graphicData>
+        </a:graphic>
+      </p:graphicFrame>
+      <p:sp>
+        <p:nvSpPr>
+          <p:cNvPr id="11" name="Shape 8"/>
+          <p:cNvSpPr/>
+          <p:nvPr/>
+        </p:nvSpPr>
+        <p:spPr>
+          <a:xfrm>
+            <a:off x="7498080" y="2880360"/>
+            <a:ext cx="4114800" cy="3383280"/>
           </a:xfrm>
           <a:prstGeom prst="rect">
             <a:avLst/>
@@ -4739,30 +4986,30 @@
       </p:sp>
       <p:sp>
         <p:nvSpPr>
-          <p:cNvPr id="19" name="Text 17"/>
-          <p:cNvSpPr/>
-          <p:nvPr/>
-        </p:nvSpPr>
-        <p:spPr>
-          <a:xfrm>
-            <a:off x="7772400" y="2103120"/>
-            <a:ext cx="3566160" cy="365760"/>
-          </a:xfrm>
-          <a:prstGeom prst="rect">
-            <a:avLst/>
-          </a:prstGeom>
-          <a:noFill/>
-          <a:ln/>
-        </p:spPr>
-        <p:txBody>
-          <a:bodyPr wrap="square" lIns="0" tIns="0" rIns="0" bIns="0" rtlCol="0" anchor="ctr"/>
-          <a:lstStyle/>
-          <a:p>
-            <a:pPr indent="0" marL="0">
-              <a:buNone/>
-            </a:pPr>
-            <a:r>
-              <a:rPr lang="en-US" sz="1100" b="1" spc="100" kern="0" dirty="0">
+          <p:cNvPr id="12" name="Text 9"/>
+          <p:cNvSpPr/>
+          <p:nvPr/>
+        </p:nvSpPr>
+        <p:spPr>
+          <a:xfrm>
+            <a:off x="7772400" y="3108960"/>
+            <a:ext cx="3566160" cy="320040"/>
+          </a:xfrm>
+          <a:prstGeom prst="rect">
+            <a:avLst/>
+          </a:prstGeom>
+          <a:noFill/>
+          <a:ln/>
+        </p:spPr>
+        <p:txBody>
+          <a:bodyPr wrap="square" lIns="0" tIns="0" rIns="0" bIns="0" rtlCol="0" anchor="ctr"/>
+          <a:lstStyle/>
+          <a:p>
+            <a:pPr marL="0" indent="0">
+              <a:buNone/>
+            </a:pPr>
+            <a:r>
+              <a:rPr lang="en-US" sz="1100" b="1" kern="0" spc="100" dirty="0">
                 <a:solidFill>
                   <a:srgbClr val="F2A900"/>
                 </a:solidFill>
@@ -4770,7 +5017,7 @@
                 <a:ea typeface="Calibri" pitchFamily="34" charset="-122"/>
                 <a:cs typeface="Calibri" pitchFamily="34" charset="-120"/>
               </a:rPr>
-              <a:t>RELIABILITY, NOT ONE LUCKY RUN</a:t>
+              <a:t>WHAT THIS MEANS</a:t>
             </a:r>
             <a:endParaRPr lang="en-US" sz="1100" dirty="0"/>
           </a:p>
@@ -4778,65 +5025,26 @@
       </p:sp>
       <p:sp>
         <p:nvSpPr>
-          <p:cNvPr id="20" name="Text 18"/>
-          <p:cNvSpPr/>
-          <p:nvPr/>
-        </p:nvSpPr>
-        <p:spPr>
-          <a:xfrm>
-            <a:off x="7772400" y="2560320"/>
-            <a:ext cx="3566160" cy="1005840"/>
-          </a:xfrm>
-          <a:prstGeom prst="rect">
-            <a:avLst/>
-          </a:prstGeom>
-          <a:noFill/>
-          <a:ln/>
-        </p:spPr>
-        <p:txBody>
-          <a:bodyPr wrap="square" lIns="0" tIns="0" rIns="0" bIns="0" rtlCol="0" anchor="ctr"/>
-          <a:lstStyle/>
-          <a:p>
-            <a:pPr indent="0" marL="0">
-              <a:buNone/>
-            </a:pPr>
-            <a:r>
-              <a:rPr lang="en-US" sz="5400" b="1" dirty="0">
-                <a:solidFill>
-                  <a:srgbClr val="FFFFFF"/>
-                </a:solidFill>
-                <a:latin typeface="Cambria" pitchFamily="34" charset="0"/>
-                <a:ea typeface="Cambria" pitchFamily="34" charset="-122"/>
-                <a:cs typeface="Cambria" pitchFamily="34" charset="-120"/>
-              </a:rPr>
-              <a:t>100%</a:t>
-            </a:r>
-            <a:endParaRPr lang="en-US" sz="5400" dirty="0"/>
-          </a:p>
-        </p:txBody>
-      </p:sp>
-      <p:sp>
-        <p:nvSpPr>
-          <p:cNvPr id="21" name="Text 19"/>
+          <p:cNvPr id="13" name="Text 10"/>
           <p:cNvSpPr/>
           <p:nvPr/>
         </p:nvSpPr>
         <p:spPr>
           <a:xfrm>
             <a:off x="7772400" y="3520440"/>
-            <a:ext cx="3566160" cy="914400"/>
-          </a:xfrm>
-          <a:prstGeom prst="rect">
-            <a:avLst/>
-          </a:prstGeom>
-          <a:noFill/>
-          <a:ln/>
-        </p:spPr>
-        <p:txBody>
-          <a:bodyPr wrap="square" lIns="0" tIns="0" rIns="0" bIns="0" rtlCol="0" anchor="ctr"/>
-          <a:lstStyle/>
-          <a:p>
-            <a:pPr indent="0" marL="0">
+            <a:ext cx="3566160" cy="1188720"/>
+          </a:xfrm>
+          <a:prstGeom prst="rect">
+            <a:avLst/>
+          </a:prstGeom>
+          <a:noFill/>
+          <a:ln/>
+        </p:spPr>
+        <p:txBody>
+          <a:bodyPr wrap="square" lIns="0" tIns="0" rIns="0" bIns="0" rtlCol="0" anchor="ctr"/>
+          <a:lstStyle/>
+          <a:p>
+            <a:pPr marL="0" indent="0">
               <a:buNone/>
             </a:pPr>
             <a:r>
@@ -4848,7 +5056,7 @@
                 <a:ea typeface="Calibri" pitchFamily="34" charset="-122"/>
                 <a:cs typeface="Calibri" pitchFamily="34" charset="-120"/>
               </a:rPr>
-              <a:t>success rate — 6 of 6 independent runs reached the exact optimum, from randomized starting points</a:t>
+              <a:t>Revenue barely needs to change — today's process is already close to revenue-optimal. The real opportunity is shipping efficiency, not accepting more orders.</a:t>
             </a:r>
             <a:endParaRPr lang="en-US" sz="1300" dirty="0"/>
           </a:p>
@@ -4856,49 +5064,26 @@
       </p:sp>
       <p:sp>
         <p:nvSpPr>
-          <p:cNvPr id="22" name="Shape 20"/>
-          <p:cNvSpPr/>
-          <p:nvPr/>
-        </p:nvSpPr>
-        <p:spPr>
-          <a:xfrm>
-            <a:off x="7772400" y="4572000"/>
-            <a:ext cx="3291840" cy="0"/>
-          </a:xfrm>
-          <a:prstGeom prst="line">
-            <a:avLst/>
-          </a:prstGeom>
-          <a:noFill/>
-          <a:ln w="12700">
-            <a:solidFill>
-              <a:srgbClr val="2B3A5C"/>
-            </a:solidFill>
-            <a:prstDash val="solid"/>
-          </a:ln>
-        </p:spPr>
-      </p:sp>
-      <p:sp>
-        <p:nvSpPr>
-          <p:cNvPr id="23" name="Text 21"/>
-          <p:cNvSpPr/>
-          <p:nvPr/>
-        </p:nvSpPr>
-        <p:spPr>
-          <a:xfrm>
-            <a:off x="7772400" y="4754880"/>
-            <a:ext cx="3566160" cy="1371600"/>
-          </a:xfrm>
-          <a:prstGeom prst="rect">
-            <a:avLst/>
-          </a:prstGeom>
-          <a:noFill/>
-          <a:ln/>
-        </p:spPr>
-        <p:txBody>
-          <a:bodyPr wrap="square" lIns="0" tIns="0" rIns="0" bIns="0" rtlCol="0" anchor="ctr"/>
-          <a:lstStyle/>
-          <a:p>
-            <a:pPr indent="0" marL="0">
+          <p:cNvPr id="14" name="Text 11"/>
+          <p:cNvSpPr/>
+          <p:nvPr/>
+        </p:nvSpPr>
+        <p:spPr>
+          <a:xfrm>
+            <a:off x="7772400" y="4846320"/>
+            <a:ext cx="3566160" cy="1280160"/>
+          </a:xfrm>
+          <a:prstGeom prst="rect">
+            <a:avLst/>
+          </a:prstGeom>
+          <a:noFill/>
+          <a:ln/>
+        </p:spPr>
+        <p:txBody>
+          <a:bodyPr wrap="square" lIns="0" tIns="0" rIns="0" bIns="0" rtlCol="0" anchor="ctr"/>
+          <a:lstStyle/>
+          <a:p>
+            <a:pPr marL="0" indent="0">
               <a:buNone/>
             </a:pPr>
             <a:r>
@@ -4910,7 +5095,7 @@
                 <a:ea typeface="Calibri" pitchFamily="34" charset="-122"/>
                 <a:cs typeface="Calibri" pitchFamily="34" charset="-120"/>
               </a:rPr>
-              <a:t>QAOA is deterministic from a fixed starting point — a single run proves nothing about reliable convergence. This is a real statistic, not a favorable one-off.</a:t>
+              <a:t>Trade-off: optimizing hard for shipping cost concentrates volume into fewer, cheaper-to-ship-from plants — utilization evenness drops as a result. Cost and network balance are different goals.</a:t>
             </a:r>
             <a:endParaRPr lang="en-US" sz="1200" dirty="0"/>
           </a:p>
@@ -4918,7 +5103,7 @@
       </p:sp>
       <p:sp>
         <p:nvSpPr>
-          <p:cNvPr id="24" name="Text 22"/>
+          <p:cNvPr id="15" name="Text 12"/>
           <p:cNvSpPr/>
           <p:nvPr/>
         </p:nvSpPr>
@@ -4937,7 +5122,7 @@
           <a:bodyPr wrap="square" lIns="0" tIns="0" rIns="0" bIns="0" rtlCol="0" anchor="ctr"/>
           <a:lstStyle/>
           <a:p>
-            <a:pPr indent="0" marL="0">
+            <a:pPr marL="0" indent="0">
               <a:buNone/>
             </a:pPr>
             <a:r>
@@ -4957,7 +5142,7 @@
       </p:sp>
       <p:sp>
         <p:nvSpPr>
-          <p:cNvPr id="25" name="Text 23"/>
+          <p:cNvPr id="16" name="Text 13"/>
           <p:cNvSpPr/>
           <p:nvPr/>
         </p:nvSpPr>
@@ -4976,7 +5161,7 @@
           <a:bodyPr wrap="square" lIns="0" tIns="0" rIns="0" bIns="0" rtlCol="0" anchor="ctr"/>
           <a:lstStyle/>
           <a:p>
-            <a:pPr algn="r" indent="0" marL="0">
+            <a:pPr marL="0" indent="0" algn="r">
               <a:buNone/>
             </a:pPr>
             <a:r>
@@ -5004,12 +5189,13 @@
 
 <file path=ppt/slides/slide6.xml><?xml version="1.0" encoding="utf-8"?>
 <p:sld xmlns:a="http://schemas.openxmlformats.org/drawingml/2006/main" xmlns:r="http://schemas.openxmlformats.org/officeDocument/2006/relationships" xmlns:p="http://schemas.openxmlformats.org/presentationml/2006/main">
-  <p:cSld name="Slide 6">
+  <p:cSld name="Slide 5">
     <p:bg>
       <p:bgPr>
         <a:solidFill>
-          <a:srgbClr val="0F1729"/>
+          <a:srgbClr val="FFFFFF"/>
         </a:solidFill>
+        <a:effectLst/>
       </p:bgPr>
     </p:bg>
     <p:spTree>
@@ -5034,32 +5220,32 @@
         </p:nvSpPr>
         <p:spPr>
           <a:xfrm>
-            <a:off x="548640" y="457200"/>
-            <a:ext cx="9144000" cy="640080"/>
-          </a:xfrm>
-          <a:prstGeom prst="rect">
-            <a:avLst/>
-          </a:prstGeom>
-          <a:noFill/>
-          <a:ln/>
-        </p:spPr>
-        <p:txBody>
-          <a:bodyPr wrap="square" lIns="0" tIns="0" rIns="0" bIns="0" rtlCol="0" anchor="ctr"/>
-          <a:lstStyle/>
-          <a:p>
-            <a:pPr indent="0" marL="0">
+            <a:off x="548640" y="411480"/>
+            <a:ext cx="7772400" cy="640080"/>
+          </a:xfrm>
+          <a:prstGeom prst="rect">
+            <a:avLst/>
+          </a:prstGeom>
+          <a:noFill/>
+          <a:ln/>
+        </p:spPr>
+        <p:txBody>
+          <a:bodyPr wrap="square" lIns="0" tIns="0" rIns="0" bIns="0" rtlCol="0" anchor="ctr"/>
+          <a:lstStyle/>
+          <a:p>
+            <a:pPr marL="0" indent="0">
               <a:buNone/>
             </a:pPr>
             <a:r>
               <a:rPr lang="en-US" sz="3200" b="1" dirty="0">
                 <a:solidFill>
-                  <a:srgbClr val="FFFFFF"/>
+                  <a:srgbClr val="16213E"/>
                 </a:solidFill>
                 <a:latin typeface="Cambria" pitchFamily="34" charset="0"/>
                 <a:ea typeface="Cambria" pitchFamily="34" charset="-122"/>
                 <a:cs typeface="Cambria" pitchFamily="34" charset="-120"/>
               </a:rPr>
-              <a:t>Limitations &amp; Next Steps</a:t>
+              <a:t>Quantum Benchmark</a:t>
             </a:r>
             <a:endParaRPr lang="en-US" sz="3200" dirty="0"/>
           </a:p>
@@ -5073,24 +5259,613 @@
         </p:nvSpPr>
         <p:spPr>
           <a:xfrm>
-            <a:off x="548640" y="1371600"/>
-            <a:ext cx="5120640" cy="320040"/>
-          </a:xfrm>
-          <a:prstGeom prst="rect">
-            <a:avLst/>
-          </a:prstGeom>
-          <a:noFill/>
-          <a:ln/>
-        </p:spPr>
-        <p:txBody>
-          <a:bodyPr wrap="square" lIns="0" tIns="0" rIns="0" bIns="0" rtlCol="0" anchor="ctr"/>
-          <a:lstStyle/>
-          <a:p>
-            <a:pPr indent="0" marL="0">
-              <a:buNone/>
-            </a:pPr>
-            <a:r>
-              <a:rPr lang="en-US" sz="1300" b="1" spc="150" kern="0" dirty="0">
+            <a:off x="548640" y="1051560"/>
+            <a:ext cx="10515600" cy="365760"/>
+          </a:xfrm>
+          <a:prstGeom prst="rect">
+            <a:avLst/>
+          </a:prstGeom>
+          <a:noFill/>
+          <a:ln/>
+        </p:spPr>
+        <p:txBody>
+          <a:bodyPr wrap="square" lIns="0" tIns="0" rIns="0" bIns="0" rtlCol="0" anchor="ctr"/>
+          <a:lstStyle/>
+          <a:p>
+            <a:pPr marL="0" indent="0">
+              <a:buNone/>
+            </a:pPr>
+            <a:r>
+              <a:rPr lang="en-US" sz="1400" dirty="0">
+                <a:solidFill>
+                  <a:srgbClr val="44506A"/>
+                </a:solidFill>
+                <a:latin typeface="Calibri" pitchFamily="34" charset="0"/>
+                <a:ea typeface="Calibri" pitchFamily="34" charset="-122"/>
+                <a:cs typeface="Calibri" pitchFamily="34" charset="-120"/>
+              </a:rPr>
+              <a:t>Real 4-order batch (Plant 5385 / SKU 12386067, capacity 8 units) — same problem, three solvers</a:t>
+            </a:r>
+            <a:endParaRPr lang="en-US" sz="1400" dirty="0"/>
+          </a:p>
+        </p:txBody>
+      </p:sp>
+      <p:sp>
+        <p:nvSpPr>
+          <p:cNvPr id="4" name="Text 2"/>
+          <p:cNvSpPr/>
+          <p:nvPr/>
+        </p:nvSpPr>
+        <p:spPr>
+          <a:xfrm>
+            <a:off x="548640" y="1874520"/>
+            <a:ext cx="3108960" cy="365760"/>
+          </a:xfrm>
+          <a:prstGeom prst="rect">
+            <a:avLst/>
+          </a:prstGeom>
+          <a:noFill/>
+          <a:ln/>
+        </p:spPr>
+        <p:txBody>
+          <a:bodyPr wrap="square" lIns="0" tIns="0" rIns="0" bIns="0" rtlCol="0" anchor="ctr"/>
+          <a:lstStyle/>
+          <a:p>
+            <a:pPr marL="0" indent="0">
+              <a:buNone/>
+            </a:pPr>
+            <a:r>
+              <a:rPr lang="en-US" sz="1200" b="1" dirty="0">
+                <a:solidFill>
+                  <a:srgbClr val="16213E"/>
+                </a:solidFill>
+                <a:latin typeface="Calibri" pitchFamily="34" charset="0"/>
+                <a:ea typeface="Calibri" pitchFamily="34" charset="-122"/>
+                <a:cs typeface="Calibri" pitchFamily="34" charset="-120"/>
+              </a:rPr>
+              <a:t>Method</a:t>
+            </a:r>
+            <a:endParaRPr lang="en-US" sz="1200" dirty="0"/>
+          </a:p>
+        </p:txBody>
+      </p:sp>
+      <p:sp>
+        <p:nvSpPr>
+          <p:cNvPr id="5" name="Text 3"/>
+          <p:cNvSpPr/>
+          <p:nvPr/>
+        </p:nvSpPr>
+        <p:spPr>
+          <a:xfrm>
+            <a:off x="3749040" y="1874520"/>
+            <a:ext cx="1645920" cy="365760"/>
+          </a:xfrm>
+          <a:prstGeom prst="rect">
+            <a:avLst/>
+          </a:prstGeom>
+          <a:noFill/>
+          <a:ln/>
+        </p:spPr>
+        <p:txBody>
+          <a:bodyPr wrap="square" lIns="0" tIns="0" rIns="0" bIns="0" rtlCol="0" anchor="ctr"/>
+          <a:lstStyle/>
+          <a:p>
+            <a:pPr marL="0" indent="0">
+              <a:buNone/>
+            </a:pPr>
+            <a:r>
+              <a:rPr lang="en-US" sz="1200" b="1" dirty="0">
+                <a:solidFill>
+                  <a:srgbClr val="16213E"/>
+                </a:solidFill>
+                <a:latin typeface="Calibri" pitchFamily="34" charset="0"/>
+                <a:ea typeface="Calibri" pitchFamily="34" charset="-122"/>
+                <a:cs typeface="Calibri" pitchFamily="34" charset="-120"/>
+              </a:rPr>
+              <a:t>Objective</a:t>
+            </a:r>
+            <a:endParaRPr lang="en-US" sz="1200" dirty="0"/>
+          </a:p>
+        </p:txBody>
+      </p:sp>
+      <p:sp>
+        <p:nvSpPr>
+          <p:cNvPr id="6" name="Text 4"/>
+          <p:cNvSpPr/>
+          <p:nvPr/>
+        </p:nvSpPr>
+        <p:spPr>
+          <a:xfrm>
+            <a:off x="5486400" y="1874520"/>
+            <a:ext cx="1645920" cy="365760"/>
+          </a:xfrm>
+          <a:prstGeom prst="rect">
+            <a:avLst/>
+          </a:prstGeom>
+          <a:noFill/>
+          <a:ln/>
+        </p:spPr>
+        <p:txBody>
+          <a:bodyPr wrap="square" lIns="0" tIns="0" rIns="0" bIns="0" rtlCol="0" anchor="ctr"/>
+          <a:lstStyle/>
+          <a:p>
+            <a:pPr marL="0" indent="0">
+              <a:buNone/>
+            </a:pPr>
+            <a:r>
+              <a:rPr lang="en-US" sz="1200" b="1" dirty="0">
+                <a:solidFill>
+                  <a:srgbClr val="16213E"/>
+                </a:solidFill>
+                <a:latin typeface="Calibri" pitchFamily="34" charset="0"/>
+                <a:ea typeface="Calibri" pitchFamily="34" charset="-122"/>
+                <a:cs typeface="Calibri" pitchFamily="34" charset="-120"/>
+              </a:rPr>
+              <a:t>Runtime</a:t>
+            </a:r>
+            <a:endParaRPr lang="en-US" sz="1200" dirty="0"/>
+          </a:p>
+        </p:txBody>
+      </p:sp>
+      <p:sp>
+        <p:nvSpPr>
+          <p:cNvPr id="7" name="Shape 5"/>
+          <p:cNvSpPr/>
+          <p:nvPr/>
+        </p:nvSpPr>
+        <p:spPr>
+          <a:xfrm>
+            <a:off x="548640" y="2286000"/>
+            <a:ext cx="6583680" cy="0"/>
+          </a:xfrm>
+          <a:prstGeom prst="line">
+            <a:avLst/>
+          </a:prstGeom>
+          <a:noFill/>
+          <a:ln w="12700">
+            <a:solidFill>
+              <a:srgbClr val="D5DCE8"/>
+            </a:solidFill>
+            <a:prstDash val="solid"/>
+          </a:ln>
+        </p:spPr>
+      </p:sp>
+      <p:sp>
+        <p:nvSpPr>
+          <p:cNvPr id="8" name="Text 6"/>
+          <p:cNvSpPr/>
+          <p:nvPr/>
+        </p:nvSpPr>
+        <p:spPr>
+          <a:xfrm>
+            <a:off x="548640" y="2395728"/>
+            <a:ext cx="3108960" cy="365760"/>
+          </a:xfrm>
+          <a:prstGeom prst="rect">
+            <a:avLst/>
+          </a:prstGeom>
+          <a:noFill/>
+          <a:ln/>
+        </p:spPr>
+        <p:txBody>
+          <a:bodyPr wrap="square" lIns="0" tIns="0" rIns="0" bIns="0" rtlCol="0" anchor="ctr"/>
+          <a:lstStyle/>
+          <a:p>
+            <a:pPr marL="0" indent="0">
+              <a:buNone/>
+            </a:pPr>
+            <a:r>
+              <a:rPr lang="en-US" sz="1300" dirty="0">
+                <a:solidFill>
+                  <a:srgbClr val="44506A"/>
+                </a:solidFill>
+                <a:latin typeface="Calibri" pitchFamily="34" charset="0"/>
+                <a:ea typeface="Calibri" pitchFamily="34" charset="-122"/>
+                <a:cs typeface="Calibri" pitchFamily="34" charset="-120"/>
+              </a:rPr>
+              <a:t>Exact (brute-force)</a:t>
+            </a:r>
+            <a:endParaRPr lang="en-US" sz="1300" dirty="0"/>
+          </a:p>
+        </p:txBody>
+      </p:sp>
+      <p:sp>
+        <p:nvSpPr>
+          <p:cNvPr id="9" name="Text 7"/>
+          <p:cNvSpPr/>
+          <p:nvPr/>
+        </p:nvSpPr>
+        <p:spPr>
+          <a:xfrm>
+            <a:off x="3749040" y="2395728"/>
+            <a:ext cx="1645920" cy="365760"/>
+          </a:xfrm>
+          <a:prstGeom prst="rect">
+            <a:avLst/>
+          </a:prstGeom>
+          <a:noFill/>
+          <a:ln/>
+        </p:spPr>
+        <p:txBody>
+          <a:bodyPr wrap="square" lIns="0" tIns="0" rIns="0" bIns="0" rtlCol="0" anchor="ctr"/>
+          <a:lstStyle/>
+          <a:p>
+            <a:pPr marL="0" indent="0">
+              <a:buNone/>
+            </a:pPr>
+            <a:r>
+              <a:rPr lang="en-US" sz="1300" b="1" dirty="0">
+                <a:solidFill>
+                  <a:srgbClr val="16213E"/>
+                </a:solidFill>
+                <a:latin typeface="Calibri" pitchFamily="34" charset="0"/>
+                <a:ea typeface="Calibri" pitchFamily="34" charset="-122"/>
+                <a:cs typeface="Calibri" pitchFamily="34" charset="-120"/>
+              </a:rPr>
+              <a:t>378</a:t>
+            </a:r>
+            <a:endParaRPr lang="en-US" sz="1300" dirty="0"/>
+          </a:p>
+        </p:txBody>
+      </p:sp>
+      <p:sp>
+        <p:nvSpPr>
+          <p:cNvPr id="10" name="Text 8"/>
+          <p:cNvSpPr/>
+          <p:nvPr/>
+        </p:nvSpPr>
+        <p:spPr>
+          <a:xfrm>
+            <a:off x="5486400" y="2395728"/>
+            <a:ext cx="1645920" cy="365760"/>
+          </a:xfrm>
+          <a:prstGeom prst="rect">
+            <a:avLst/>
+          </a:prstGeom>
+          <a:noFill/>
+          <a:ln/>
+        </p:spPr>
+        <p:txBody>
+          <a:bodyPr wrap="square" lIns="0" tIns="0" rIns="0" bIns="0" rtlCol="0" anchor="ctr"/>
+          <a:lstStyle/>
+          <a:p>
+            <a:pPr marL="0" indent="0">
+              <a:buNone/>
+            </a:pPr>
+            <a:r>
+              <a:rPr lang="en-US" sz="1300" dirty="0">
+                <a:solidFill>
+                  <a:srgbClr val="44506A"/>
+                </a:solidFill>
+                <a:latin typeface="Calibri" pitchFamily="34" charset="0"/>
+                <a:ea typeface="Calibri" pitchFamily="34" charset="-122"/>
+                <a:cs typeface="Calibri" pitchFamily="34" charset="-120"/>
+              </a:rPr>
+              <a:t>0.0002s</a:t>
+            </a:r>
+            <a:endParaRPr lang="en-US" sz="1300" dirty="0"/>
+          </a:p>
+        </p:txBody>
+      </p:sp>
+      <p:sp>
+        <p:nvSpPr>
+          <p:cNvPr id="11" name="Text 9"/>
+          <p:cNvSpPr/>
+          <p:nvPr/>
+        </p:nvSpPr>
+        <p:spPr>
+          <a:xfrm>
+            <a:off x="548640" y="2898648"/>
+            <a:ext cx="3108960" cy="365760"/>
+          </a:xfrm>
+          <a:prstGeom prst="rect">
+            <a:avLst/>
+          </a:prstGeom>
+          <a:noFill/>
+          <a:ln/>
+        </p:spPr>
+        <p:txBody>
+          <a:bodyPr wrap="square" lIns="0" tIns="0" rIns="0" bIns="0" rtlCol="0" anchor="ctr"/>
+          <a:lstStyle/>
+          <a:p>
+            <a:pPr marL="0" indent="0">
+              <a:buNone/>
+            </a:pPr>
+            <a:r>
+              <a:rPr lang="en-US" sz="1300" dirty="0">
+                <a:solidFill>
+                  <a:srgbClr val="44506A"/>
+                </a:solidFill>
+                <a:latin typeface="Calibri" pitchFamily="34" charset="0"/>
+                <a:ea typeface="Calibri" pitchFamily="34" charset="-122"/>
+                <a:cs typeface="Calibri" pitchFamily="34" charset="-120"/>
+              </a:rPr>
+              <a:t>Greedy heuristic</a:t>
+            </a:r>
+            <a:endParaRPr lang="en-US" sz="1300" dirty="0"/>
+          </a:p>
+        </p:txBody>
+      </p:sp>
+      <p:sp>
+        <p:nvSpPr>
+          <p:cNvPr id="12" name="Text 10"/>
+          <p:cNvSpPr/>
+          <p:nvPr/>
+        </p:nvSpPr>
+        <p:spPr>
+          <a:xfrm>
+            <a:off x="3749040" y="2898648"/>
+            <a:ext cx="1645920" cy="365760"/>
+          </a:xfrm>
+          <a:prstGeom prst="rect">
+            <a:avLst/>
+          </a:prstGeom>
+          <a:noFill/>
+          <a:ln/>
+        </p:spPr>
+        <p:txBody>
+          <a:bodyPr wrap="square" lIns="0" tIns="0" rIns="0" bIns="0" rtlCol="0" anchor="ctr"/>
+          <a:lstStyle/>
+          <a:p>
+            <a:pPr marL="0" indent="0">
+              <a:buNone/>
+            </a:pPr>
+            <a:r>
+              <a:rPr lang="en-US" sz="1300" b="1" dirty="0">
+                <a:solidFill>
+                  <a:srgbClr val="16213E"/>
+                </a:solidFill>
+                <a:latin typeface="Calibri" pitchFamily="34" charset="0"/>
+                <a:ea typeface="Calibri" pitchFamily="34" charset="-122"/>
+                <a:cs typeface="Calibri" pitchFamily="34" charset="-120"/>
+              </a:rPr>
+              <a:t>378</a:t>
+            </a:r>
+            <a:endParaRPr lang="en-US" sz="1300" dirty="0"/>
+          </a:p>
+        </p:txBody>
+      </p:sp>
+      <p:sp>
+        <p:nvSpPr>
+          <p:cNvPr id="13" name="Text 11"/>
+          <p:cNvSpPr/>
+          <p:nvPr/>
+        </p:nvSpPr>
+        <p:spPr>
+          <a:xfrm>
+            <a:off x="5486400" y="2898648"/>
+            <a:ext cx="1645920" cy="365760"/>
+          </a:xfrm>
+          <a:prstGeom prst="rect">
+            <a:avLst/>
+          </a:prstGeom>
+          <a:noFill/>
+          <a:ln/>
+        </p:spPr>
+        <p:txBody>
+          <a:bodyPr wrap="square" lIns="0" tIns="0" rIns="0" bIns="0" rtlCol="0" anchor="ctr"/>
+          <a:lstStyle/>
+          <a:p>
+            <a:pPr marL="0" indent="0">
+              <a:buNone/>
+            </a:pPr>
+            <a:r>
+              <a:rPr lang="en-US" sz="1300" dirty="0">
+                <a:solidFill>
+                  <a:srgbClr val="44506A"/>
+                </a:solidFill>
+                <a:latin typeface="Calibri" pitchFamily="34" charset="0"/>
+                <a:ea typeface="Calibri" pitchFamily="34" charset="-122"/>
+                <a:cs typeface="Calibri" pitchFamily="34" charset="-120"/>
+              </a:rPr>
+              <a:t>0.0000s</a:t>
+            </a:r>
+            <a:endParaRPr lang="en-US" sz="1300" dirty="0"/>
+          </a:p>
+        </p:txBody>
+      </p:sp>
+      <p:sp>
+        <p:nvSpPr>
+          <p:cNvPr id="14" name="Text 12"/>
+          <p:cNvSpPr/>
+          <p:nvPr/>
+        </p:nvSpPr>
+        <p:spPr>
+          <a:xfrm>
+            <a:off x="548640" y="3401568"/>
+            <a:ext cx="3108960" cy="365760"/>
+          </a:xfrm>
+          <a:prstGeom prst="rect">
+            <a:avLst/>
+          </a:prstGeom>
+          <a:noFill/>
+          <a:ln/>
+        </p:spPr>
+        <p:txBody>
+          <a:bodyPr wrap="square" lIns="0" tIns="0" rIns="0" bIns="0" rtlCol="0" anchor="ctr"/>
+          <a:lstStyle/>
+          <a:p>
+            <a:pPr marL="0" indent="0">
+              <a:buNone/>
+            </a:pPr>
+            <a:r>
+              <a:rPr lang="en-US" sz="1300" dirty="0">
+                <a:solidFill>
+                  <a:srgbClr val="44506A"/>
+                </a:solidFill>
+                <a:latin typeface="Calibri" pitchFamily="34" charset="0"/>
+                <a:ea typeface="Calibri" pitchFamily="34" charset="-122"/>
+                <a:cs typeface="Calibri" pitchFamily="34" charset="-120"/>
+              </a:rPr>
+              <a:t>QAOA (Qiskit simulator)</a:t>
+            </a:r>
+            <a:endParaRPr lang="en-US" sz="1300" dirty="0"/>
+          </a:p>
+        </p:txBody>
+      </p:sp>
+      <p:sp>
+        <p:nvSpPr>
+          <p:cNvPr id="15" name="Text 13"/>
+          <p:cNvSpPr/>
+          <p:nvPr/>
+        </p:nvSpPr>
+        <p:spPr>
+          <a:xfrm>
+            <a:off x="3749040" y="3401568"/>
+            <a:ext cx="1645920" cy="365760"/>
+          </a:xfrm>
+          <a:prstGeom prst="rect">
+            <a:avLst/>
+          </a:prstGeom>
+          <a:noFill/>
+          <a:ln/>
+        </p:spPr>
+        <p:txBody>
+          <a:bodyPr wrap="square" lIns="0" tIns="0" rIns="0" bIns="0" rtlCol="0" anchor="ctr"/>
+          <a:lstStyle/>
+          <a:p>
+            <a:pPr marL="0" indent="0">
+              <a:buNone/>
+            </a:pPr>
+            <a:r>
+              <a:rPr lang="en-US" sz="1300" b="1" dirty="0">
+                <a:solidFill>
+                  <a:srgbClr val="16213E"/>
+                </a:solidFill>
+                <a:latin typeface="Calibri" pitchFamily="34" charset="0"/>
+                <a:ea typeface="Calibri" pitchFamily="34" charset="-122"/>
+                <a:cs typeface="Calibri" pitchFamily="34" charset="-120"/>
+              </a:rPr>
+              <a:t>378</a:t>
+            </a:r>
+            <a:endParaRPr lang="en-US" sz="1300" dirty="0"/>
+          </a:p>
+        </p:txBody>
+      </p:sp>
+      <p:sp>
+        <p:nvSpPr>
+          <p:cNvPr id="16" name="Text 14"/>
+          <p:cNvSpPr/>
+          <p:nvPr/>
+        </p:nvSpPr>
+        <p:spPr>
+          <a:xfrm>
+            <a:off x="5486400" y="3401568"/>
+            <a:ext cx="1645920" cy="365760"/>
+          </a:xfrm>
+          <a:prstGeom prst="rect">
+            <a:avLst/>
+          </a:prstGeom>
+          <a:noFill/>
+          <a:ln/>
+        </p:spPr>
+        <p:txBody>
+          <a:bodyPr wrap="square" lIns="0" tIns="0" rIns="0" bIns="0" rtlCol="0" anchor="ctr"/>
+          <a:lstStyle/>
+          <a:p>
+            <a:pPr marL="0" indent="0">
+              <a:buNone/>
+            </a:pPr>
+            <a:r>
+              <a:rPr lang="en-US" sz="1300" dirty="0">
+                <a:solidFill>
+                  <a:srgbClr val="44506A"/>
+                </a:solidFill>
+                <a:latin typeface="Calibri" pitchFamily="34" charset="0"/>
+                <a:ea typeface="Calibri" pitchFamily="34" charset="-122"/>
+                <a:cs typeface="Calibri" pitchFamily="34" charset="-120"/>
+              </a:rPr>
+              <a:t>~33s</a:t>
+            </a:r>
+            <a:endParaRPr lang="en-US" sz="1300" dirty="0"/>
+          </a:p>
+        </p:txBody>
+      </p:sp>
+      <p:sp>
+        <p:nvSpPr>
+          <p:cNvPr id="17" name="Text 15"/>
+          <p:cNvSpPr/>
+          <p:nvPr/>
+        </p:nvSpPr>
+        <p:spPr>
+          <a:xfrm>
+            <a:off x="548640" y="4041648"/>
+            <a:ext cx="6583680" cy="548640"/>
+          </a:xfrm>
+          <a:prstGeom prst="rect">
+            <a:avLst/>
+          </a:prstGeom>
+          <a:noFill/>
+          <a:ln/>
+        </p:spPr>
+        <p:txBody>
+          <a:bodyPr wrap="square" lIns="0" tIns="0" rIns="0" bIns="0" rtlCol="0" anchor="ctr"/>
+          <a:lstStyle/>
+          <a:p>
+            <a:pPr marL="0" indent="0">
+              <a:buNone/>
+            </a:pPr>
+            <a:r>
+              <a:rPr lang="en-US" sz="1200" i="1" dirty="0">
+                <a:solidFill>
+                  <a:srgbClr val="44506A"/>
+                </a:solidFill>
+                <a:latin typeface="Calibri" pitchFamily="34" charset="0"/>
+                <a:ea typeface="Calibri" pitchFamily="34" charset="-122"/>
+                <a:cs typeface="Calibri" pitchFamily="34" charset="-120"/>
+              </a:rPr>
+              <a:t>Classical is ~165,000× faster here — expected for a problem this structured, not a quantum shortfall.</a:t>
+            </a:r>
+            <a:endParaRPr lang="en-US" sz="1200" dirty="0"/>
+          </a:p>
+        </p:txBody>
+      </p:sp>
+      <p:sp>
+        <p:nvSpPr>
+          <p:cNvPr id="18" name="Shape 16"/>
+          <p:cNvSpPr/>
+          <p:nvPr/>
+        </p:nvSpPr>
+        <p:spPr>
+          <a:xfrm>
+            <a:off x="7498080" y="1874520"/>
+            <a:ext cx="4114800" cy="4434840"/>
+          </a:xfrm>
+          <a:prstGeom prst="rect">
+            <a:avLst/>
+          </a:prstGeom>
+          <a:solidFill>
+            <a:srgbClr val="16213E"/>
+          </a:solidFill>
+          <a:ln/>
+        </p:spPr>
+      </p:sp>
+      <p:sp>
+        <p:nvSpPr>
+          <p:cNvPr id="19" name="Text 17"/>
+          <p:cNvSpPr/>
+          <p:nvPr/>
+        </p:nvSpPr>
+        <p:spPr>
+          <a:xfrm>
+            <a:off x="7772400" y="2103120"/>
+            <a:ext cx="3566160" cy="365760"/>
+          </a:xfrm>
+          <a:prstGeom prst="rect">
+            <a:avLst/>
+          </a:prstGeom>
+          <a:noFill/>
+          <a:ln/>
+        </p:spPr>
+        <p:txBody>
+          <a:bodyPr wrap="square" lIns="0" tIns="0" rIns="0" bIns="0" rtlCol="0" anchor="ctr"/>
+          <a:lstStyle/>
+          <a:p>
+            <a:pPr marL="0" indent="0">
+              <a:buNone/>
+            </a:pPr>
+            <a:r>
+              <a:rPr lang="en-US" sz="1100" b="1" kern="0" spc="100" dirty="0">
                 <a:solidFill>
                   <a:srgbClr val="F2A900"/>
                 </a:solidFill>
@@ -5098,7 +5873,85 @@
                 <a:ea typeface="Calibri" pitchFamily="34" charset="-122"/>
                 <a:cs typeface="Calibri" pitchFamily="34" charset="-120"/>
               </a:rPr>
-              <a:t>LIMITATIONS</a:t>
+              <a:t>RELIABILITY, NOT ONE LUCKY RUN</a:t>
+            </a:r>
+            <a:endParaRPr lang="en-US" sz="1100" dirty="0"/>
+          </a:p>
+        </p:txBody>
+      </p:sp>
+      <p:sp>
+        <p:nvSpPr>
+          <p:cNvPr id="20" name="Text 18"/>
+          <p:cNvSpPr/>
+          <p:nvPr/>
+        </p:nvSpPr>
+        <p:spPr>
+          <a:xfrm>
+            <a:off x="7772400" y="2560320"/>
+            <a:ext cx="3566160" cy="1005840"/>
+          </a:xfrm>
+          <a:prstGeom prst="rect">
+            <a:avLst/>
+          </a:prstGeom>
+          <a:noFill/>
+          <a:ln/>
+        </p:spPr>
+        <p:txBody>
+          <a:bodyPr wrap="square" lIns="0" tIns="0" rIns="0" bIns="0" rtlCol="0" anchor="ctr"/>
+          <a:lstStyle/>
+          <a:p>
+            <a:pPr marL="0" indent="0">
+              <a:buNone/>
+            </a:pPr>
+            <a:r>
+              <a:rPr lang="en-US" sz="5400" b="1" dirty="0">
+                <a:solidFill>
+                  <a:srgbClr val="FFFFFF"/>
+                </a:solidFill>
+                <a:latin typeface="Cambria" pitchFamily="34" charset="0"/>
+                <a:ea typeface="Cambria" pitchFamily="34" charset="-122"/>
+                <a:cs typeface="Cambria" pitchFamily="34" charset="-120"/>
+              </a:rPr>
+              <a:t>100%</a:t>
+            </a:r>
+            <a:endParaRPr lang="en-US" sz="5400" dirty="0"/>
+          </a:p>
+        </p:txBody>
+      </p:sp>
+      <p:sp>
+        <p:nvSpPr>
+          <p:cNvPr id="21" name="Text 19"/>
+          <p:cNvSpPr/>
+          <p:nvPr/>
+        </p:nvSpPr>
+        <p:spPr>
+          <a:xfrm>
+            <a:off x="7772400" y="3520440"/>
+            <a:ext cx="3566160" cy="914400"/>
+          </a:xfrm>
+          <a:prstGeom prst="rect">
+            <a:avLst/>
+          </a:prstGeom>
+          <a:noFill/>
+          <a:ln/>
+        </p:spPr>
+        <p:txBody>
+          <a:bodyPr wrap="square" lIns="0" tIns="0" rIns="0" bIns="0" rtlCol="0" anchor="ctr"/>
+          <a:lstStyle/>
+          <a:p>
+            <a:pPr marL="0" indent="0">
+              <a:buNone/>
+            </a:pPr>
+            <a:r>
+              <a:rPr lang="en-US" sz="1300" dirty="0">
+                <a:solidFill>
+                  <a:srgbClr val="E8EEF7"/>
+                </a:solidFill>
+                <a:latin typeface="Calibri" pitchFamily="34" charset="0"/>
+                <a:ea typeface="Calibri" pitchFamily="34" charset="-122"/>
+                <a:cs typeface="Calibri" pitchFamily="34" charset="-120"/>
+              </a:rPr>
+              <a:t>success rate — 6 of 6 independent runs reached the exact optimum, from randomized starting points</a:t>
             </a:r>
             <a:endParaRPr lang="en-US" sz="1300" dirty="0"/>
           </a:p>
@@ -5106,525 +5959,14 @@
       </p:sp>
       <p:sp>
         <p:nvSpPr>
-          <p:cNvPr id="4" name="Shape 2"/>
-          <p:cNvSpPr/>
-          <p:nvPr/>
-        </p:nvSpPr>
-        <p:spPr>
-          <a:xfrm>
-            <a:off x="548640" y="1883664"/>
-            <a:ext cx="91440" cy="91440"/>
-          </a:xfrm>
-          <a:prstGeom prst="ellipse">
-            <a:avLst/>
-          </a:prstGeom>
-          <a:solidFill>
-            <a:srgbClr val="F2A900"/>
-          </a:solidFill>
-          <a:ln/>
-        </p:spPr>
-      </p:sp>
-      <p:sp>
-        <p:nvSpPr>
-          <p:cNvPr id="5" name="Text 3"/>
-          <p:cNvSpPr/>
-          <p:nvPr/>
-        </p:nvSpPr>
-        <p:spPr>
-          <a:xfrm>
-            <a:off x="777240" y="1755648"/>
-            <a:ext cx="4937760" cy="640080"/>
-          </a:xfrm>
-          <a:prstGeom prst="rect">
-            <a:avLst/>
-          </a:prstGeom>
-          <a:noFill/>
-          <a:ln/>
-        </p:spPr>
-        <p:txBody>
-          <a:bodyPr wrap="square" lIns="0" tIns="0" rIns="0" bIns="0" rtlCol="0" anchor="ctr"/>
-          <a:lstStyle/>
-          <a:p>
-            <a:pPr indent="0" marL="0">
-              <a:buNone/>
-            </a:pPr>
-            <a:r>
-              <a:rPr lang="en-US" sz="1250" dirty="0">
-                <a:solidFill>
-                  <a:srgbClr val="E8EEF7"/>
-                </a:solidFill>
-                <a:latin typeface="Calibri" pitchFamily="34" charset="0"/>
-                <a:ea typeface="Calibri" pitchFamily="34" charset="-122"/>
-                <a:cs typeface="Calibri" pitchFamily="34" charset="-120"/>
-              </a:rPr>
-              <a:t>Quantum covers accept/reject only — not yet the full multi-plant reassignment model</a:t>
-            </a:r>
-            <a:endParaRPr lang="en-US" sz="1250" dirty="0"/>
-          </a:p>
-        </p:txBody>
-      </p:sp>
-      <p:sp>
-        <p:nvSpPr>
-          <p:cNvPr id="6" name="Shape 4"/>
-          <p:cNvSpPr/>
-          <p:nvPr/>
-        </p:nvSpPr>
-        <p:spPr>
-          <a:xfrm>
-            <a:off x="548640" y="2660904"/>
-            <a:ext cx="91440" cy="91440"/>
-          </a:xfrm>
-          <a:prstGeom prst="ellipse">
-            <a:avLst/>
-          </a:prstGeom>
-          <a:solidFill>
-            <a:srgbClr val="F2A900"/>
-          </a:solidFill>
-          <a:ln/>
-        </p:spPr>
-      </p:sp>
-      <p:sp>
-        <p:nvSpPr>
-          <p:cNvPr id="7" name="Text 5"/>
-          <p:cNvSpPr/>
-          <p:nvPr/>
-        </p:nvSpPr>
-        <p:spPr>
-          <a:xfrm>
-            <a:off x="777240" y="2532888"/>
-            <a:ext cx="4937760" cy="640080"/>
-          </a:xfrm>
-          <a:prstGeom prst="rect">
-            <a:avLst/>
-          </a:prstGeom>
-          <a:noFill/>
-          <a:ln/>
-        </p:spPr>
-        <p:txBody>
-          <a:bodyPr wrap="square" lIns="0" tIns="0" rIns="0" bIns="0" rtlCol="0" anchor="ctr"/>
-          <a:lstStyle/>
-          <a:p>
-            <a:pPr indent="0" marL="0">
-              <a:buNone/>
-            </a:pPr>
-            <a:r>
-              <a:rPr lang="en-US" sz="1250" dirty="0">
-                <a:solidFill>
-                  <a:srgbClr val="E8EEF7"/>
-                </a:solidFill>
-                <a:latin typeface="Calibri" pitchFamily="34" charset="0"/>
-                <a:ea typeface="Calibri" pitchFamily="34" charset="-122"/>
-                <a:cs typeface="Calibri" pitchFamily="34" charset="-120"/>
-              </a:rPr>
-              <a:t>QAOA runs on a noiseless simulator; no real quantum hardware run yet</a:t>
-            </a:r>
-            <a:endParaRPr lang="en-US" sz="1250" dirty="0"/>
-          </a:p>
-        </p:txBody>
-      </p:sp>
-      <p:sp>
-        <p:nvSpPr>
-          <p:cNvPr id="8" name="Shape 6"/>
-          <p:cNvSpPr/>
-          <p:nvPr/>
-        </p:nvSpPr>
-        <p:spPr>
-          <a:xfrm>
-            <a:off x="548640" y="3438144"/>
-            <a:ext cx="91440" cy="91440"/>
-          </a:xfrm>
-          <a:prstGeom prst="ellipse">
-            <a:avLst/>
-          </a:prstGeom>
-          <a:solidFill>
-            <a:srgbClr val="F2A900"/>
-          </a:solidFill>
-          <a:ln/>
-        </p:spPr>
-      </p:sp>
-      <p:sp>
-        <p:nvSpPr>
-          <p:cNvPr id="9" name="Text 7"/>
-          <p:cNvSpPr/>
-          <p:nvPr/>
-        </p:nvSpPr>
-        <p:spPr>
-          <a:xfrm>
-            <a:off x="777240" y="3310128"/>
-            <a:ext cx="4937760" cy="640080"/>
-          </a:xfrm>
-          <a:prstGeom prst="rect">
-            <a:avLst/>
-          </a:prstGeom>
-          <a:noFill/>
-          <a:ln/>
-        </p:spPr>
-        <p:txBody>
-          <a:bodyPr wrap="square" lIns="0" tIns="0" rIns="0" bIns="0" rtlCol="0" anchor="ctr"/>
-          <a:lstStyle/>
-          <a:p>
-            <a:pPr indent="0" marL="0">
-              <a:buNone/>
-            </a:pPr>
-            <a:r>
-              <a:rPr lang="en-US" sz="1250" dirty="0">
-                <a:solidFill>
-                  <a:srgbClr val="E8EEF7"/>
-                </a:solidFill>
-                <a:latin typeface="Calibri" pitchFamily="34" charset="0"/>
-                <a:ea typeface="Calibri" pitchFamily="34" charset="-122"/>
-                <a:cs typeface="Calibri" pitchFamily="34" charset="-120"/>
-              </a:rPr>
-              <a:t>Split-fulfillment (one order across two plants) is out of scope</a:t>
-            </a:r>
-            <a:endParaRPr lang="en-US" sz="1250" dirty="0"/>
-          </a:p>
-        </p:txBody>
-      </p:sp>
-      <p:sp>
-        <p:nvSpPr>
-          <p:cNvPr id="10" name="Shape 8"/>
-          <p:cNvSpPr/>
-          <p:nvPr/>
-        </p:nvSpPr>
-        <p:spPr>
-          <a:xfrm>
-            <a:off x="548640" y="4215384"/>
-            <a:ext cx="91440" cy="91440"/>
-          </a:xfrm>
-          <a:prstGeom prst="ellipse">
-            <a:avLst/>
-          </a:prstGeom>
-          <a:solidFill>
-            <a:srgbClr val="F2A900"/>
-          </a:solidFill>
-          <a:ln/>
-        </p:spPr>
-      </p:sp>
-      <p:sp>
-        <p:nvSpPr>
-          <p:cNvPr id="11" name="Text 9"/>
-          <p:cNvSpPr/>
-          <p:nvPr/>
-        </p:nvSpPr>
-        <p:spPr>
-          <a:xfrm>
-            <a:off x="777240" y="4087368"/>
-            <a:ext cx="4937760" cy="640080"/>
-          </a:xfrm>
-          <a:prstGeom prst="rect">
-            <a:avLst/>
-          </a:prstGeom>
-          <a:noFill/>
-          <a:ln/>
-        </p:spPr>
-        <p:txBody>
-          <a:bodyPr wrap="square" lIns="0" tIns="0" rIns="0" bIns="0" rtlCol="0" anchor="ctr"/>
-          <a:lstStyle/>
-          <a:p>
-            <a:pPr indent="0" marL="0">
-              <a:buNone/>
-            </a:pPr>
-            <a:r>
-              <a:rPr lang="en-US" sz="1250" dirty="0">
-                <a:solidFill>
-                  <a:srgbClr val="E8EEF7"/>
-                </a:solidFill>
-                <a:latin typeface="Calibri" pitchFamily="34" charset="0"/>
-                <a:ea typeface="Calibri" pitchFamily="34" charset="-122"/>
-                <a:cs typeface="Calibri" pitchFamily="34" charset="-120"/>
-              </a:rPr>
-              <a:t>One data-quality finding: the dataset's own existing assignment already violates its own capacity by 199 units in one case</a:t>
-            </a:r>
-            <a:endParaRPr lang="en-US" sz="1250" dirty="0"/>
-          </a:p>
-        </p:txBody>
-      </p:sp>
-      <p:sp>
-        <p:nvSpPr>
-          <p:cNvPr id="12" name="Text 10"/>
-          <p:cNvSpPr/>
-          <p:nvPr/>
-        </p:nvSpPr>
-        <p:spPr>
-          <a:xfrm>
-            <a:off x="6309360" y="1371600"/>
-            <a:ext cx="5120640" cy="320040"/>
-          </a:xfrm>
-          <a:prstGeom prst="rect">
-            <a:avLst/>
-          </a:prstGeom>
-          <a:noFill/>
-          <a:ln/>
-        </p:spPr>
-        <p:txBody>
-          <a:bodyPr wrap="square" lIns="0" tIns="0" rIns="0" bIns="0" rtlCol="0" anchor="ctr"/>
-          <a:lstStyle/>
-          <a:p>
-            <a:pPr indent="0" marL="0">
-              <a:buNone/>
-            </a:pPr>
-            <a:r>
-              <a:rPr lang="en-US" sz="1300" b="1" spc="150" kern="0" dirty="0">
-                <a:solidFill>
-                  <a:srgbClr val="F2A900"/>
-                </a:solidFill>
-                <a:latin typeface="Calibri" pitchFamily="34" charset="0"/>
-                <a:ea typeface="Calibri" pitchFamily="34" charset="-122"/>
-                <a:cs typeface="Calibri" pitchFamily="34" charset="-120"/>
-              </a:rPr>
-              <a:t>NEXT STEPS</a:t>
-            </a:r>
-            <a:endParaRPr lang="en-US" sz="1300" dirty="0"/>
-          </a:p>
-        </p:txBody>
-      </p:sp>
-      <p:sp>
-        <p:nvSpPr>
-          <p:cNvPr id="13" name="Shape 11"/>
-          <p:cNvSpPr/>
-          <p:nvPr/>
-        </p:nvSpPr>
-        <p:spPr>
-          <a:xfrm>
-            <a:off x="6309360" y="1883664"/>
-            <a:ext cx="91440" cy="91440"/>
-          </a:xfrm>
-          <a:prstGeom prst="ellipse">
-            <a:avLst/>
-          </a:prstGeom>
-          <a:solidFill>
-            <a:srgbClr val="5BA8FF"/>
-          </a:solidFill>
-          <a:ln/>
-        </p:spPr>
-      </p:sp>
-      <p:sp>
-        <p:nvSpPr>
-          <p:cNvPr id="14" name="Text 12"/>
-          <p:cNvSpPr/>
-          <p:nvPr/>
-        </p:nvSpPr>
-        <p:spPr>
-          <a:xfrm>
-            <a:off x="6537960" y="1755648"/>
-            <a:ext cx="5029200" cy="640080"/>
-          </a:xfrm>
-          <a:prstGeom prst="rect">
-            <a:avLst/>
-          </a:prstGeom>
-          <a:noFill/>
-          <a:ln/>
-        </p:spPr>
-        <p:txBody>
-          <a:bodyPr wrap="square" lIns="0" tIns="0" rIns="0" bIns="0" rtlCol="0" anchor="ctr"/>
-          <a:lstStyle/>
-          <a:p>
-            <a:pPr indent="0" marL="0">
-              <a:buNone/>
-            </a:pPr>
-            <a:r>
-              <a:rPr lang="en-US" sz="1250" dirty="0">
-                <a:solidFill>
-                  <a:srgbClr val="E8EEF7"/>
-                </a:solidFill>
-                <a:latin typeface="Calibri" pitchFamily="34" charset="0"/>
-                <a:ea typeface="Calibri" pitchFamily="34" charset="-122"/>
-                <a:cs typeface="Calibri" pitchFamily="34" charset="-120"/>
-              </a:rPr>
-              <a:t>Run on real IBM Quantum hardware — migration path scoped, awaiting account access</a:t>
-            </a:r>
-            <a:endParaRPr lang="en-US" sz="1250" dirty="0"/>
-          </a:p>
-        </p:txBody>
-      </p:sp>
-      <p:sp>
-        <p:nvSpPr>
-          <p:cNvPr id="15" name="Shape 13"/>
-          <p:cNvSpPr/>
-          <p:nvPr/>
-        </p:nvSpPr>
-        <p:spPr>
-          <a:xfrm>
-            <a:off x="6309360" y="2660904"/>
-            <a:ext cx="91440" cy="91440"/>
-          </a:xfrm>
-          <a:prstGeom prst="ellipse">
-            <a:avLst/>
-          </a:prstGeom>
-          <a:solidFill>
-            <a:srgbClr val="5BA8FF"/>
-          </a:solidFill>
-          <a:ln/>
-        </p:spPr>
-      </p:sp>
-      <p:sp>
-        <p:nvSpPr>
-          <p:cNvPr id="16" name="Text 14"/>
-          <p:cNvSpPr/>
-          <p:nvPr/>
-        </p:nvSpPr>
-        <p:spPr>
-          <a:xfrm>
-            <a:off x="6537960" y="2532888"/>
-            <a:ext cx="5029200" cy="640080"/>
-          </a:xfrm>
-          <a:prstGeom prst="rect">
-            <a:avLst/>
-          </a:prstGeom>
-          <a:noFill/>
-          <a:ln/>
-        </p:spPr>
-        <p:txBody>
-          <a:bodyPr wrap="square" lIns="0" tIns="0" rIns="0" bIns="0" rtlCol="0" anchor="ctr"/>
-          <a:lstStyle/>
-          <a:p>
-            <a:pPr indent="0" marL="0">
-              <a:buNone/>
-            </a:pPr>
-            <a:r>
-              <a:rPr lang="en-US" sz="1250" dirty="0">
-                <a:solidFill>
-                  <a:srgbClr val="E8EEF7"/>
-                </a:solidFill>
-                <a:latin typeface="Calibri" pitchFamily="34" charset="0"/>
-                <a:ea typeface="Calibri" pitchFamily="34" charset="-122"/>
-                <a:cs typeface="Calibri" pitchFamily="34" charset="-120"/>
-              </a:rPr>
-              <a:t>Extend QAOA to the reassignment model on a reduced candidate-plant subset</a:t>
-            </a:r>
-            <a:endParaRPr lang="en-US" sz="1250" dirty="0"/>
-          </a:p>
-        </p:txBody>
-      </p:sp>
-      <p:sp>
-        <p:nvSpPr>
-          <p:cNvPr id="17" name="Shape 15"/>
-          <p:cNvSpPr/>
-          <p:nvPr/>
-        </p:nvSpPr>
-        <p:spPr>
-          <a:xfrm>
-            <a:off x="6309360" y="3438144"/>
-            <a:ext cx="91440" cy="91440"/>
-          </a:xfrm>
-          <a:prstGeom prst="ellipse">
-            <a:avLst/>
-          </a:prstGeom>
-          <a:solidFill>
-            <a:srgbClr val="5BA8FF"/>
-          </a:solidFill>
-          <a:ln/>
-        </p:spPr>
-      </p:sp>
-      <p:sp>
-        <p:nvSpPr>
-          <p:cNvPr id="18" name="Text 16"/>
-          <p:cNvSpPr/>
-          <p:nvPr/>
-        </p:nvSpPr>
-        <p:spPr>
-          <a:xfrm>
-            <a:off x="6537960" y="3310128"/>
-            <a:ext cx="5029200" cy="640080"/>
-          </a:xfrm>
-          <a:prstGeom prst="rect">
-            <a:avLst/>
-          </a:prstGeom>
-          <a:noFill/>
-          <a:ln/>
-        </p:spPr>
-        <p:txBody>
-          <a:bodyPr wrap="square" lIns="0" tIns="0" rIns="0" bIns="0" rtlCol="0" anchor="ctr"/>
-          <a:lstStyle/>
-          <a:p>
-            <a:pPr indent="0" marL="0">
-              <a:buNone/>
-            </a:pPr>
-            <a:r>
-              <a:rPr lang="en-US" sz="1250" dirty="0">
-                <a:solidFill>
-                  <a:srgbClr val="E8EEF7"/>
-                </a:solidFill>
-                <a:latin typeface="Calibri" pitchFamily="34" charset="0"/>
-                <a:ea typeface="Calibri" pitchFamily="34" charset="-122"/>
-                <a:cs typeface="Calibri" pitchFamily="34" charset="-120"/>
-              </a:rPr>
-              <a:t>Investigate constraint-preserving QAOA mixers to remove slack-variable overhead</a:t>
-            </a:r>
-            <a:endParaRPr lang="en-US" sz="1250" dirty="0"/>
-          </a:p>
-        </p:txBody>
-      </p:sp>
-      <p:sp>
-        <p:nvSpPr>
-          <p:cNvPr id="19" name="Shape 17"/>
-          <p:cNvSpPr/>
-          <p:nvPr/>
-        </p:nvSpPr>
-        <p:spPr>
-          <a:xfrm>
-            <a:off x="6309360" y="4215384"/>
-            <a:ext cx="91440" cy="91440"/>
-          </a:xfrm>
-          <a:prstGeom prst="ellipse">
-            <a:avLst/>
-          </a:prstGeom>
-          <a:solidFill>
-            <a:srgbClr val="5BA8FF"/>
-          </a:solidFill>
-          <a:ln/>
-        </p:spPr>
-      </p:sp>
-      <p:sp>
-        <p:nvSpPr>
-          <p:cNvPr id="20" name="Text 18"/>
-          <p:cNvSpPr/>
-          <p:nvPr/>
-        </p:nvSpPr>
-        <p:spPr>
-          <a:xfrm>
-            <a:off x="6537960" y="4087368"/>
-            <a:ext cx="5029200" cy="640080"/>
-          </a:xfrm>
-          <a:prstGeom prst="rect">
-            <a:avLst/>
-          </a:prstGeom>
-          <a:noFill/>
-          <a:ln/>
-        </p:spPr>
-        <p:txBody>
-          <a:bodyPr wrap="square" lIns="0" tIns="0" rIns="0" bIns="0" rtlCol="0" anchor="ctr"/>
-          <a:lstStyle/>
-          <a:p>
-            <a:pPr indent="0" marL="0">
-              <a:buNone/>
-            </a:pPr>
-            <a:r>
-              <a:rPr lang="en-US" sz="1250" dirty="0">
-                <a:solidFill>
-                  <a:srgbClr val="E8EEF7"/>
-                </a:solidFill>
-                <a:latin typeface="Calibri" pitchFamily="34" charset="0"/>
-                <a:ea typeface="Calibri" pitchFamily="34" charset="-122"/>
-                <a:cs typeface="Calibri" pitchFamily="34" charset="-120"/>
-              </a:rPr>
-              <a:t>Model multi-plant split-fulfillment for partially-filled orders</a:t>
-            </a:r>
-            <a:endParaRPr lang="en-US" sz="1250" dirty="0"/>
-          </a:p>
-        </p:txBody>
-      </p:sp>
-      <p:sp>
-        <p:nvSpPr>
-          <p:cNvPr id="21" name="Shape 19"/>
-          <p:cNvSpPr/>
-          <p:nvPr/>
-        </p:nvSpPr>
-        <p:spPr>
-          <a:xfrm>
-            <a:off x="548640" y="5212080"/>
-            <a:ext cx="11064240" cy="0"/>
+          <p:cNvPr id="22" name="Shape 20"/>
+          <p:cNvSpPr/>
+          <p:nvPr/>
+        </p:nvSpPr>
+        <p:spPr>
+          <a:xfrm>
+            <a:off x="7772400" y="4572000"/>
+            <a:ext cx="3291840" cy="0"/>
           </a:xfrm>
           <a:prstGeom prst="line">
             <a:avLst/>
@@ -5640,30 +5982,180 @@
       </p:sp>
       <p:sp>
         <p:nvSpPr>
-          <p:cNvPr id="22" name="Text 20"/>
-          <p:cNvSpPr/>
-          <p:nvPr/>
-        </p:nvSpPr>
-        <p:spPr>
-          <a:xfrm>
-            <a:off x="548640" y="5440680"/>
-            <a:ext cx="11064240" cy="548640"/>
-          </a:xfrm>
-          <a:prstGeom prst="rect">
-            <a:avLst/>
-          </a:prstGeom>
-          <a:noFill/>
-          <a:ln/>
-        </p:spPr>
-        <p:txBody>
-          <a:bodyPr wrap="square" lIns="0" tIns="0" rIns="0" bIns="0" rtlCol="0" anchor="ctr"/>
-          <a:lstStyle/>
-          <a:p>
-            <a:pPr indent="0" marL="0">
-              <a:buNone/>
-            </a:pPr>
-            <a:r>
-              <a:rPr lang="en-US" sz="1500" i="1" dirty="0">
+          <p:cNvPr id="23" name="Text 21"/>
+          <p:cNvSpPr/>
+          <p:nvPr/>
+        </p:nvSpPr>
+        <p:spPr>
+          <a:xfrm>
+            <a:off x="7772400" y="4754880"/>
+            <a:ext cx="3566160" cy="1371600"/>
+          </a:xfrm>
+          <a:prstGeom prst="rect">
+            <a:avLst/>
+          </a:prstGeom>
+          <a:noFill/>
+          <a:ln/>
+        </p:spPr>
+        <p:txBody>
+          <a:bodyPr wrap="square" lIns="0" tIns="0" rIns="0" bIns="0" rtlCol="0" anchor="ctr"/>
+          <a:lstStyle/>
+          <a:p>
+            <a:pPr marL="0" indent="0">
+              <a:buNone/>
+            </a:pPr>
+            <a:r>
+              <a:rPr lang="en-US" sz="1200" i="1" dirty="0">
+                <a:solidFill>
+                  <a:srgbClr val="B8C4DC"/>
+                </a:solidFill>
+                <a:latin typeface="Calibri" pitchFamily="34" charset="0"/>
+                <a:ea typeface="Calibri" pitchFamily="34" charset="-122"/>
+                <a:cs typeface="Calibri" pitchFamily="34" charset="-120"/>
+              </a:rPr>
+              <a:t>QAOA is deterministic from a fixed starting point — a single run proves nothing about reliable convergence. This is a real statistic, not a favorable one-off.</a:t>
+            </a:r>
+            <a:endParaRPr lang="en-US" sz="1200" dirty="0"/>
+          </a:p>
+        </p:txBody>
+      </p:sp>
+      <p:sp>
+        <p:nvSpPr>
+          <p:cNvPr id="24" name="Text 22"/>
+          <p:cNvSpPr/>
+          <p:nvPr/>
+        </p:nvSpPr>
+        <p:spPr>
+          <a:xfrm>
+            <a:off x="457200" y="6537960"/>
+            <a:ext cx="7315200" cy="274320"/>
+          </a:xfrm>
+          <a:prstGeom prst="rect">
+            <a:avLst/>
+          </a:prstGeom>
+          <a:noFill/>
+          <a:ln/>
+        </p:spPr>
+        <p:txBody>
+          <a:bodyPr wrap="square" lIns="0" tIns="0" rIns="0" bIns="0" rtlCol="0" anchor="ctr"/>
+          <a:lstStyle/>
+          <a:p>
+            <a:pPr marL="0" indent="0">
+              <a:buNone/>
+            </a:pPr>
+            <a:r>
+              <a:rPr lang="en-US" sz="900" dirty="0">
+                <a:solidFill>
+                  <a:srgbClr val="8896B0"/>
+                </a:solidFill>
+                <a:latin typeface="Calibri" pitchFamily="34" charset="0"/>
+                <a:ea typeface="Calibri" pitchFamily="34" charset="-122"/>
+                <a:cs typeface="Calibri" pitchFamily="34" charset="-120"/>
+              </a:rPr>
+              <a:t>Nestlé DOM — WISER Global Quantum+AI Program 2026</a:t>
+            </a:r>
+            <a:endParaRPr lang="en-US" sz="900" dirty="0"/>
+          </a:p>
+        </p:txBody>
+      </p:sp>
+      <p:sp>
+        <p:nvSpPr>
+          <p:cNvPr id="25" name="Text 23"/>
+          <p:cNvSpPr/>
+          <p:nvPr/>
+        </p:nvSpPr>
+        <p:spPr>
+          <a:xfrm>
+            <a:off x="10789920" y="6537960"/>
+            <a:ext cx="914400" cy="274320"/>
+          </a:xfrm>
+          <a:prstGeom prst="rect">
+            <a:avLst/>
+          </a:prstGeom>
+          <a:noFill/>
+          <a:ln/>
+        </p:spPr>
+        <p:txBody>
+          <a:bodyPr wrap="square" lIns="0" tIns="0" rIns="0" bIns="0" rtlCol="0" anchor="ctr"/>
+          <a:lstStyle/>
+          <a:p>
+            <a:pPr marL="0" indent="0" algn="r">
+              <a:buNone/>
+            </a:pPr>
+            <a:r>
+              <a:rPr lang="en-US" sz="900" dirty="0">
+                <a:solidFill>
+                  <a:srgbClr val="8896B0"/>
+                </a:solidFill>
+                <a:latin typeface="Calibri" pitchFamily="34" charset="0"/>
+                <a:ea typeface="Calibri" pitchFamily="34" charset="-122"/>
+                <a:cs typeface="Calibri" pitchFamily="34" charset="-120"/>
+              </a:rPr>
+              <a:t>6</a:t>
+            </a:r>
+            <a:endParaRPr lang="en-US" sz="900" dirty="0"/>
+          </a:p>
+        </p:txBody>
+      </p:sp>
+    </p:spTree>
+  </p:cSld>
+  <p:clrMapOvr>
+    <a:masterClrMapping/>
+  </p:clrMapOvr>
+</p:sld>
+</file>
+
+<file path=ppt/slides/slide7.xml><?xml version="1.0" encoding="utf-8"?>
+<p:sld xmlns:a="http://schemas.openxmlformats.org/drawingml/2006/main" xmlns:r="http://schemas.openxmlformats.org/officeDocument/2006/relationships" xmlns:p="http://schemas.openxmlformats.org/presentationml/2006/main">
+  <p:cSld name="Slide 8">
+    <p:bg>
+      <p:bgPr>
+        <a:solidFill>
+          <a:srgbClr val="0F1729"/>
+        </a:solidFill>
+        <a:effectLst/>
+      </p:bgPr>
+    </p:bg>
+    <p:spTree>
+      <p:nvGrpSpPr>
+        <p:cNvPr id="1" name=""/>
+        <p:cNvGrpSpPr/>
+        <p:nvPr/>
+      </p:nvGrpSpPr>
+      <p:grpSpPr>
+        <a:xfrm>
+          <a:off x="0" y="0"/>
+          <a:ext cx="0" cy="0"/>
+          <a:chOff x="0" y="0"/>
+          <a:chExt cx="0" cy="0"/>
+        </a:xfrm>
+      </p:grpSpPr>
+      <p:sp>
+        <p:nvSpPr>
+          <p:cNvPr id="2" name="Text Title"/>
+          <p:cNvSpPr/>
+          <p:nvPr/>
+        </p:nvSpPr>
+        <p:spPr>
+          <a:xfrm>
+            <a:off x="548640" y="457200"/>
+            <a:ext cx="9144000" cy="640080"/>
+          </a:xfrm>
+          <a:prstGeom prst="rect">
+            <a:avLst/>
+          </a:prstGeom>
+          <a:noFill/>
+          <a:ln/>
+        </p:spPr>
+        <p:txBody>
+          <a:bodyPr wrap="square" lIns="0" tIns="0" rIns="0" bIns="0" rtlCol="0" anchor="ctr"/>
+          <a:lstStyle/>
+          <a:p>
+            <a:pPr marL="0" indent="0" algn="l">
+              <a:buNone/>
+            </a:pPr>
+            <a:r>
+              <a:rPr lang="en-US" sz="3200" b="1" dirty="0">
                 <a:solidFill>
                   <a:srgbClr val="FFFFFF"/>
                 </a:solidFill>
@@ -5671,15 +6163,1008 @@
                 <a:ea typeface="Cambria" pitchFamily="34" charset="-122"/>
                 <a:cs typeface="Cambria" pitchFamily="34" charset="-120"/>
               </a:rPr>
-              <a:t>This project is built to be honest about what quantum computing can and can't do here today — not to oversell a result.</a:t>
-            </a:r>
-            <a:endParaRPr lang="en-US" sz="1500" dirty="0"/>
-          </a:p>
-        </p:txBody>
-      </p:sp>
-      <p:sp>
-        <p:nvSpPr>
-          <p:cNvPr id="23" name="Text 21"/>
+              <a:t>Future Enhancements</a:t>
+            </a:r>
+            <a:endParaRPr lang="en-US" sz="3200" dirty="0"/>
+          </a:p>
+        </p:txBody>
+      </p:sp>
+      <p:sp>
+        <p:nvSpPr>
+          <p:cNvPr id="3" name="Text Subtitle"/>
+          <p:cNvSpPr/>
+          <p:nvPr/>
+        </p:nvSpPr>
+        <p:spPr>
+          <a:xfrm>
+            <a:off x="548640" y="1097280"/>
+            <a:ext cx="11064240" cy="320040"/>
+          </a:xfrm>
+          <a:prstGeom prst="rect">
+            <a:avLst/>
+          </a:prstGeom>
+          <a:noFill/>
+          <a:ln/>
+        </p:spPr>
+        <p:txBody>
+          <a:bodyPr wrap="square" lIns="0" tIns="0" rIns="0" bIns="0" rtlCol="0" anchor="ctr"/>
+          <a:lstStyle/>
+          <a:p>
+            <a:pPr marL="0" indent="0" algn="l">
+              <a:buNone/>
+            </a:pPr>
+            <a:r>
+              <a:rPr lang="en-US" sz="1300" i="1" dirty="0">
+                <a:solidFill>
+                  <a:srgbClr val="8896B0"/>
+                </a:solidFill>
+                <a:latin typeface="Calibri" pitchFamily="34" charset="0"/>
+                <a:ea typeface="Calibri" pitchFamily="34" charset="-122"/>
+                <a:cs typeface="Calibri" pitchFamily="34" charset="-120"/>
+              </a:rPr>
+              <a:t>Where the roadmap goes next, beyond this proof of concept.</a:t>
+            </a:r>
+            <a:endParaRPr lang="en-US" sz="1300" dirty="0"/>
+          </a:p>
+        </p:txBody>
+      </p:sp>
+      <p:sp>
+        <p:nvSpPr>
+          <p:cNvPr id="4" name="Card4"/>
+          <p:cNvSpPr/>
+          <p:nvPr/>
+        </p:nvSpPr>
+        <p:spPr>
+          <a:xfrm>
+            <a:off x="548640" y="1691640"/>
+            <a:ext cx="3515360" cy="1386840"/>
+          </a:xfrm>
+          <a:prstGeom prst="roundRect">
+            <a:avLst>
+              <a:gd name="adj" fmla="val 6000"/>
+            </a:avLst>
+          </a:prstGeom>
+          <a:solidFill>
+            <a:srgbClr val="16213E"/>
+          </a:solidFill>
+          <a:ln/>
+        </p:spPr>
+        <p:txBody>
+          <a:bodyPr/>
+          <a:lstStyle/>
+          <a:p>
+            <a:endParaRPr lang="en-US"/>
+          </a:p>
+        </p:txBody>
+      </p:sp>
+      <p:sp>
+        <p:nvSpPr>
+          <p:cNvPr id="5" name="Badge5"/>
+          <p:cNvSpPr/>
+          <p:nvPr/>
+        </p:nvSpPr>
+        <p:spPr>
+          <a:xfrm>
+            <a:off x="2077720" y="1874520"/>
+            <a:ext cx="457200" cy="457200"/>
+          </a:xfrm>
+          <a:prstGeom prst="ellipse">
+            <a:avLst/>
+          </a:prstGeom>
+          <a:solidFill>
+            <a:srgbClr val="F2A900"/>
+          </a:solidFill>
+          <a:ln/>
+        </p:spPr>
+        <p:txBody>
+          <a:bodyPr wrap="square" lIns="0" tIns="0" rIns="0" bIns="0" rtlCol="0" anchor="ctr"/>
+          <a:lstStyle/>
+          <a:p>
+            <a:pPr marL="0" indent="0" algn="ctr">
+              <a:buNone/>
+            </a:pPr>
+            <a:r>
+              <a:rPr lang="en-US" sz="1500" b="1" dirty="0">
+                <a:solidFill>
+                  <a:srgbClr val="16213E"/>
+                </a:solidFill>
+                <a:latin typeface="Calibri" pitchFamily="34" charset="0"/>
+              </a:rPr>
+              <a:t>1</a:t>
+            </a:r>
+          </a:p>
+        </p:txBody>
+      </p:sp>
+      <p:sp>
+        <p:nvSpPr>
+          <p:cNvPr id="6" name="CardText6"/>
+          <p:cNvSpPr/>
+          <p:nvPr/>
+        </p:nvSpPr>
+        <p:spPr>
+          <a:xfrm>
+            <a:off x="685800" y="2423160"/>
+            <a:ext cx="3241040" cy="563880"/>
+          </a:xfrm>
+          <a:prstGeom prst="rect">
+            <a:avLst/>
+          </a:prstGeom>
+          <a:noFill/>
+          <a:ln/>
+        </p:spPr>
+        <p:txBody>
+          <a:bodyPr wrap="square" lIns="0" tIns="0" rIns="0" bIns="0" rtlCol="0" anchor="ctr"/>
+          <a:lstStyle/>
+          <a:p>
+            <a:pPr marL="0" indent="0" algn="ctr">
+              <a:buNone/>
+            </a:pPr>
+            <a:r>
+              <a:rPr lang="en-US" sz="1300" b="1" dirty="0">
+                <a:solidFill>
+                  <a:srgbClr val="E8EEF7"/>
+                </a:solidFill>
+                <a:latin typeface="Calibri" pitchFamily="34" charset="0"/>
+                <a:ea typeface="Calibri" pitchFamily="34" charset="-122"/>
+                <a:cs typeface="Calibri" pitchFamily="34" charset="-120"/>
+              </a:rPr>
+              <a:t>Execute on IBM Quantum Hardware</a:t>
+            </a:r>
+            <a:endParaRPr lang="en-US" sz="1300" dirty="0"/>
+          </a:p>
+        </p:txBody>
+      </p:sp>
+      <p:sp>
+        <p:nvSpPr>
+          <p:cNvPr id="7" name="Card7"/>
+          <p:cNvSpPr/>
+          <p:nvPr/>
+        </p:nvSpPr>
+        <p:spPr>
+          <a:xfrm>
+            <a:off x="4338320" y="1691640"/>
+            <a:ext cx="3515360" cy="1386840"/>
+          </a:xfrm>
+          <a:prstGeom prst="roundRect">
+            <a:avLst>
+              <a:gd name="adj" fmla="val 6000"/>
+            </a:avLst>
+          </a:prstGeom>
+          <a:solidFill>
+            <a:srgbClr val="16213E"/>
+          </a:solidFill>
+          <a:ln/>
+        </p:spPr>
+        <p:txBody>
+          <a:bodyPr/>
+          <a:lstStyle/>
+          <a:p>
+            <a:endParaRPr lang="en-US"/>
+          </a:p>
+        </p:txBody>
+      </p:sp>
+      <p:sp>
+        <p:nvSpPr>
+          <p:cNvPr id="8" name="Badge8"/>
+          <p:cNvSpPr/>
+          <p:nvPr/>
+        </p:nvSpPr>
+        <p:spPr>
+          <a:xfrm>
+            <a:off x="5867400" y="1874520"/>
+            <a:ext cx="457200" cy="457200"/>
+          </a:xfrm>
+          <a:prstGeom prst="ellipse">
+            <a:avLst/>
+          </a:prstGeom>
+          <a:solidFill>
+            <a:srgbClr val="F2A900"/>
+          </a:solidFill>
+          <a:ln/>
+        </p:spPr>
+        <p:txBody>
+          <a:bodyPr wrap="square" lIns="0" tIns="0" rIns="0" bIns="0" rtlCol="0" anchor="ctr"/>
+          <a:lstStyle/>
+          <a:p>
+            <a:pPr marL="0" indent="0" algn="ctr">
+              <a:buNone/>
+            </a:pPr>
+            <a:r>
+              <a:rPr lang="en-US" sz="1500" b="1" dirty="0">
+                <a:solidFill>
+                  <a:srgbClr val="16213E"/>
+                </a:solidFill>
+                <a:latin typeface="Calibri" pitchFamily="34" charset="0"/>
+              </a:rPr>
+              <a:t>2</a:t>
+            </a:r>
+          </a:p>
+        </p:txBody>
+      </p:sp>
+      <p:sp>
+        <p:nvSpPr>
+          <p:cNvPr id="9" name="CardText9"/>
+          <p:cNvSpPr/>
+          <p:nvPr/>
+        </p:nvSpPr>
+        <p:spPr>
+          <a:xfrm>
+            <a:off x="4475480" y="2423160"/>
+            <a:ext cx="3241040" cy="563880"/>
+          </a:xfrm>
+          <a:prstGeom prst="rect">
+            <a:avLst/>
+          </a:prstGeom>
+          <a:noFill/>
+          <a:ln/>
+        </p:spPr>
+        <p:txBody>
+          <a:bodyPr wrap="square" lIns="0" tIns="0" rIns="0" bIns="0" rtlCol="0" anchor="ctr"/>
+          <a:lstStyle/>
+          <a:p>
+            <a:pPr marL="0" indent="0" algn="ctr">
+              <a:buNone/>
+            </a:pPr>
+            <a:r>
+              <a:rPr lang="en-US" sz="1300" b="1" dirty="0">
+                <a:solidFill>
+                  <a:srgbClr val="E8EEF7"/>
+                </a:solidFill>
+                <a:latin typeface="Calibri" pitchFamily="34" charset="0"/>
+                <a:ea typeface="Calibri" pitchFamily="34" charset="-122"/>
+                <a:cs typeface="Calibri" pitchFamily="34" charset="-120"/>
+              </a:rPr>
+              <a:t>Constraint-Preserving QAOA Mixers</a:t>
+            </a:r>
+            <a:endParaRPr lang="en-US" sz="1300" dirty="0"/>
+          </a:p>
+        </p:txBody>
+      </p:sp>
+      <p:sp>
+        <p:nvSpPr>
+          <p:cNvPr id="10" name="Card10"/>
+          <p:cNvSpPr/>
+          <p:nvPr/>
+        </p:nvSpPr>
+        <p:spPr>
+          <a:xfrm>
+            <a:off x="8128000" y="1691640"/>
+            <a:ext cx="3515360" cy="1386840"/>
+          </a:xfrm>
+          <a:prstGeom prst="roundRect">
+            <a:avLst>
+              <a:gd name="adj" fmla="val 6000"/>
+            </a:avLst>
+          </a:prstGeom>
+          <a:solidFill>
+            <a:srgbClr val="16213E"/>
+          </a:solidFill>
+          <a:ln/>
+        </p:spPr>
+        <p:txBody>
+          <a:bodyPr/>
+          <a:lstStyle/>
+          <a:p>
+            <a:endParaRPr lang="en-US"/>
+          </a:p>
+        </p:txBody>
+      </p:sp>
+      <p:sp>
+        <p:nvSpPr>
+          <p:cNvPr id="11" name="Badge11"/>
+          <p:cNvSpPr/>
+          <p:nvPr/>
+        </p:nvSpPr>
+        <p:spPr>
+          <a:xfrm>
+            <a:off x="9657080" y="1874520"/>
+            <a:ext cx="457200" cy="457200"/>
+          </a:xfrm>
+          <a:prstGeom prst="ellipse">
+            <a:avLst/>
+          </a:prstGeom>
+          <a:solidFill>
+            <a:srgbClr val="F2A900"/>
+          </a:solidFill>
+          <a:ln/>
+        </p:spPr>
+        <p:txBody>
+          <a:bodyPr wrap="square" lIns="0" tIns="0" rIns="0" bIns="0" rtlCol="0" anchor="ctr"/>
+          <a:lstStyle/>
+          <a:p>
+            <a:pPr marL="0" indent="0" algn="ctr">
+              <a:buNone/>
+            </a:pPr>
+            <a:r>
+              <a:rPr lang="en-US" sz="1500" b="1" dirty="0">
+                <a:solidFill>
+                  <a:srgbClr val="16213E"/>
+                </a:solidFill>
+                <a:latin typeface="Calibri" pitchFamily="34" charset="0"/>
+              </a:rPr>
+              <a:t>3</a:t>
+            </a:r>
+          </a:p>
+        </p:txBody>
+      </p:sp>
+      <p:sp>
+        <p:nvSpPr>
+          <p:cNvPr id="12" name="CardText12"/>
+          <p:cNvSpPr/>
+          <p:nvPr/>
+        </p:nvSpPr>
+        <p:spPr>
+          <a:xfrm>
+            <a:off x="8265160" y="2423160"/>
+            <a:ext cx="3241040" cy="563880"/>
+          </a:xfrm>
+          <a:prstGeom prst="rect">
+            <a:avLst/>
+          </a:prstGeom>
+          <a:noFill/>
+          <a:ln/>
+        </p:spPr>
+        <p:txBody>
+          <a:bodyPr wrap="square" lIns="0" tIns="0" rIns="0" bIns="0" rtlCol="0" anchor="ctr"/>
+          <a:lstStyle/>
+          <a:p>
+            <a:pPr marL="0" indent="0" algn="ctr">
+              <a:buNone/>
+            </a:pPr>
+            <a:r>
+              <a:rPr lang="en-US" sz="1300" b="1" dirty="0">
+                <a:solidFill>
+                  <a:srgbClr val="E8EEF7"/>
+                </a:solidFill>
+                <a:latin typeface="Calibri" pitchFamily="34" charset="0"/>
+                <a:ea typeface="Calibri" pitchFamily="34" charset="-122"/>
+                <a:cs typeface="Calibri" pitchFamily="34" charset="-120"/>
+              </a:rPr>
+              <a:t>Multi-Plant Split Fulfillment</a:t>
+            </a:r>
+            <a:endParaRPr lang="en-US" sz="1300" dirty="0"/>
+          </a:p>
+        </p:txBody>
+      </p:sp>
+      <p:sp>
+        <p:nvSpPr>
+          <p:cNvPr id="13" name="Card13"/>
+          <p:cNvSpPr/>
+          <p:nvPr/>
+        </p:nvSpPr>
+        <p:spPr>
+          <a:xfrm>
+            <a:off x="548640" y="3352800"/>
+            <a:ext cx="3515360" cy="1386840"/>
+          </a:xfrm>
+          <a:prstGeom prst="roundRect">
+            <a:avLst>
+              <a:gd name="adj" fmla="val 6000"/>
+            </a:avLst>
+          </a:prstGeom>
+          <a:solidFill>
+            <a:srgbClr val="16213E"/>
+          </a:solidFill>
+          <a:ln/>
+        </p:spPr>
+        <p:txBody>
+          <a:bodyPr/>
+          <a:lstStyle/>
+          <a:p>
+            <a:endParaRPr lang="en-US"/>
+          </a:p>
+        </p:txBody>
+      </p:sp>
+      <p:sp>
+        <p:nvSpPr>
+          <p:cNvPr id="14" name="Badge14"/>
+          <p:cNvSpPr/>
+          <p:nvPr/>
+        </p:nvSpPr>
+        <p:spPr>
+          <a:xfrm>
+            <a:off x="2077720" y="3535680"/>
+            <a:ext cx="457200" cy="457200"/>
+          </a:xfrm>
+          <a:prstGeom prst="ellipse">
+            <a:avLst/>
+          </a:prstGeom>
+          <a:solidFill>
+            <a:srgbClr val="F2A900"/>
+          </a:solidFill>
+          <a:ln/>
+        </p:spPr>
+        <p:txBody>
+          <a:bodyPr wrap="square" lIns="0" tIns="0" rIns="0" bIns="0" rtlCol="0" anchor="ctr"/>
+          <a:lstStyle/>
+          <a:p>
+            <a:pPr marL="0" indent="0" algn="ctr">
+              <a:buNone/>
+            </a:pPr>
+            <a:r>
+              <a:rPr lang="en-US" sz="1500" b="1" dirty="0">
+                <a:solidFill>
+                  <a:srgbClr val="16213E"/>
+                </a:solidFill>
+                <a:latin typeface="Calibri" pitchFamily="34" charset="0"/>
+              </a:rPr>
+              <a:t>4</a:t>
+            </a:r>
+          </a:p>
+        </p:txBody>
+      </p:sp>
+      <p:sp>
+        <p:nvSpPr>
+          <p:cNvPr id="15" name="CardText15"/>
+          <p:cNvSpPr/>
+          <p:nvPr/>
+        </p:nvSpPr>
+        <p:spPr>
+          <a:xfrm>
+            <a:off x="685800" y="4084320"/>
+            <a:ext cx="3241040" cy="563880"/>
+          </a:xfrm>
+          <a:prstGeom prst="rect">
+            <a:avLst/>
+          </a:prstGeom>
+          <a:noFill/>
+          <a:ln/>
+        </p:spPr>
+        <p:txBody>
+          <a:bodyPr wrap="square" lIns="0" tIns="0" rIns="0" bIns="0" rtlCol="0" anchor="ctr"/>
+          <a:lstStyle/>
+          <a:p>
+            <a:pPr marL="0" indent="0" algn="ctr">
+              <a:buNone/>
+            </a:pPr>
+            <a:r>
+              <a:rPr lang="en-US" sz="1300" b="1" dirty="0">
+                <a:solidFill>
+                  <a:srgbClr val="E8EEF7"/>
+                </a:solidFill>
+                <a:latin typeface="Calibri" pitchFamily="34" charset="0"/>
+                <a:ea typeface="Calibri" pitchFamily="34" charset="-122"/>
+                <a:cs typeface="Calibri" pitchFamily="34" charset="-120"/>
+              </a:rPr>
+              <a:t>AI Demand Forecasting</a:t>
+            </a:r>
+            <a:endParaRPr lang="en-US" sz="1300" dirty="0"/>
+          </a:p>
+        </p:txBody>
+      </p:sp>
+      <p:sp>
+        <p:nvSpPr>
+          <p:cNvPr id="16" name="Card16"/>
+          <p:cNvSpPr/>
+          <p:nvPr/>
+        </p:nvSpPr>
+        <p:spPr>
+          <a:xfrm>
+            <a:off x="4338320" y="3352800"/>
+            <a:ext cx="3515360" cy="1386840"/>
+          </a:xfrm>
+          <a:prstGeom prst="roundRect">
+            <a:avLst>
+              <a:gd name="adj" fmla="val 6000"/>
+            </a:avLst>
+          </a:prstGeom>
+          <a:solidFill>
+            <a:srgbClr val="16213E"/>
+          </a:solidFill>
+          <a:ln/>
+        </p:spPr>
+        <p:txBody>
+          <a:bodyPr/>
+          <a:lstStyle/>
+          <a:p>
+            <a:endParaRPr lang="en-US"/>
+          </a:p>
+        </p:txBody>
+      </p:sp>
+      <p:sp>
+        <p:nvSpPr>
+          <p:cNvPr id="17" name="Badge17"/>
+          <p:cNvSpPr/>
+          <p:nvPr/>
+        </p:nvSpPr>
+        <p:spPr>
+          <a:xfrm>
+            <a:off x="5867400" y="3535680"/>
+            <a:ext cx="457200" cy="457200"/>
+          </a:xfrm>
+          <a:prstGeom prst="ellipse">
+            <a:avLst/>
+          </a:prstGeom>
+          <a:solidFill>
+            <a:srgbClr val="F2A900"/>
+          </a:solidFill>
+          <a:ln/>
+        </p:spPr>
+        <p:txBody>
+          <a:bodyPr wrap="square" lIns="0" tIns="0" rIns="0" bIns="0" rtlCol="0" anchor="ctr"/>
+          <a:lstStyle/>
+          <a:p>
+            <a:pPr marL="0" indent="0" algn="ctr">
+              <a:buNone/>
+            </a:pPr>
+            <a:r>
+              <a:rPr lang="en-US" sz="1500" b="1" dirty="0">
+                <a:solidFill>
+                  <a:srgbClr val="16213E"/>
+                </a:solidFill>
+                <a:latin typeface="Calibri" pitchFamily="34" charset="0"/>
+              </a:rPr>
+              <a:t>5</a:t>
+            </a:r>
+          </a:p>
+        </p:txBody>
+      </p:sp>
+      <p:sp>
+        <p:nvSpPr>
+          <p:cNvPr id="18" name="CardText18"/>
+          <p:cNvSpPr/>
+          <p:nvPr/>
+        </p:nvSpPr>
+        <p:spPr>
+          <a:xfrm>
+            <a:off x="4475480" y="4084320"/>
+            <a:ext cx="3241040" cy="563880"/>
+          </a:xfrm>
+          <a:prstGeom prst="rect">
+            <a:avLst/>
+          </a:prstGeom>
+          <a:noFill/>
+          <a:ln/>
+        </p:spPr>
+        <p:txBody>
+          <a:bodyPr wrap="square" lIns="0" tIns="0" rIns="0" bIns="0" rtlCol="0" anchor="ctr"/>
+          <a:lstStyle/>
+          <a:p>
+            <a:pPr marL="0" indent="0" algn="ctr">
+              <a:buNone/>
+            </a:pPr>
+            <a:r>
+              <a:rPr lang="en-US" sz="1300" b="1" dirty="0">
+                <a:solidFill>
+                  <a:srgbClr val="E8EEF7"/>
+                </a:solidFill>
+                <a:latin typeface="Calibri" pitchFamily="34" charset="0"/>
+                <a:ea typeface="Calibri" pitchFamily="34" charset="-122"/>
+                <a:cs typeface="Calibri" pitchFamily="34" charset="-120"/>
+              </a:rPr>
+              <a:t>Dynamic Inventory Prediction</a:t>
+            </a:r>
+            <a:endParaRPr lang="en-US" sz="1300" dirty="0"/>
+          </a:p>
+        </p:txBody>
+      </p:sp>
+      <p:sp>
+        <p:nvSpPr>
+          <p:cNvPr id="19" name="Card19"/>
+          <p:cNvSpPr/>
+          <p:nvPr/>
+        </p:nvSpPr>
+        <p:spPr>
+          <a:xfrm>
+            <a:off x="8128000" y="3352800"/>
+            <a:ext cx="3515360" cy="1386840"/>
+          </a:xfrm>
+          <a:prstGeom prst="roundRect">
+            <a:avLst>
+              <a:gd name="adj" fmla="val 6000"/>
+            </a:avLst>
+          </a:prstGeom>
+          <a:solidFill>
+            <a:srgbClr val="16213E"/>
+          </a:solidFill>
+          <a:ln/>
+        </p:spPr>
+        <p:txBody>
+          <a:bodyPr/>
+          <a:lstStyle/>
+          <a:p>
+            <a:endParaRPr lang="en-US"/>
+          </a:p>
+        </p:txBody>
+      </p:sp>
+      <p:sp>
+        <p:nvSpPr>
+          <p:cNvPr id="20" name="Badge20"/>
+          <p:cNvSpPr/>
+          <p:nvPr/>
+        </p:nvSpPr>
+        <p:spPr>
+          <a:xfrm>
+            <a:off x="9657080" y="3535680"/>
+            <a:ext cx="457200" cy="457200"/>
+          </a:xfrm>
+          <a:prstGeom prst="ellipse">
+            <a:avLst/>
+          </a:prstGeom>
+          <a:solidFill>
+            <a:srgbClr val="F2A900"/>
+          </a:solidFill>
+          <a:ln/>
+        </p:spPr>
+        <p:txBody>
+          <a:bodyPr wrap="square" lIns="0" tIns="0" rIns="0" bIns="0" rtlCol="0" anchor="ctr"/>
+          <a:lstStyle/>
+          <a:p>
+            <a:pPr marL="0" indent="0" algn="ctr">
+              <a:buNone/>
+            </a:pPr>
+            <a:r>
+              <a:rPr lang="en-US" sz="1500" b="1" dirty="0">
+                <a:solidFill>
+                  <a:srgbClr val="16213E"/>
+                </a:solidFill>
+                <a:latin typeface="Calibri" pitchFamily="34" charset="0"/>
+              </a:rPr>
+              <a:t>6</a:t>
+            </a:r>
+          </a:p>
+        </p:txBody>
+      </p:sp>
+      <p:sp>
+        <p:nvSpPr>
+          <p:cNvPr id="21" name="CardText21"/>
+          <p:cNvSpPr/>
+          <p:nvPr/>
+        </p:nvSpPr>
+        <p:spPr>
+          <a:xfrm>
+            <a:off x="8265160" y="4084320"/>
+            <a:ext cx="3241040" cy="563880"/>
+          </a:xfrm>
+          <a:prstGeom prst="rect">
+            <a:avLst/>
+          </a:prstGeom>
+          <a:noFill/>
+          <a:ln/>
+        </p:spPr>
+        <p:txBody>
+          <a:bodyPr wrap="square" lIns="0" tIns="0" rIns="0" bIns="0" rtlCol="0" anchor="ctr"/>
+          <a:lstStyle/>
+          <a:p>
+            <a:pPr marL="0" indent="0" algn="ctr">
+              <a:buNone/>
+            </a:pPr>
+            <a:r>
+              <a:rPr lang="en-US" sz="1300" b="1" dirty="0">
+                <a:solidFill>
+                  <a:srgbClr val="E8EEF7"/>
+                </a:solidFill>
+                <a:latin typeface="Calibri" pitchFamily="34" charset="0"/>
+                <a:ea typeface="Calibri" pitchFamily="34" charset="-122"/>
+                <a:cs typeface="Calibri" pitchFamily="34" charset="-120"/>
+              </a:rPr>
+              <a:t>Vehicle Routing Optimization</a:t>
+            </a:r>
+            <a:endParaRPr lang="en-US" sz="1300" dirty="0"/>
+          </a:p>
+        </p:txBody>
+      </p:sp>
+      <p:sp>
+        <p:nvSpPr>
+          <p:cNvPr id="22" name="Card22"/>
+          <p:cNvSpPr/>
+          <p:nvPr/>
+        </p:nvSpPr>
+        <p:spPr>
+          <a:xfrm>
+            <a:off x="548640" y="5013960"/>
+            <a:ext cx="3515360" cy="1386840"/>
+          </a:xfrm>
+          <a:prstGeom prst="roundRect">
+            <a:avLst>
+              <a:gd name="adj" fmla="val 6000"/>
+            </a:avLst>
+          </a:prstGeom>
+          <a:solidFill>
+            <a:srgbClr val="16213E"/>
+          </a:solidFill>
+          <a:ln/>
+        </p:spPr>
+        <p:txBody>
+          <a:bodyPr/>
+          <a:lstStyle/>
+          <a:p>
+            <a:endParaRPr lang="en-US"/>
+          </a:p>
+        </p:txBody>
+      </p:sp>
+      <p:sp>
+        <p:nvSpPr>
+          <p:cNvPr id="23" name="Badge23"/>
+          <p:cNvSpPr/>
+          <p:nvPr/>
+        </p:nvSpPr>
+        <p:spPr>
+          <a:xfrm>
+            <a:off x="2077720" y="5196840"/>
+            <a:ext cx="457200" cy="457200"/>
+          </a:xfrm>
+          <a:prstGeom prst="ellipse">
+            <a:avLst/>
+          </a:prstGeom>
+          <a:solidFill>
+            <a:srgbClr val="F2A900"/>
+          </a:solidFill>
+          <a:ln/>
+        </p:spPr>
+        <p:txBody>
+          <a:bodyPr wrap="square" lIns="0" tIns="0" rIns="0" bIns="0" rtlCol="0" anchor="ctr"/>
+          <a:lstStyle/>
+          <a:p>
+            <a:pPr marL="0" indent="0" algn="ctr">
+              <a:buNone/>
+            </a:pPr>
+            <a:r>
+              <a:rPr lang="en-US" sz="1500" b="1" dirty="0">
+                <a:solidFill>
+                  <a:srgbClr val="16213E"/>
+                </a:solidFill>
+                <a:latin typeface="Calibri" pitchFamily="34" charset="0"/>
+              </a:rPr>
+              <a:t>7</a:t>
+            </a:r>
+          </a:p>
+        </p:txBody>
+      </p:sp>
+      <p:sp>
+        <p:nvSpPr>
+          <p:cNvPr id="24" name="CardText24"/>
+          <p:cNvSpPr/>
+          <p:nvPr/>
+        </p:nvSpPr>
+        <p:spPr>
+          <a:xfrm>
+            <a:off x="685800" y="5745480"/>
+            <a:ext cx="3241040" cy="563880"/>
+          </a:xfrm>
+          <a:prstGeom prst="rect">
+            <a:avLst/>
+          </a:prstGeom>
+          <a:noFill/>
+          <a:ln/>
+        </p:spPr>
+        <p:txBody>
+          <a:bodyPr wrap="square" lIns="0" tIns="0" rIns="0" bIns="0" rtlCol="0" anchor="ctr"/>
+          <a:lstStyle/>
+          <a:p>
+            <a:pPr marL="0" indent="0" algn="ctr">
+              <a:buNone/>
+            </a:pPr>
+            <a:r>
+              <a:rPr lang="en-US" sz="1300" b="1" dirty="0">
+                <a:solidFill>
+                  <a:srgbClr val="E8EEF7"/>
+                </a:solidFill>
+                <a:latin typeface="Calibri" pitchFamily="34" charset="0"/>
+                <a:ea typeface="Calibri" pitchFamily="34" charset="-122"/>
+                <a:cs typeface="Calibri" pitchFamily="34" charset="-120"/>
+              </a:rPr>
+              <a:t>SAP / ERP Integration</a:t>
+            </a:r>
+            <a:endParaRPr lang="en-US" sz="1300" dirty="0"/>
+          </a:p>
+        </p:txBody>
+      </p:sp>
+      <p:sp>
+        <p:nvSpPr>
+          <p:cNvPr id="25" name="Card25"/>
+          <p:cNvSpPr/>
+          <p:nvPr/>
+        </p:nvSpPr>
+        <p:spPr>
+          <a:xfrm>
+            <a:off x="4338320" y="5013960"/>
+            <a:ext cx="3515360" cy="1386840"/>
+          </a:xfrm>
+          <a:prstGeom prst="roundRect">
+            <a:avLst>
+              <a:gd name="adj" fmla="val 6000"/>
+            </a:avLst>
+          </a:prstGeom>
+          <a:solidFill>
+            <a:srgbClr val="16213E"/>
+          </a:solidFill>
+          <a:ln/>
+        </p:spPr>
+        <p:txBody>
+          <a:bodyPr/>
+          <a:lstStyle/>
+          <a:p>
+            <a:endParaRPr lang="en-US"/>
+          </a:p>
+        </p:txBody>
+      </p:sp>
+      <p:sp>
+        <p:nvSpPr>
+          <p:cNvPr id="26" name="Badge26"/>
+          <p:cNvSpPr/>
+          <p:nvPr/>
+        </p:nvSpPr>
+        <p:spPr>
+          <a:xfrm>
+            <a:off x="5867400" y="5196840"/>
+            <a:ext cx="457200" cy="457200"/>
+          </a:xfrm>
+          <a:prstGeom prst="ellipse">
+            <a:avLst/>
+          </a:prstGeom>
+          <a:solidFill>
+            <a:srgbClr val="F2A900"/>
+          </a:solidFill>
+          <a:ln/>
+        </p:spPr>
+        <p:txBody>
+          <a:bodyPr wrap="square" lIns="0" tIns="0" rIns="0" bIns="0" rtlCol="0" anchor="ctr"/>
+          <a:lstStyle/>
+          <a:p>
+            <a:pPr marL="0" indent="0" algn="ctr">
+              <a:buNone/>
+            </a:pPr>
+            <a:r>
+              <a:rPr lang="en-US" sz="1500" b="1" dirty="0">
+                <a:solidFill>
+                  <a:srgbClr val="16213E"/>
+                </a:solidFill>
+                <a:latin typeface="Calibri" pitchFamily="34" charset="0"/>
+              </a:rPr>
+              <a:t>8</a:t>
+            </a:r>
+          </a:p>
+        </p:txBody>
+      </p:sp>
+      <p:sp>
+        <p:nvSpPr>
+          <p:cNvPr id="27" name="CardText27"/>
+          <p:cNvSpPr/>
+          <p:nvPr/>
+        </p:nvSpPr>
+        <p:spPr>
+          <a:xfrm>
+            <a:off x="4475480" y="5745480"/>
+            <a:ext cx="3241040" cy="563880"/>
+          </a:xfrm>
+          <a:prstGeom prst="rect">
+            <a:avLst/>
+          </a:prstGeom>
+          <a:noFill/>
+          <a:ln/>
+        </p:spPr>
+        <p:txBody>
+          <a:bodyPr wrap="square" lIns="0" tIns="0" rIns="0" bIns="0" rtlCol="0" anchor="ctr"/>
+          <a:lstStyle/>
+          <a:p>
+            <a:pPr marL="0" indent="0" algn="ctr">
+              <a:buNone/>
+            </a:pPr>
+            <a:r>
+              <a:rPr lang="en-US" sz="1300" b="1" dirty="0">
+                <a:solidFill>
+                  <a:srgbClr val="E8EEF7"/>
+                </a:solidFill>
+                <a:latin typeface="Calibri" pitchFamily="34" charset="0"/>
+                <a:ea typeface="Calibri" pitchFamily="34" charset="-122"/>
+                <a:cs typeface="Calibri" pitchFamily="34" charset="-120"/>
+              </a:rPr>
+              <a:t>Carbon-aware Optimization</a:t>
+            </a:r>
+            <a:endParaRPr lang="en-US" sz="1300" dirty="0"/>
+          </a:p>
+        </p:txBody>
+      </p:sp>
+      <p:sp>
+        <p:nvSpPr>
+          <p:cNvPr id="28" name="Card28"/>
+          <p:cNvSpPr/>
+          <p:nvPr/>
+        </p:nvSpPr>
+        <p:spPr>
+          <a:xfrm>
+            <a:off x="8128000" y="5013960"/>
+            <a:ext cx="3515360" cy="1386840"/>
+          </a:xfrm>
+          <a:prstGeom prst="roundRect">
+            <a:avLst>
+              <a:gd name="adj" fmla="val 6000"/>
+            </a:avLst>
+          </a:prstGeom>
+          <a:solidFill>
+            <a:srgbClr val="16213E"/>
+          </a:solidFill>
+          <a:ln/>
+        </p:spPr>
+        <p:txBody>
+          <a:bodyPr/>
+          <a:lstStyle/>
+          <a:p>
+            <a:endParaRPr lang="en-US"/>
+          </a:p>
+        </p:txBody>
+      </p:sp>
+      <p:sp>
+        <p:nvSpPr>
+          <p:cNvPr id="29" name="Badge29"/>
+          <p:cNvSpPr/>
+          <p:nvPr/>
+        </p:nvSpPr>
+        <p:spPr>
+          <a:xfrm>
+            <a:off x="9657080" y="5196840"/>
+            <a:ext cx="457200" cy="457200"/>
+          </a:xfrm>
+          <a:prstGeom prst="ellipse">
+            <a:avLst/>
+          </a:prstGeom>
+          <a:solidFill>
+            <a:srgbClr val="F2A900"/>
+          </a:solidFill>
+          <a:ln/>
+        </p:spPr>
+        <p:txBody>
+          <a:bodyPr wrap="square" lIns="0" tIns="0" rIns="0" bIns="0" rtlCol="0" anchor="ctr"/>
+          <a:lstStyle/>
+          <a:p>
+            <a:pPr marL="0" indent="0" algn="ctr">
+              <a:buNone/>
+            </a:pPr>
+            <a:r>
+              <a:rPr lang="en-US" sz="1500" b="1" dirty="0">
+                <a:solidFill>
+                  <a:srgbClr val="16213E"/>
+                </a:solidFill>
+                <a:latin typeface="Calibri" pitchFamily="34" charset="0"/>
+              </a:rPr>
+              <a:t>9</a:t>
+            </a:r>
+          </a:p>
+        </p:txBody>
+      </p:sp>
+      <p:sp>
+        <p:nvSpPr>
+          <p:cNvPr id="30" name="CardText30"/>
+          <p:cNvSpPr/>
+          <p:nvPr/>
+        </p:nvSpPr>
+        <p:spPr>
+          <a:xfrm>
+            <a:off x="8265160" y="5745480"/>
+            <a:ext cx="3241040" cy="563880"/>
+          </a:xfrm>
+          <a:prstGeom prst="rect">
+            <a:avLst/>
+          </a:prstGeom>
+          <a:noFill/>
+          <a:ln/>
+        </p:spPr>
+        <p:txBody>
+          <a:bodyPr wrap="square" lIns="0" tIns="0" rIns="0" bIns="0" rtlCol="0" anchor="ctr"/>
+          <a:lstStyle/>
+          <a:p>
+            <a:pPr marL="0" indent="0" algn="ctr">
+              <a:buNone/>
+            </a:pPr>
+            <a:r>
+              <a:rPr lang="en-US" sz="1300" b="1" dirty="0">
+                <a:solidFill>
+                  <a:srgbClr val="E8EEF7"/>
+                </a:solidFill>
+                <a:latin typeface="Calibri" pitchFamily="34" charset="0"/>
+                <a:ea typeface="Calibri" pitchFamily="34" charset="-122"/>
+                <a:cs typeface="Calibri" pitchFamily="34" charset="-120"/>
+              </a:rPr>
+              <a:t>Real-time Dashboard Updates</a:t>
+            </a:r>
+            <a:endParaRPr lang="en-US" sz="1300" dirty="0"/>
+          </a:p>
+        </p:txBody>
+      </p:sp>
+      <p:sp>
+        <p:nvSpPr>
+          <p:cNvPr id="31" name="FooterLeft"/>
           <p:cNvSpPr/>
           <p:nvPr/>
         </p:nvSpPr>
@@ -5698,7 +7183,7 @@
           <a:bodyPr wrap="square" lIns="0" tIns="0" rIns="0" bIns="0" rtlCol="0" anchor="ctr"/>
           <a:lstStyle/>
           <a:p>
-            <a:pPr indent="0" marL="0">
+            <a:pPr marL="0" indent="0" algn="l">
               <a:buNone/>
             </a:pPr>
             <a:r>
@@ -5718,7 +7203,7 @@
       </p:sp>
       <p:sp>
         <p:nvSpPr>
-          <p:cNvPr id="24" name="Text 22"/>
+          <p:cNvPr id="32" name="FooterRight"/>
           <p:cNvSpPr/>
           <p:nvPr/>
         </p:nvSpPr>
@@ -5737,7 +7222,7 @@
           <a:bodyPr wrap="square" lIns="0" tIns="0" rIns="0" bIns="0" rtlCol="0" anchor="ctr"/>
           <a:lstStyle/>
           <a:p>
-            <a:pPr algn="r" indent="0" marL="0">
+            <a:pPr marL="0" indent="0" algn="r">
               <a:buNone/>
             </a:pPr>
             <a:r>
@@ -5749,7 +7234,1527 @@
                 <a:ea typeface="Calibri" pitchFamily="34" charset="-122"/>
                 <a:cs typeface="Calibri" pitchFamily="34" charset="-120"/>
               </a:rPr>
-              <a:t>6</a:t>
+              <a:t>7</a:t>
+            </a:r>
+            <a:endParaRPr lang="en-US" sz="900" dirty="0"/>
+          </a:p>
+        </p:txBody>
+      </p:sp>
+    </p:spTree>
+  </p:cSld>
+  <p:clrMapOvr>
+    <a:masterClrMapping/>
+  </p:clrMapOvr>
+</p:sld>
+</file>
+
+<file path=ppt/slides/slide8.xml><?xml version="1.0" encoding="utf-8"?>
+<p:sld xmlns:a="http://schemas.openxmlformats.org/drawingml/2006/main" xmlns:r="http://schemas.openxmlformats.org/officeDocument/2006/relationships" xmlns:p="http://schemas.openxmlformats.org/presentationml/2006/main">
+  <p:cSld name="Slide 6">
+    <p:bg>
+      <p:bgPr>
+        <a:solidFill>
+          <a:srgbClr val="0F1729"/>
+        </a:solidFill>
+        <a:effectLst/>
+      </p:bgPr>
+    </p:bg>
+    <p:spTree>
+      <p:nvGrpSpPr>
+        <p:cNvPr id="1" name=""/>
+        <p:cNvGrpSpPr/>
+        <p:nvPr/>
+      </p:nvGrpSpPr>
+      <p:grpSpPr>
+        <a:xfrm>
+          <a:off x="0" y="0"/>
+          <a:ext cx="0" cy="0"/>
+          <a:chOff x="0" y="0"/>
+          <a:chExt cx="0" cy="0"/>
+        </a:xfrm>
+      </p:grpSpPr>
+      <p:sp>
+        <p:nvSpPr>
+          <p:cNvPr id="2" name="Text 0"/>
+          <p:cNvSpPr/>
+          <p:nvPr/>
+        </p:nvSpPr>
+        <p:spPr>
+          <a:xfrm>
+            <a:off x="548640" y="457200"/>
+            <a:ext cx="9144000" cy="640080"/>
+          </a:xfrm>
+          <a:prstGeom prst="rect">
+            <a:avLst/>
+          </a:prstGeom>
+          <a:noFill/>
+          <a:ln/>
+        </p:spPr>
+        <p:txBody>
+          <a:bodyPr wrap="square" lIns="0" tIns="0" rIns="0" bIns="0" rtlCol="0" anchor="ctr"/>
+          <a:lstStyle/>
+          <a:p>
+            <a:pPr marL="0" indent="0">
+              <a:buNone/>
+            </a:pPr>
+            <a:r>
+              <a:rPr lang="en-US" sz="3200" b="1" dirty="0">
+                <a:solidFill>
+                  <a:srgbClr val="FFFFFF"/>
+                </a:solidFill>
+                <a:latin typeface="Cambria" pitchFamily="34" charset="0"/>
+                <a:ea typeface="Cambria" pitchFamily="34" charset="-122"/>
+                <a:cs typeface="Cambria" pitchFamily="34" charset="-120"/>
+              </a:rPr>
+              <a:t>Limitations &amp; Next Steps</a:t>
+            </a:r>
+            <a:endParaRPr lang="en-US" sz="3200" dirty="0"/>
+          </a:p>
+        </p:txBody>
+      </p:sp>
+      <p:sp>
+        <p:nvSpPr>
+          <p:cNvPr id="3" name="Text 1"/>
+          <p:cNvSpPr/>
+          <p:nvPr/>
+        </p:nvSpPr>
+        <p:spPr>
+          <a:xfrm>
+            <a:off x="548640" y="1371600"/>
+            <a:ext cx="5120640" cy="320040"/>
+          </a:xfrm>
+          <a:prstGeom prst="rect">
+            <a:avLst/>
+          </a:prstGeom>
+          <a:noFill/>
+          <a:ln/>
+        </p:spPr>
+        <p:txBody>
+          <a:bodyPr wrap="square" lIns="0" tIns="0" rIns="0" bIns="0" rtlCol="0" anchor="ctr"/>
+          <a:lstStyle/>
+          <a:p>
+            <a:pPr marL="0" indent="0">
+              <a:buNone/>
+            </a:pPr>
+            <a:r>
+              <a:rPr lang="en-US" sz="1300" b="1" kern="0" spc="150" dirty="0">
+                <a:solidFill>
+                  <a:srgbClr val="F2A900"/>
+                </a:solidFill>
+                <a:latin typeface="Calibri" pitchFamily="34" charset="0"/>
+                <a:ea typeface="Calibri" pitchFamily="34" charset="-122"/>
+                <a:cs typeface="Calibri" pitchFamily="34" charset="-120"/>
+              </a:rPr>
+              <a:t>LIMITATIONS</a:t>
+            </a:r>
+            <a:endParaRPr lang="en-US" sz="1300" dirty="0"/>
+          </a:p>
+        </p:txBody>
+      </p:sp>
+      <p:sp>
+        <p:nvSpPr>
+          <p:cNvPr id="4" name="Shape 2"/>
+          <p:cNvSpPr/>
+          <p:nvPr/>
+        </p:nvSpPr>
+        <p:spPr>
+          <a:xfrm>
+            <a:off x="548640" y="1883664"/>
+            <a:ext cx="91440" cy="91440"/>
+          </a:xfrm>
+          <a:prstGeom prst="ellipse">
+            <a:avLst/>
+          </a:prstGeom>
+          <a:solidFill>
+            <a:srgbClr val="F2A900"/>
+          </a:solidFill>
+          <a:ln/>
+        </p:spPr>
+      </p:sp>
+      <p:sp>
+        <p:nvSpPr>
+          <p:cNvPr id="5" name="Text 3"/>
+          <p:cNvSpPr/>
+          <p:nvPr/>
+        </p:nvSpPr>
+        <p:spPr>
+          <a:xfrm>
+            <a:off x="777240" y="1755648"/>
+            <a:ext cx="4937760" cy="640080"/>
+          </a:xfrm>
+          <a:prstGeom prst="rect">
+            <a:avLst/>
+          </a:prstGeom>
+          <a:noFill/>
+          <a:ln/>
+        </p:spPr>
+        <p:txBody>
+          <a:bodyPr wrap="square" lIns="0" tIns="0" rIns="0" bIns="0" rtlCol="0" anchor="ctr"/>
+          <a:lstStyle/>
+          <a:p>
+            <a:pPr marL="0" indent="0">
+              <a:buNone/>
+            </a:pPr>
+            <a:r>
+              <a:rPr lang="en-US" sz="1250" dirty="0">
+                <a:solidFill>
+                  <a:srgbClr val="E8EEF7"/>
+                </a:solidFill>
+                <a:latin typeface="Calibri" pitchFamily="34" charset="0"/>
+                <a:ea typeface="Calibri" pitchFamily="34" charset="-122"/>
+                <a:cs typeface="Calibri" pitchFamily="34" charset="-120"/>
+              </a:rPr>
+              <a:t>Quantum covers accept/reject only — not yet the full multi-plant reassignment model</a:t>
+            </a:r>
+            <a:endParaRPr lang="en-US" sz="1250" dirty="0"/>
+          </a:p>
+        </p:txBody>
+      </p:sp>
+      <p:sp>
+        <p:nvSpPr>
+          <p:cNvPr id="6" name="Shape 4"/>
+          <p:cNvSpPr/>
+          <p:nvPr/>
+        </p:nvSpPr>
+        <p:spPr>
+          <a:xfrm>
+            <a:off x="548640" y="2660904"/>
+            <a:ext cx="91440" cy="91440"/>
+          </a:xfrm>
+          <a:prstGeom prst="ellipse">
+            <a:avLst/>
+          </a:prstGeom>
+          <a:solidFill>
+            <a:srgbClr val="F2A900"/>
+          </a:solidFill>
+          <a:ln/>
+        </p:spPr>
+      </p:sp>
+      <p:sp>
+        <p:nvSpPr>
+          <p:cNvPr id="7" name="Text 5"/>
+          <p:cNvSpPr/>
+          <p:nvPr/>
+        </p:nvSpPr>
+        <p:spPr>
+          <a:xfrm>
+            <a:off x="777240" y="2532888"/>
+            <a:ext cx="4937760" cy="640080"/>
+          </a:xfrm>
+          <a:prstGeom prst="rect">
+            <a:avLst/>
+          </a:prstGeom>
+          <a:noFill/>
+          <a:ln/>
+        </p:spPr>
+        <p:txBody>
+          <a:bodyPr wrap="square" lIns="0" tIns="0" rIns="0" bIns="0" rtlCol="0" anchor="ctr"/>
+          <a:lstStyle/>
+          <a:p>
+            <a:pPr marL="0" indent="0">
+              <a:buNone/>
+            </a:pPr>
+            <a:r>
+              <a:rPr lang="en-US" sz="1250" dirty="0">
+                <a:solidFill>
+                  <a:srgbClr val="E8EEF7"/>
+                </a:solidFill>
+                <a:latin typeface="Calibri" pitchFamily="34" charset="0"/>
+                <a:ea typeface="Calibri" pitchFamily="34" charset="-122"/>
+                <a:cs typeface="Calibri" pitchFamily="34" charset="-120"/>
+              </a:rPr>
+              <a:t>QAOA runs on a noiseless simulator; no real quantum hardware run yet</a:t>
+            </a:r>
+            <a:endParaRPr lang="en-US" sz="1250" dirty="0"/>
+          </a:p>
+        </p:txBody>
+      </p:sp>
+      <p:sp>
+        <p:nvSpPr>
+          <p:cNvPr id="8" name="Shape 6"/>
+          <p:cNvSpPr/>
+          <p:nvPr/>
+        </p:nvSpPr>
+        <p:spPr>
+          <a:xfrm>
+            <a:off x="548640" y="3438144"/>
+            <a:ext cx="91440" cy="91440"/>
+          </a:xfrm>
+          <a:prstGeom prst="ellipse">
+            <a:avLst/>
+          </a:prstGeom>
+          <a:solidFill>
+            <a:srgbClr val="F2A900"/>
+          </a:solidFill>
+          <a:ln/>
+        </p:spPr>
+      </p:sp>
+      <p:sp>
+        <p:nvSpPr>
+          <p:cNvPr id="9" name="Text 7"/>
+          <p:cNvSpPr/>
+          <p:nvPr/>
+        </p:nvSpPr>
+        <p:spPr>
+          <a:xfrm>
+            <a:off x="777240" y="3310128"/>
+            <a:ext cx="4937760" cy="640080"/>
+          </a:xfrm>
+          <a:prstGeom prst="rect">
+            <a:avLst/>
+          </a:prstGeom>
+          <a:noFill/>
+          <a:ln/>
+        </p:spPr>
+        <p:txBody>
+          <a:bodyPr wrap="square" lIns="0" tIns="0" rIns="0" bIns="0" rtlCol="0" anchor="ctr"/>
+          <a:lstStyle/>
+          <a:p>
+            <a:pPr marL="0" indent="0">
+              <a:buNone/>
+            </a:pPr>
+            <a:r>
+              <a:rPr lang="en-US" sz="1250" dirty="0">
+                <a:solidFill>
+                  <a:srgbClr val="E8EEF7"/>
+                </a:solidFill>
+                <a:latin typeface="Calibri" pitchFamily="34" charset="0"/>
+                <a:ea typeface="Calibri" pitchFamily="34" charset="-122"/>
+                <a:cs typeface="Calibri" pitchFamily="34" charset="-120"/>
+              </a:rPr>
+              <a:t>Split-fulfillment (one order across two plants) is out of scope</a:t>
+            </a:r>
+            <a:endParaRPr lang="en-US" sz="1250" dirty="0"/>
+          </a:p>
+        </p:txBody>
+      </p:sp>
+      <p:sp>
+        <p:nvSpPr>
+          <p:cNvPr id="10" name="Shape 8"/>
+          <p:cNvSpPr/>
+          <p:nvPr/>
+        </p:nvSpPr>
+        <p:spPr>
+          <a:xfrm>
+            <a:off x="548640" y="4215384"/>
+            <a:ext cx="91440" cy="91440"/>
+          </a:xfrm>
+          <a:prstGeom prst="ellipse">
+            <a:avLst/>
+          </a:prstGeom>
+          <a:solidFill>
+            <a:srgbClr val="F2A900"/>
+          </a:solidFill>
+          <a:ln/>
+        </p:spPr>
+      </p:sp>
+      <p:sp>
+        <p:nvSpPr>
+          <p:cNvPr id="11" name="Text 9"/>
+          <p:cNvSpPr/>
+          <p:nvPr/>
+        </p:nvSpPr>
+        <p:spPr>
+          <a:xfrm>
+            <a:off x="777240" y="4087368"/>
+            <a:ext cx="4937760" cy="640080"/>
+          </a:xfrm>
+          <a:prstGeom prst="rect">
+            <a:avLst/>
+          </a:prstGeom>
+          <a:noFill/>
+          <a:ln/>
+        </p:spPr>
+        <p:txBody>
+          <a:bodyPr wrap="square" lIns="0" tIns="0" rIns="0" bIns="0" rtlCol="0" anchor="ctr"/>
+          <a:lstStyle/>
+          <a:p>
+            <a:pPr marL="0" indent="0">
+              <a:buNone/>
+            </a:pPr>
+            <a:r>
+              <a:rPr lang="en-US" sz="1250" dirty="0">
+                <a:solidFill>
+                  <a:srgbClr val="E8EEF7"/>
+                </a:solidFill>
+                <a:latin typeface="Calibri" pitchFamily="34" charset="0"/>
+                <a:ea typeface="Calibri" pitchFamily="34" charset="-122"/>
+                <a:cs typeface="Calibri" pitchFamily="34" charset="-120"/>
+              </a:rPr>
+              <a:t>One data-quality finding: the dataset's own existing assignment already violates its own capacity by 199 units in one case</a:t>
+            </a:r>
+            <a:endParaRPr lang="en-US" sz="1250" dirty="0"/>
+          </a:p>
+        </p:txBody>
+      </p:sp>
+      <p:sp>
+        <p:nvSpPr>
+          <p:cNvPr id="12" name="Text 10"/>
+          <p:cNvSpPr/>
+          <p:nvPr/>
+        </p:nvSpPr>
+        <p:spPr>
+          <a:xfrm>
+            <a:off x="6309360" y="1371600"/>
+            <a:ext cx="5120640" cy="320040"/>
+          </a:xfrm>
+          <a:prstGeom prst="rect">
+            <a:avLst/>
+          </a:prstGeom>
+          <a:noFill/>
+          <a:ln/>
+        </p:spPr>
+        <p:txBody>
+          <a:bodyPr wrap="square" lIns="0" tIns="0" rIns="0" bIns="0" rtlCol="0" anchor="ctr"/>
+          <a:lstStyle/>
+          <a:p>
+            <a:pPr marL="0" indent="0">
+              <a:buNone/>
+            </a:pPr>
+            <a:r>
+              <a:rPr lang="en-US" sz="1300" b="1" kern="0" spc="150" dirty="0">
+                <a:solidFill>
+                  <a:srgbClr val="F2A900"/>
+                </a:solidFill>
+                <a:latin typeface="Calibri" pitchFamily="34" charset="0"/>
+                <a:ea typeface="Calibri" pitchFamily="34" charset="-122"/>
+                <a:cs typeface="Calibri" pitchFamily="34" charset="-120"/>
+              </a:rPr>
+              <a:t>NEXT STEPS</a:t>
+            </a:r>
+            <a:endParaRPr lang="en-US" sz="1300" dirty="0"/>
+          </a:p>
+        </p:txBody>
+      </p:sp>
+      <p:sp>
+        <p:nvSpPr>
+          <p:cNvPr id="13" name="Shape 11"/>
+          <p:cNvSpPr/>
+          <p:nvPr/>
+        </p:nvSpPr>
+        <p:spPr>
+          <a:xfrm>
+            <a:off x="6309360" y="1883664"/>
+            <a:ext cx="91440" cy="91440"/>
+          </a:xfrm>
+          <a:prstGeom prst="ellipse">
+            <a:avLst/>
+          </a:prstGeom>
+          <a:solidFill>
+            <a:srgbClr val="5BA8FF"/>
+          </a:solidFill>
+          <a:ln/>
+        </p:spPr>
+      </p:sp>
+      <p:sp>
+        <p:nvSpPr>
+          <p:cNvPr id="14" name="Text 12"/>
+          <p:cNvSpPr/>
+          <p:nvPr/>
+        </p:nvSpPr>
+        <p:spPr>
+          <a:xfrm>
+            <a:off x="6537960" y="1755648"/>
+            <a:ext cx="5029200" cy="640080"/>
+          </a:xfrm>
+          <a:prstGeom prst="rect">
+            <a:avLst/>
+          </a:prstGeom>
+          <a:noFill/>
+          <a:ln/>
+        </p:spPr>
+        <p:txBody>
+          <a:bodyPr wrap="square" lIns="0" tIns="0" rIns="0" bIns="0" rtlCol="0" anchor="ctr"/>
+          <a:lstStyle/>
+          <a:p>
+            <a:pPr marL="0" indent="0">
+              <a:buNone/>
+            </a:pPr>
+            <a:r>
+              <a:rPr lang="en-US" sz="1250" dirty="0">
+                <a:solidFill>
+                  <a:srgbClr val="E8EEF7"/>
+                </a:solidFill>
+                <a:latin typeface="Calibri" pitchFamily="34" charset="0"/>
+                <a:ea typeface="Calibri" pitchFamily="34" charset="-122"/>
+                <a:cs typeface="Calibri" pitchFamily="34" charset="-120"/>
+              </a:rPr>
+              <a:t>Run on real IBM Quantum hardware — migration path scoped, awaiting account access</a:t>
+            </a:r>
+            <a:endParaRPr lang="en-US" sz="1250" dirty="0"/>
+          </a:p>
+        </p:txBody>
+      </p:sp>
+      <p:sp>
+        <p:nvSpPr>
+          <p:cNvPr id="15" name="Shape 13"/>
+          <p:cNvSpPr/>
+          <p:nvPr/>
+        </p:nvSpPr>
+        <p:spPr>
+          <a:xfrm>
+            <a:off x="6309360" y="2660904"/>
+            <a:ext cx="91440" cy="91440"/>
+          </a:xfrm>
+          <a:prstGeom prst="ellipse">
+            <a:avLst/>
+          </a:prstGeom>
+          <a:solidFill>
+            <a:srgbClr val="5BA8FF"/>
+          </a:solidFill>
+          <a:ln/>
+        </p:spPr>
+      </p:sp>
+      <p:sp>
+        <p:nvSpPr>
+          <p:cNvPr id="16" name="Text 14"/>
+          <p:cNvSpPr/>
+          <p:nvPr/>
+        </p:nvSpPr>
+        <p:spPr>
+          <a:xfrm>
+            <a:off x="6537960" y="2532888"/>
+            <a:ext cx="5029200" cy="640080"/>
+          </a:xfrm>
+          <a:prstGeom prst="rect">
+            <a:avLst/>
+          </a:prstGeom>
+          <a:noFill/>
+          <a:ln/>
+        </p:spPr>
+        <p:txBody>
+          <a:bodyPr wrap="square" lIns="0" tIns="0" rIns="0" bIns="0" rtlCol="0" anchor="ctr"/>
+          <a:lstStyle/>
+          <a:p>
+            <a:pPr marL="0" indent="0">
+              <a:buNone/>
+            </a:pPr>
+            <a:r>
+              <a:rPr lang="en-US" sz="1250" dirty="0">
+                <a:solidFill>
+                  <a:srgbClr val="E8EEF7"/>
+                </a:solidFill>
+                <a:latin typeface="Calibri" pitchFamily="34" charset="0"/>
+                <a:ea typeface="Calibri" pitchFamily="34" charset="-122"/>
+                <a:cs typeface="Calibri" pitchFamily="34" charset="-120"/>
+              </a:rPr>
+              <a:t>Extend QAOA to the reassignment model on a reduced candidate-plant subset</a:t>
+            </a:r>
+            <a:endParaRPr lang="en-US" sz="1250" dirty="0"/>
+          </a:p>
+        </p:txBody>
+      </p:sp>
+      <p:sp>
+        <p:nvSpPr>
+          <p:cNvPr id="17" name="Shape 15"/>
+          <p:cNvSpPr/>
+          <p:nvPr/>
+        </p:nvSpPr>
+        <p:spPr>
+          <a:xfrm>
+            <a:off x="6309360" y="3438144"/>
+            <a:ext cx="91440" cy="91440"/>
+          </a:xfrm>
+          <a:prstGeom prst="ellipse">
+            <a:avLst/>
+          </a:prstGeom>
+          <a:solidFill>
+            <a:srgbClr val="5BA8FF"/>
+          </a:solidFill>
+          <a:ln/>
+        </p:spPr>
+      </p:sp>
+      <p:sp>
+        <p:nvSpPr>
+          <p:cNvPr id="18" name="Text 16"/>
+          <p:cNvSpPr/>
+          <p:nvPr/>
+        </p:nvSpPr>
+        <p:spPr>
+          <a:xfrm>
+            <a:off x="6537960" y="3310128"/>
+            <a:ext cx="5029200" cy="640080"/>
+          </a:xfrm>
+          <a:prstGeom prst="rect">
+            <a:avLst/>
+          </a:prstGeom>
+          <a:noFill/>
+          <a:ln/>
+        </p:spPr>
+        <p:txBody>
+          <a:bodyPr wrap="square" lIns="0" tIns="0" rIns="0" bIns="0" rtlCol="0" anchor="ctr"/>
+          <a:lstStyle/>
+          <a:p>
+            <a:pPr marL="0" indent="0">
+              <a:buNone/>
+            </a:pPr>
+            <a:r>
+              <a:rPr lang="en-US" sz="1250" dirty="0">
+                <a:solidFill>
+                  <a:srgbClr val="E8EEF7"/>
+                </a:solidFill>
+                <a:latin typeface="Calibri" pitchFamily="34" charset="0"/>
+                <a:ea typeface="Calibri" pitchFamily="34" charset="-122"/>
+                <a:cs typeface="Calibri" pitchFamily="34" charset="-120"/>
+              </a:rPr>
+              <a:t>Investigate constraint-preserving QAOA mixers to remove slack-variable overhead</a:t>
+            </a:r>
+            <a:endParaRPr lang="en-US" sz="1250" dirty="0"/>
+          </a:p>
+        </p:txBody>
+      </p:sp>
+      <p:sp>
+        <p:nvSpPr>
+          <p:cNvPr id="19" name="Shape 17"/>
+          <p:cNvSpPr/>
+          <p:nvPr/>
+        </p:nvSpPr>
+        <p:spPr>
+          <a:xfrm>
+            <a:off x="6309360" y="4215384"/>
+            <a:ext cx="91440" cy="91440"/>
+          </a:xfrm>
+          <a:prstGeom prst="ellipse">
+            <a:avLst/>
+          </a:prstGeom>
+          <a:solidFill>
+            <a:srgbClr val="5BA8FF"/>
+          </a:solidFill>
+          <a:ln/>
+        </p:spPr>
+      </p:sp>
+      <p:sp>
+        <p:nvSpPr>
+          <p:cNvPr id="20" name="Text 18"/>
+          <p:cNvSpPr/>
+          <p:nvPr/>
+        </p:nvSpPr>
+        <p:spPr>
+          <a:xfrm>
+            <a:off x="6537960" y="4087368"/>
+            <a:ext cx="5029200" cy="640080"/>
+          </a:xfrm>
+          <a:prstGeom prst="rect">
+            <a:avLst/>
+          </a:prstGeom>
+          <a:noFill/>
+          <a:ln/>
+        </p:spPr>
+        <p:txBody>
+          <a:bodyPr wrap="square" lIns="0" tIns="0" rIns="0" bIns="0" rtlCol="0" anchor="ctr"/>
+          <a:lstStyle/>
+          <a:p>
+            <a:pPr marL="0" indent="0">
+              <a:buNone/>
+            </a:pPr>
+            <a:r>
+              <a:rPr lang="en-US" sz="1250" dirty="0">
+                <a:solidFill>
+                  <a:srgbClr val="E8EEF7"/>
+                </a:solidFill>
+                <a:latin typeface="Calibri" pitchFamily="34" charset="0"/>
+                <a:ea typeface="Calibri" pitchFamily="34" charset="-122"/>
+                <a:cs typeface="Calibri" pitchFamily="34" charset="-120"/>
+              </a:rPr>
+              <a:t>Model multi-plant split-fulfillment for partially-filled orders</a:t>
+            </a:r>
+            <a:endParaRPr lang="en-US" sz="1250" dirty="0"/>
+          </a:p>
+        </p:txBody>
+      </p:sp>
+      <p:sp>
+        <p:nvSpPr>
+          <p:cNvPr id="21" name="Shape 19"/>
+          <p:cNvSpPr/>
+          <p:nvPr/>
+        </p:nvSpPr>
+        <p:spPr>
+          <a:xfrm>
+            <a:off x="548640" y="5212080"/>
+            <a:ext cx="11064240" cy="0"/>
+          </a:xfrm>
+          <a:prstGeom prst="line">
+            <a:avLst/>
+          </a:prstGeom>
+          <a:noFill/>
+          <a:ln w="12700">
+            <a:solidFill>
+              <a:srgbClr val="2B3A5C"/>
+            </a:solidFill>
+            <a:prstDash val="solid"/>
+          </a:ln>
+        </p:spPr>
+      </p:sp>
+      <p:sp>
+        <p:nvSpPr>
+          <p:cNvPr id="22" name="Text 20"/>
+          <p:cNvSpPr/>
+          <p:nvPr/>
+        </p:nvSpPr>
+        <p:spPr>
+          <a:xfrm>
+            <a:off x="548640" y="5440680"/>
+            <a:ext cx="11064240" cy="548640"/>
+          </a:xfrm>
+          <a:prstGeom prst="rect">
+            <a:avLst/>
+          </a:prstGeom>
+          <a:noFill/>
+          <a:ln/>
+        </p:spPr>
+        <p:txBody>
+          <a:bodyPr wrap="square" lIns="0" tIns="0" rIns="0" bIns="0" rtlCol="0" anchor="ctr"/>
+          <a:lstStyle/>
+          <a:p>
+            <a:pPr marL="0" indent="0">
+              <a:buNone/>
+            </a:pPr>
+            <a:r>
+              <a:rPr lang="en-US" sz="1500" i="1" dirty="0">
+                <a:solidFill>
+                  <a:srgbClr val="FFFFFF"/>
+                </a:solidFill>
+                <a:latin typeface="Cambria" pitchFamily="34" charset="0"/>
+                <a:ea typeface="Cambria" pitchFamily="34" charset="-122"/>
+                <a:cs typeface="Cambria" pitchFamily="34" charset="-120"/>
+              </a:rPr>
+              <a:t>This project is built to be honest about what quantum computing can and can't do here today — not to oversell a result.</a:t>
+            </a:r>
+            <a:endParaRPr lang="en-US" sz="1500" dirty="0"/>
+          </a:p>
+        </p:txBody>
+      </p:sp>
+      <p:sp>
+        <p:nvSpPr>
+          <p:cNvPr id="23" name="Text 21"/>
+          <p:cNvSpPr/>
+          <p:nvPr/>
+        </p:nvSpPr>
+        <p:spPr>
+          <a:xfrm>
+            <a:off x="457200" y="6537960"/>
+            <a:ext cx="7315200" cy="274320"/>
+          </a:xfrm>
+          <a:prstGeom prst="rect">
+            <a:avLst/>
+          </a:prstGeom>
+          <a:noFill/>
+          <a:ln/>
+        </p:spPr>
+        <p:txBody>
+          <a:bodyPr wrap="square" lIns="0" tIns="0" rIns="0" bIns="0" rtlCol="0" anchor="ctr"/>
+          <a:lstStyle/>
+          <a:p>
+            <a:pPr marL="0" indent="0">
+              <a:buNone/>
+            </a:pPr>
+            <a:r>
+              <a:rPr lang="en-US" sz="900" dirty="0">
+                <a:solidFill>
+                  <a:srgbClr val="8896B0"/>
+                </a:solidFill>
+                <a:latin typeface="Calibri" pitchFamily="34" charset="0"/>
+                <a:ea typeface="Calibri" pitchFamily="34" charset="-122"/>
+                <a:cs typeface="Calibri" pitchFamily="34" charset="-120"/>
+              </a:rPr>
+              <a:t>Nestlé DOM — WISER Global Quantum+AI Program 2026</a:t>
+            </a:r>
+            <a:endParaRPr lang="en-US" sz="900" dirty="0"/>
+          </a:p>
+        </p:txBody>
+      </p:sp>
+      <p:sp>
+        <p:nvSpPr>
+          <p:cNvPr id="24" name="Text 22"/>
+          <p:cNvSpPr/>
+          <p:nvPr/>
+        </p:nvSpPr>
+        <p:spPr>
+          <a:xfrm>
+            <a:off x="10789920" y="6537960"/>
+            <a:ext cx="914400" cy="274320"/>
+          </a:xfrm>
+          <a:prstGeom prst="rect">
+            <a:avLst/>
+          </a:prstGeom>
+          <a:noFill/>
+          <a:ln/>
+        </p:spPr>
+        <p:txBody>
+          <a:bodyPr wrap="square" lIns="0" tIns="0" rIns="0" bIns="0" rtlCol="0" anchor="ctr"/>
+          <a:lstStyle/>
+          <a:p>
+            <a:pPr marL="0" indent="0" algn="r">
+              <a:buNone/>
+            </a:pPr>
+            <a:r>
+              <a:rPr lang="en-US" sz="900" dirty="0">
+                <a:solidFill>
+                  <a:srgbClr val="8896B0"/>
+                </a:solidFill>
+                <a:latin typeface="Calibri" pitchFamily="34" charset="0"/>
+                <a:ea typeface="Calibri" pitchFamily="34" charset="-122"/>
+                <a:cs typeface="Calibri" pitchFamily="34" charset="-120"/>
+              </a:rPr>
+              <a:t>8</a:t>
+            </a:r>
+            <a:endParaRPr lang="en-US" sz="900" dirty="0"/>
+          </a:p>
+        </p:txBody>
+      </p:sp>
+    </p:spTree>
+  </p:cSld>
+  <p:clrMapOvr>
+    <a:masterClrMapping/>
+  </p:clrMapOvr>
+</p:sld>
+</file>
+
+<file path=ppt/slides/slide9.xml><?xml version="1.0" encoding="utf-8"?>
+<p:sld xmlns:a="http://schemas.openxmlformats.org/drawingml/2006/main" xmlns:r="http://schemas.openxmlformats.org/officeDocument/2006/relationships" xmlns:p="http://schemas.openxmlformats.org/presentationml/2006/main">
+  <p:cSld name="Slide 9">
+    <p:bg>
+      <p:bgPr>
+        <a:solidFill>
+          <a:srgbClr val="FFFFFF"/>
+        </a:solidFill>
+        <a:effectLst/>
+      </p:bgPr>
+    </p:bg>
+    <p:spTree>
+      <p:nvGrpSpPr>
+        <p:cNvPr id="1" name=""/>
+        <p:cNvGrpSpPr/>
+        <p:nvPr/>
+      </p:nvGrpSpPr>
+      <p:grpSpPr>
+        <a:xfrm>
+          <a:off x="0" y="0"/>
+          <a:ext cx="0" cy="0"/>
+          <a:chOff x="0" y="0"/>
+          <a:chExt cx="0" cy="0"/>
+        </a:xfrm>
+      </p:grpSpPr>
+      <p:sp>
+        <p:nvSpPr>
+          <p:cNvPr id="2" name="Text Title"/>
+          <p:cNvSpPr/>
+          <p:nvPr/>
+        </p:nvSpPr>
+        <p:spPr>
+          <a:xfrm>
+            <a:off x="548640" y="411480"/>
+            <a:ext cx="11064240" cy="640080"/>
+          </a:xfrm>
+          <a:prstGeom prst="rect">
+            <a:avLst/>
+          </a:prstGeom>
+          <a:noFill/>
+          <a:ln/>
+        </p:spPr>
+        <p:txBody>
+          <a:bodyPr wrap="square" lIns="0" tIns="0" rIns="0" bIns="0" rtlCol="0" anchor="ctr"/>
+          <a:lstStyle/>
+          <a:p>
+            <a:pPr marL="0" indent="0" algn="l">
+              <a:buNone/>
+            </a:pPr>
+            <a:r>
+              <a:rPr lang="en-US" sz="3200" b="1" dirty="0">
+                <a:solidFill>
+                  <a:srgbClr val="16213E"/>
+                </a:solidFill>
+                <a:latin typeface="Cambria" pitchFamily="34" charset="0"/>
+                <a:ea typeface="Cambria" pitchFamily="34" charset="-122"/>
+                <a:cs typeface="Cambria" pitchFamily="34" charset="-120"/>
+              </a:rPr>
+              <a:t>Team Contributions</a:t>
+            </a:r>
+            <a:endParaRPr lang="en-US" sz="3200" dirty="0"/>
+          </a:p>
+        </p:txBody>
+      </p:sp>
+      <p:sp>
+        <p:nvSpPr>
+          <p:cNvPr id="3" name="Text Subtitle"/>
+          <p:cNvSpPr/>
+          <p:nvPr/>
+        </p:nvSpPr>
+        <p:spPr>
+          <a:xfrm>
+            <a:off x="548640" y="1051560"/>
+            <a:ext cx="10058400" cy="457200"/>
+          </a:xfrm>
+          <a:prstGeom prst="rect">
+            <a:avLst/>
+          </a:prstGeom>
+          <a:noFill/>
+          <a:ln/>
+        </p:spPr>
+        <p:txBody>
+          <a:bodyPr wrap="square" lIns="0" tIns="0" rIns="0" bIns="0" rtlCol="0" anchor="ctr"/>
+          <a:lstStyle/>
+          <a:p>
+            <a:pPr marL="0" indent="0" algn="l">
+              <a:buNone/>
+            </a:pPr>
+            <a:r>
+              <a:rPr lang="en-US" sz="1400" dirty="0">
+                <a:solidFill>
+                  <a:srgbClr val="44506A"/>
+                </a:solidFill>
+                <a:latin typeface="Calibri" pitchFamily="34" charset="0"/>
+                <a:ea typeface="Calibri" pitchFamily="34" charset="-122"/>
+                <a:cs typeface="Calibri" pitchFamily="34" charset="-120"/>
+              </a:rPr>
+              <a:t>Three workstreams, one hybrid pipeline — from raw orders to a recommendation a planner can trust.</a:t>
+            </a:r>
+            <a:endParaRPr lang="en-US" sz="1400" dirty="0"/>
+          </a:p>
+        </p:txBody>
+      </p:sp>
+      <p:sp>
+        <p:nvSpPr>
+          <p:cNvPr id="4" name="Card4"/>
+          <p:cNvSpPr/>
+          <p:nvPr/>
+        </p:nvSpPr>
+        <p:spPr>
+          <a:xfrm>
+            <a:off x="548640" y="1874520"/>
+            <a:ext cx="3520440" cy="3291840"/>
+          </a:xfrm>
+          <a:prstGeom prst="rect">
+            <a:avLst/>
+          </a:prstGeom>
+          <a:solidFill>
+            <a:srgbClr val="F4F7FC"/>
+          </a:solidFill>
+          <a:ln/>
+        </p:spPr>
+      </p:sp>
+      <p:sp>
+        <p:nvSpPr>
+          <p:cNvPr id="5" name="Avatar5"/>
+          <p:cNvSpPr/>
+          <p:nvPr/>
+        </p:nvSpPr>
+        <p:spPr>
+          <a:xfrm>
+            <a:off x="1897380" y="2148840"/>
+            <a:ext cx="822960" cy="822960"/>
+          </a:xfrm>
+          <a:prstGeom prst="ellipse">
+            <a:avLst/>
+          </a:prstGeom>
+          <a:solidFill>
+            <a:srgbClr val="F2A900"/>
+          </a:solidFill>
+          <a:ln/>
+        </p:spPr>
+        <p:txBody>
+          <a:bodyPr wrap="square" lIns="0" tIns="0" rIns="0" bIns="0" rtlCol="0" anchor="ctr"/>
+          <a:lstStyle/>
+          <a:p>
+            <a:pPr marL="0" indent="0" algn="ctr">
+              <a:buNone/>
+            </a:pPr>
+            <a:r>
+              <a:rPr lang="en-US" sz="2000" b="1" dirty="0">
+                <a:solidFill>
+                  <a:srgbClr val="16213E"/>
+                </a:solidFill>
+                <a:latin typeface="Cambria" pitchFamily="34" charset="0"/>
+              </a:rPr>
+              <a:t>PK</a:t>
+            </a:r>
+          </a:p>
+        </p:txBody>
+      </p:sp>
+      <p:sp>
+        <p:nvSpPr>
+          <p:cNvPr id="6" name="Name6"/>
+          <p:cNvSpPr/>
+          <p:nvPr/>
+        </p:nvSpPr>
+        <p:spPr>
+          <a:xfrm>
+            <a:off x="777240" y="3200400"/>
+            <a:ext cx="3063240" cy="457200"/>
+          </a:xfrm>
+          <a:prstGeom prst="rect">
+            <a:avLst/>
+          </a:prstGeom>
+          <a:noFill/>
+          <a:ln/>
+        </p:spPr>
+        <p:txBody>
+          <a:bodyPr wrap="square" lIns="0" tIns="0" rIns="0" bIns="0" rtlCol="0" anchor="ctr"/>
+          <a:lstStyle/>
+          <a:p>
+            <a:pPr marL="0" indent="0" algn="ctr">
+              <a:buNone/>
+            </a:pPr>
+            <a:r>
+              <a:rPr lang="en-US" sz="1600" b="1" dirty="0">
+                <a:solidFill>
+                  <a:srgbClr val="16213E"/>
+                </a:solidFill>
+                <a:latin typeface="Cambria" pitchFamily="34" charset="0"/>
+                <a:ea typeface="Cambria" pitchFamily="34" charset="-122"/>
+                <a:cs typeface="Cambria" pitchFamily="34" charset="-120"/>
+              </a:rPr>
+              <a:t>Pavan Kumar</a:t>
+            </a:r>
+            <a:endParaRPr lang="en-US" sz="1600" dirty="0"/>
+          </a:p>
+        </p:txBody>
+      </p:sp>
+      <p:sp>
+        <p:nvSpPr>
+          <p:cNvPr id="7" name="Role7"/>
+          <p:cNvSpPr/>
+          <p:nvPr/>
+        </p:nvSpPr>
+        <p:spPr>
+          <a:xfrm>
+            <a:off x="822960" y="3749040"/>
+            <a:ext cx="2971800" cy="731520"/>
+          </a:xfrm>
+          <a:prstGeom prst="rect">
+            <a:avLst/>
+          </a:prstGeom>
+          <a:noFill/>
+          <a:ln/>
+        </p:spPr>
+        <p:txBody>
+          <a:bodyPr wrap="square" lIns="0" tIns="0" rIns="0" bIns="0" rtlCol="0" anchor="ctr"/>
+          <a:lstStyle/>
+          <a:p>
+            <a:pPr marL="0" indent="0" algn="ctr">
+              <a:buNone/>
+            </a:pPr>
+            <a:r>
+              <a:rPr lang="en-US" sz="1200" b="1" dirty="0">
+                <a:solidFill>
+                  <a:srgbClr val="16213E"/>
+                </a:solidFill>
+                <a:latin typeface="Calibri" pitchFamily="34" charset="0"/>
+                <a:ea typeface="Calibri" pitchFamily="34" charset="-122"/>
+                <a:cs typeface="Calibri" pitchFamily="34" charset="-120"/>
+              </a:rPr>
+              <a:t>Dashboard Development &amp; Data Visualization</a:t>
+            </a:r>
+            <a:endParaRPr lang="en-US" sz="1200" dirty="0"/>
+          </a:p>
+          <a:p>
+            <a:pPr algn="ctr"/>
+            <a:r>
+              <a:rPr lang="en-US" sz="1050" dirty="0">
+                <a:solidFill>
+                  <a:srgbClr val="16213E"/>
+                </a:solidFill>
+                <a:latin typeface="Calibri" pitchFamily="34" charset="0"/>
+                <a:ea typeface="Calibri" pitchFamily="34" charset="-122"/>
+                <a:cs typeface="Calibri" pitchFamily="34" charset="-120"/>
+              </a:rPr>
+              <a:t>(</a:t>
+            </a:r>
+            <a:r>
+              <a:rPr lang="en-IN" sz="1050" dirty="0" err="1"/>
+              <a:t>Streamlit</a:t>
+            </a:r>
+            <a:r>
+              <a:rPr lang="en-IN" sz="1050" dirty="0"/>
+              <a:t> Dashboard • </a:t>
+            </a:r>
+            <a:r>
+              <a:rPr lang="en-IN" sz="1050" dirty="0" err="1"/>
+              <a:t>Plotly</a:t>
+            </a:r>
+            <a:r>
+              <a:rPr lang="en-IN" sz="1050" dirty="0"/>
+              <a:t> Analytics • KPI Dashboard • UI Integration </a:t>
+            </a:r>
+            <a:r>
+              <a:rPr lang="en-US" sz="1050" dirty="0">
+                <a:solidFill>
+                  <a:srgbClr val="16213E"/>
+                </a:solidFill>
+                <a:latin typeface="Calibri" pitchFamily="34" charset="0"/>
+                <a:ea typeface="Calibri" pitchFamily="34" charset="-122"/>
+                <a:cs typeface="Calibri" pitchFamily="34" charset="-120"/>
+              </a:rPr>
+              <a:t>)</a:t>
+            </a:r>
+            <a:endParaRPr lang="en-US" sz="1050" dirty="0"/>
+          </a:p>
+        </p:txBody>
+      </p:sp>
+      <p:sp>
+        <p:nvSpPr>
+          <p:cNvPr id="8" name="Card8"/>
+          <p:cNvSpPr/>
+          <p:nvPr/>
+        </p:nvSpPr>
+        <p:spPr>
+          <a:xfrm>
+            <a:off x="4343400" y="1874520"/>
+            <a:ext cx="3520440" cy="3291840"/>
+          </a:xfrm>
+          <a:prstGeom prst="rect">
+            <a:avLst/>
+          </a:prstGeom>
+          <a:solidFill>
+            <a:srgbClr val="F4F7FC"/>
+          </a:solidFill>
+          <a:ln/>
+        </p:spPr>
+      </p:sp>
+      <p:sp>
+        <p:nvSpPr>
+          <p:cNvPr id="9" name="Avatar9"/>
+          <p:cNvSpPr/>
+          <p:nvPr/>
+        </p:nvSpPr>
+        <p:spPr>
+          <a:xfrm>
+            <a:off x="5692140" y="2148840"/>
+            <a:ext cx="822960" cy="822960"/>
+          </a:xfrm>
+          <a:prstGeom prst="ellipse">
+            <a:avLst/>
+          </a:prstGeom>
+          <a:solidFill>
+            <a:srgbClr val="F2A900"/>
+          </a:solidFill>
+          <a:ln/>
+        </p:spPr>
+        <p:txBody>
+          <a:bodyPr wrap="square" lIns="0" tIns="0" rIns="0" bIns="0" rtlCol="0" anchor="ctr"/>
+          <a:lstStyle/>
+          <a:p>
+            <a:pPr marL="0" indent="0" algn="ctr">
+              <a:buNone/>
+            </a:pPr>
+            <a:r>
+              <a:rPr lang="en-US" sz="2000" b="1" dirty="0">
+                <a:solidFill>
+                  <a:srgbClr val="16213E"/>
+                </a:solidFill>
+                <a:latin typeface="Cambria" pitchFamily="34" charset="0"/>
+              </a:rPr>
+              <a:t>BF</a:t>
+            </a:r>
+          </a:p>
+        </p:txBody>
+      </p:sp>
+      <p:sp>
+        <p:nvSpPr>
+          <p:cNvPr id="10" name="Name10"/>
+          <p:cNvSpPr/>
+          <p:nvPr/>
+        </p:nvSpPr>
+        <p:spPr>
+          <a:xfrm>
+            <a:off x="4572000" y="3200400"/>
+            <a:ext cx="3063240" cy="457200"/>
+          </a:xfrm>
+          <a:prstGeom prst="rect">
+            <a:avLst/>
+          </a:prstGeom>
+          <a:noFill/>
+          <a:ln/>
+        </p:spPr>
+        <p:txBody>
+          <a:bodyPr wrap="square" lIns="0" tIns="0" rIns="0" bIns="0" rtlCol="0" anchor="ctr"/>
+          <a:lstStyle/>
+          <a:p>
+            <a:pPr marL="0" indent="0" algn="ctr">
+              <a:buNone/>
+            </a:pPr>
+            <a:r>
+              <a:rPr lang="en-US" sz="1600" b="1" dirty="0">
+                <a:solidFill>
+                  <a:srgbClr val="16213E"/>
+                </a:solidFill>
+                <a:latin typeface="Cambria" pitchFamily="34" charset="0"/>
+                <a:ea typeface="Cambria" pitchFamily="34" charset="-122"/>
+                <a:cs typeface="Cambria" pitchFamily="34" charset="-120"/>
+              </a:rPr>
+              <a:t>Bushra Faizi Shaik</a:t>
+            </a:r>
+            <a:endParaRPr lang="en-US" sz="1600" dirty="0"/>
+          </a:p>
+        </p:txBody>
+      </p:sp>
+      <p:sp>
+        <p:nvSpPr>
+          <p:cNvPr id="11" name="Role11"/>
+          <p:cNvSpPr/>
+          <p:nvPr/>
+        </p:nvSpPr>
+        <p:spPr>
+          <a:xfrm>
+            <a:off x="4617720" y="3749040"/>
+            <a:ext cx="2971800" cy="731520"/>
+          </a:xfrm>
+          <a:prstGeom prst="rect">
+            <a:avLst/>
+          </a:prstGeom>
+          <a:noFill/>
+          <a:ln/>
+        </p:spPr>
+        <p:txBody>
+          <a:bodyPr wrap="square" lIns="0" tIns="0" rIns="0" bIns="0" rtlCol="0" anchor="ctr"/>
+          <a:lstStyle/>
+          <a:p>
+            <a:pPr marL="0" indent="0" algn="ctr">
+              <a:buNone/>
+            </a:pPr>
+            <a:r>
+              <a:rPr lang="en-US" sz="1200" b="1" dirty="0">
+                <a:solidFill>
+                  <a:srgbClr val="16213E"/>
+                </a:solidFill>
+                <a:latin typeface="Calibri" pitchFamily="34" charset="0"/>
+                <a:ea typeface="Calibri" pitchFamily="34" charset="-122"/>
+                <a:cs typeface="Calibri" pitchFamily="34" charset="-120"/>
+              </a:rPr>
+              <a:t>Classical Optimization &amp; Data Processing</a:t>
+            </a:r>
+            <a:endParaRPr lang="en-US" sz="1200" dirty="0"/>
+          </a:p>
+          <a:p>
+            <a:pPr algn="ctr"/>
+            <a:r>
+              <a:rPr lang="en-US" sz="1050" dirty="0">
+                <a:solidFill>
+                  <a:srgbClr val="16213E"/>
+                </a:solidFill>
+                <a:latin typeface="Calibri" pitchFamily="34" charset="0"/>
+                <a:ea typeface="Calibri" pitchFamily="34" charset="-122"/>
+                <a:cs typeface="Calibri" pitchFamily="34" charset="-120"/>
+              </a:rPr>
+              <a:t>(</a:t>
+            </a:r>
+            <a:r>
+              <a:rPr lang="en-IN" sz="1050" dirty="0"/>
+              <a:t>Data Processing • Baseline • Greedy Algorithm • OR-Tools Optimization • Benchmarking</a:t>
+            </a:r>
+            <a:r>
+              <a:rPr lang="en-US" sz="1050" dirty="0">
+                <a:solidFill>
+                  <a:srgbClr val="16213E"/>
+                </a:solidFill>
+                <a:latin typeface="Calibri" pitchFamily="34" charset="0"/>
+                <a:ea typeface="Calibri" pitchFamily="34" charset="-122"/>
+                <a:cs typeface="Calibri" pitchFamily="34" charset="-120"/>
+              </a:rPr>
+              <a:t>)</a:t>
+            </a:r>
+            <a:endParaRPr lang="en-US" sz="1050" dirty="0"/>
+          </a:p>
+        </p:txBody>
+      </p:sp>
+      <p:sp>
+        <p:nvSpPr>
+          <p:cNvPr id="12" name="Card12"/>
+          <p:cNvSpPr/>
+          <p:nvPr/>
+        </p:nvSpPr>
+        <p:spPr>
+          <a:xfrm>
+            <a:off x="8138160" y="1874520"/>
+            <a:ext cx="3520440" cy="3291840"/>
+          </a:xfrm>
+          <a:prstGeom prst="rect">
+            <a:avLst/>
+          </a:prstGeom>
+          <a:solidFill>
+            <a:srgbClr val="F4F7FC"/>
+          </a:solidFill>
+          <a:ln/>
+        </p:spPr>
+      </p:sp>
+      <p:sp>
+        <p:nvSpPr>
+          <p:cNvPr id="13" name="Avatar13"/>
+          <p:cNvSpPr/>
+          <p:nvPr/>
+        </p:nvSpPr>
+        <p:spPr>
+          <a:xfrm>
+            <a:off x="9486900" y="2148840"/>
+            <a:ext cx="822960" cy="822960"/>
+          </a:xfrm>
+          <a:prstGeom prst="ellipse">
+            <a:avLst/>
+          </a:prstGeom>
+          <a:solidFill>
+            <a:srgbClr val="F2A900"/>
+          </a:solidFill>
+          <a:ln/>
+        </p:spPr>
+        <p:txBody>
+          <a:bodyPr wrap="square" lIns="0" tIns="0" rIns="0" bIns="0" rtlCol="0" anchor="ctr"/>
+          <a:lstStyle/>
+          <a:p>
+            <a:pPr marL="0" indent="0" algn="ctr">
+              <a:buNone/>
+            </a:pPr>
+            <a:r>
+              <a:rPr lang="en-US" sz="2000" b="1" dirty="0">
+                <a:solidFill>
+                  <a:srgbClr val="16213E"/>
+                </a:solidFill>
+                <a:latin typeface="Cambria" pitchFamily="34" charset="0"/>
+              </a:rPr>
+              <a:t>TS</a:t>
+            </a:r>
+          </a:p>
+        </p:txBody>
+      </p:sp>
+      <p:sp>
+        <p:nvSpPr>
+          <p:cNvPr id="14" name="Name14"/>
+          <p:cNvSpPr/>
+          <p:nvPr/>
+        </p:nvSpPr>
+        <p:spPr>
+          <a:xfrm>
+            <a:off x="8366760" y="3200400"/>
+            <a:ext cx="3063240" cy="457200"/>
+          </a:xfrm>
+          <a:prstGeom prst="rect">
+            <a:avLst/>
+          </a:prstGeom>
+          <a:noFill/>
+          <a:ln/>
+        </p:spPr>
+        <p:txBody>
+          <a:bodyPr wrap="square" lIns="0" tIns="0" rIns="0" bIns="0" rtlCol="0" anchor="ctr"/>
+          <a:lstStyle/>
+          <a:p>
+            <a:pPr marL="0" indent="0" algn="ctr">
+              <a:buNone/>
+            </a:pPr>
+            <a:r>
+              <a:rPr lang="en-US" sz="1600" b="1" dirty="0">
+                <a:solidFill>
+                  <a:srgbClr val="16213E"/>
+                </a:solidFill>
+                <a:latin typeface="Cambria" pitchFamily="34" charset="0"/>
+                <a:ea typeface="Cambria" pitchFamily="34" charset="-122"/>
+                <a:cs typeface="Cambria" pitchFamily="34" charset="-120"/>
+              </a:rPr>
+              <a:t>Thammandra Saketh Ram</a:t>
+            </a:r>
+            <a:endParaRPr lang="en-US" sz="1600" dirty="0"/>
+          </a:p>
+        </p:txBody>
+      </p:sp>
+      <p:sp>
+        <p:nvSpPr>
+          <p:cNvPr id="15" name="Role15"/>
+          <p:cNvSpPr/>
+          <p:nvPr/>
+        </p:nvSpPr>
+        <p:spPr>
+          <a:xfrm>
+            <a:off x="8412480" y="3749040"/>
+            <a:ext cx="2971800" cy="731520"/>
+          </a:xfrm>
+          <a:prstGeom prst="rect">
+            <a:avLst/>
+          </a:prstGeom>
+          <a:noFill/>
+          <a:ln/>
+        </p:spPr>
+        <p:txBody>
+          <a:bodyPr wrap="square" lIns="0" tIns="0" rIns="0" bIns="0" rtlCol="0" anchor="ctr"/>
+          <a:lstStyle/>
+          <a:p>
+            <a:pPr marL="0" indent="0" algn="ctr">
+              <a:buNone/>
+            </a:pPr>
+            <a:r>
+              <a:rPr lang="en-US" sz="1200" b="1" dirty="0">
+                <a:solidFill>
+                  <a:srgbClr val="16213E"/>
+                </a:solidFill>
+                <a:latin typeface="Calibri" pitchFamily="34" charset="0"/>
+                <a:ea typeface="Calibri" pitchFamily="34" charset="-122"/>
+                <a:cs typeface="Calibri" pitchFamily="34" charset="-120"/>
+              </a:rPr>
+              <a:t>Quantum Optimization, Documentation &amp; Testing</a:t>
+            </a:r>
+            <a:endParaRPr lang="en-US" sz="1200" dirty="0"/>
+          </a:p>
+          <a:p>
+            <a:pPr algn="ctr"/>
+            <a:r>
+              <a:rPr lang="en-US" sz="1050" dirty="0">
+                <a:solidFill>
+                  <a:srgbClr val="16213E"/>
+                </a:solidFill>
+                <a:latin typeface="Calibri" pitchFamily="34" charset="0"/>
+                <a:ea typeface="Calibri" pitchFamily="34" charset="-122"/>
+                <a:cs typeface="Calibri" pitchFamily="34" charset="-120"/>
+              </a:rPr>
+              <a:t>(</a:t>
+            </a:r>
+            <a:r>
+              <a:rPr lang="en-IN" sz="1050" dirty="0"/>
+              <a:t>Quantum Research • QAOA Implementation • Benchmarking • Documentation &amp; Validation</a:t>
+            </a:r>
+            <a:r>
+              <a:rPr lang="en-US" sz="1050" dirty="0">
+                <a:solidFill>
+                  <a:srgbClr val="16213E"/>
+                </a:solidFill>
+                <a:latin typeface="Calibri" pitchFamily="34" charset="0"/>
+                <a:ea typeface="Calibri" pitchFamily="34" charset="-122"/>
+                <a:cs typeface="Calibri" pitchFamily="34" charset="-120"/>
+              </a:rPr>
+              <a:t>)</a:t>
+            </a:r>
+            <a:endParaRPr lang="en-US" sz="1050" dirty="0"/>
+          </a:p>
+        </p:txBody>
+      </p:sp>
+      <p:sp>
+        <p:nvSpPr>
+          <p:cNvPr id="16" name="NoteStrip"/>
+          <p:cNvSpPr/>
+          <p:nvPr/>
+        </p:nvSpPr>
+        <p:spPr>
+          <a:xfrm>
+            <a:off x="548640" y="5440680"/>
+            <a:ext cx="11064240" cy="685800"/>
+          </a:xfrm>
+          <a:prstGeom prst="rect">
+            <a:avLst/>
+          </a:prstGeom>
+          <a:solidFill>
+            <a:srgbClr val="F4F7FC"/>
+          </a:solidFill>
+          <a:ln/>
+        </p:spPr>
+      </p:sp>
+      <p:sp>
+        <p:nvSpPr>
+          <p:cNvPr id="17" name="NoteText"/>
+          <p:cNvSpPr/>
+          <p:nvPr/>
+        </p:nvSpPr>
+        <p:spPr>
+          <a:xfrm>
+            <a:off x="822960" y="5559552"/>
+            <a:ext cx="10515600" cy="457200"/>
+          </a:xfrm>
+          <a:prstGeom prst="rect">
+            <a:avLst/>
+          </a:prstGeom>
+          <a:noFill/>
+          <a:ln/>
+        </p:spPr>
+        <p:txBody>
+          <a:bodyPr wrap="square" lIns="0" tIns="0" rIns="0" bIns="0" rtlCol="0" anchor="ctr"/>
+          <a:lstStyle/>
+          <a:p>
+            <a:pPr marL="0" indent="0" algn="l">
+              <a:buNone/>
+            </a:pPr>
+            <a:r>
+              <a:rPr lang="en-US" sz="1200" i="1" dirty="0">
+                <a:solidFill>
+                  <a:srgbClr val="16213E"/>
+                </a:solidFill>
+                <a:latin typeface="Calibri" pitchFamily="34" charset="0"/>
+                <a:ea typeface="Calibri" pitchFamily="34" charset="-122"/>
+                <a:cs typeface="Calibri" pitchFamily="34" charset="-120"/>
+              </a:rPr>
+              <a:t>Built for the WISER Global Quantum+AI Program 2026 — a hybrid classical-quantum approach to Nestlé's distributed order management, from data pipeline to planner-facing recommendation.</a:t>
+            </a:r>
+            <a:endParaRPr lang="en-US" sz="1200" dirty="0"/>
+          </a:p>
+        </p:txBody>
+      </p:sp>
+      <p:sp>
+        <p:nvSpPr>
+          <p:cNvPr id="18" name="FooterLeft"/>
+          <p:cNvSpPr/>
+          <p:nvPr/>
+        </p:nvSpPr>
+        <p:spPr>
+          <a:xfrm>
+            <a:off x="457200" y="6537960"/>
+            <a:ext cx="7315200" cy="274320"/>
+          </a:xfrm>
+          <a:prstGeom prst="rect">
+            <a:avLst/>
+          </a:prstGeom>
+          <a:noFill/>
+          <a:ln/>
+        </p:spPr>
+        <p:txBody>
+          <a:bodyPr wrap="square" lIns="0" tIns="0" rIns="0" bIns="0" rtlCol="0" anchor="ctr"/>
+          <a:lstStyle/>
+          <a:p>
+            <a:pPr marL="0" indent="0" algn="l">
+              <a:buNone/>
+            </a:pPr>
+            <a:r>
+              <a:rPr lang="en-US" sz="900" dirty="0">
+                <a:solidFill>
+                  <a:srgbClr val="8896B0"/>
+                </a:solidFill>
+                <a:latin typeface="Calibri" pitchFamily="34" charset="0"/>
+                <a:ea typeface="Calibri" pitchFamily="34" charset="-122"/>
+                <a:cs typeface="Calibri" pitchFamily="34" charset="-120"/>
+              </a:rPr>
+              <a:t>Nestlé DOM — WISER Global Quantum+AI Program 2026</a:t>
+            </a:r>
+            <a:endParaRPr lang="en-US" sz="900" dirty="0"/>
+          </a:p>
+        </p:txBody>
+      </p:sp>
+      <p:sp>
+        <p:nvSpPr>
+          <p:cNvPr id="19" name="FooterRight"/>
+          <p:cNvSpPr/>
+          <p:nvPr/>
+        </p:nvSpPr>
+        <p:spPr>
+          <a:xfrm>
+            <a:off x="10789920" y="6537960"/>
+            <a:ext cx="914400" cy="274320"/>
+          </a:xfrm>
+          <a:prstGeom prst="rect">
+            <a:avLst/>
+          </a:prstGeom>
+          <a:noFill/>
+          <a:ln/>
+        </p:spPr>
+        <p:txBody>
+          <a:bodyPr wrap="square" lIns="0" tIns="0" rIns="0" bIns="0" rtlCol="0" anchor="ctr"/>
+          <a:lstStyle/>
+          <a:p>
+            <a:pPr marL="0" indent="0" algn="r">
+              <a:buNone/>
+            </a:pPr>
+            <a:r>
+              <a:rPr lang="en-US" sz="900" dirty="0">
+                <a:solidFill>
+                  <a:srgbClr val="8896B0"/>
+                </a:solidFill>
+                <a:latin typeface="Calibri" pitchFamily="34" charset="0"/>
+                <a:ea typeface="Calibri" pitchFamily="34" charset="-122"/>
+                <a:cs typeface="Calibri" pitchFamily="34" charset="-120"/>
+              </a:rPr>
+              <a:t>9</a:t>
             </a:r>
             <a:endParaRPr lang="en-US" sz="900" dirty="0"/>
           </a:p>
@@ -6056,4 +9061,299 @@
     </a:ext>
   </a:extLst>
 </a:theme>
+</file>
+
+<file path=ppt/theme/theme2.xml><?xml version="1.0" encoding="utf-8"?>
+<a:theme xmlns:a="http://schemas.openxmlformats.org/drawingml/2006/main" name="Office Theme">
+  <a:themeElements>
+    <a:clrScheme name="Office">
+      <a:dk1>
+        <a:sysClr val="windowText" lastClr="000000"/>
+      </a:dk1>
+      <a:lt1>
+        <a:sysClr val="window" lastClr="FFFFFF"/>
+      </a:lt1>
+      <a:dk2>
+        <a:srgbClr val="44546A"/>
+      </a:dk2>
+      <a:lt2>
+        <a:srgbClr val="E7E6E6"/>
+      </a:lt2>
+      <a:accent1>
+        <a:srgbClr val="4472C4"/>
+      </a:accent1>
+      <a:accent2>
+        <a:srgbClr val="ED7D31"/>
+      </a:accent2>
+      <a:accent3>
+        <a:srgbClr val="A5A5A5"/>
+      </a:accent3>
+      <a:accent4>
+        <a:srgbClr val="FFC000"/>
+      </a:accent4>
+      <a:accent5>
+        <a:srgbClr val="5B9BD5"/>
+      </a:accent5>
+      <a:accent6>
+        <a:srgbClr val="70AD47"/>
+      </a:accent6>
+      <a:hlink>
+        <a:srgbClr val="0563C1"/>
+      </a:hlink>
+      <a:folHlink>
+        <a:srgbClr val="954F72"/>
+      </a:folHlink>
+    </a:clrScheme>
+    <a:fontScheme name="Office">
+      <a:majorFont>
+        <a:latin typeface="Calibri Light" panose="020F0302020204030204"/>
+        <a:ea typeface=""/>
+        <a:cs typeface=""/>
+        <a:font script="Jpan" typeface="游ゴシック Light"/>
+        <a:font script="Hang" typeface="맑은 고딕"/>
+        <a:font script="Hans" typeface="等线 Light"/>
+        <a:font script="Hant" typeface="新細明體"/>
+        <a:font script="Arab" typeface="Times New Roman"/>
+        <a:font script="Hebr" typeface="Times New Roman"/>
+        <a:font script="Thai" typeface="Angsana New"/>
+        <a:font script="Ethi" typeface="Nyala"/>
+        <a:font script="Beng" typeface="Vrinda"/>
+        <a:font script="Gujr" typeface="Shruti"/>
+        <a:font script="Khmr" typeface="MoolBoran"/>
+        <a:font script="Knda" typeface="Tunga"/>
+        <a:font script="Guru" typeface="Raavi"/>
+        <a:font script="Cans" typeface="Euphemia"/>
+        <a:font script="Cher" typeface="Plantagenet Cherokee"/>
+        <a:font script="Yiii" typeface="Microsoft Yi Baiti"/>
+        <a:font script="Tibt" typeface="Microsoft Himalaya"/>
+        <a:font script="Thaa" typeface="MV Boli"/>
+        <a:font script="Deva" typeface="Mangal"/>
+        <a:font script="Telu" typeface="Gautami"/>
+        <a:font script="Taml" typeface="Latha"/>
+        <a:font script="Syrc" typeface="Estrangelo Edessa"/>
+        <a:font script="Orya" typeface="Kalinga"/>
+        <a:font script="Mlym" typeface="Kartika"/>
+        <a:font script="Laoo" typeface="DokChampa"/>
+        <a:font script="Sinh" typeface="Iskoola Pota"/>
+        <a:font script="Mong" typeface="Mongolian Baiti"/>
+        <a:font script="Viet" typeface="Times New Roman"/>
+        <a:font script="Uigh" typeface="Microsoft Uighur"/>
+        <a:font script="Geor" typeface="Sylfaen"/>
+        <a:font script="Armn" typeface="Arial"/>
+        <a:font script="Bugi" typeface="Leelawadee UI"/>
+        <a:font script="Bopo" typeface="Microsoft JhengHei"/>
+        <a:font script="Java" typeface="Javanese Text"/>
+        <a:font script="Lisu" typeface="Segoe UI"/>
+        <a:font script="Mymr" typeface="Myanmar Text"/>
+        <a:font script="Nkoo" typeface="Ebrima"/>
+        <a:font script="Olck" typeface="Nirmala UI"/>
+        <a:font script="Osma" typeface="Ebrima"/>
+        <a:font script="Phag" typeface="Phagspa"/>
+        <a:font script="Syrn" typeface="Estrangelo Edessa"/>
+        <a:font script="Syrj" typeface="Estrangelo Edessa"/>
+        <a:font script="Syre" typeface="Estrangelo Edessa"/>
+        <a:font script="Sora" typeface="Nirmala UI"/>
+        <a:font script="Tale" typeface="Microsoft Tai Le"/>
+        <a:font script="Talu" typeface="Microsoft New Tai Lue"/>
+        <a:font script="Tfng" typeface="Ebrima"/>
+      </a:majorFont>
+      <a:minorFont>
+        <a:latin typeface="Calibri" panose="020F0502020204030204"/>
+        <a:ea typeface=""/>
+        <a:cs typeface=""/>
+        <a:font script="Jpan" typeface="游ゴシック"/>
+        <a:font script="Hang" typeface="맑은 고딕"/>
+        <a:font script="Hans" typeface="等线"/>
+        <a:font script="Hant" typeface="新細明體"/>
+        <a:font script="Arab" typeface="Arial"/>
+        <a:font script="Hebr" typeface="Arial"/>
+        <a:font script="Thai" typeface="Cordia New"/>
+        <a:font script="Ethi" typeface="Nyala"/>
+        <a:font script="Beng" typeface="Vrinda"/>
+        <a:font script="Gujr" typeface="Shruti"/>
+        <a:font script="Khmr" typeface="DaunPenh"/>
+        <a:font script="Knda" typeface="Tunga"/>
+        <a:font script="Guru" typeface="Raavi"/>
+        <a:font script="Cans" typeface="Euphemia"/>
+        <a:font script="Cher" typeface="Plantagenet Cherokee"/>
+        <a:font script="Yiii" typeface="Microsoft Yi Baiti"/>
+        <a:font script="Tibt" typeface="Microsoft Himalaya"/>
+        <a:font script="Thaa" typeface="MV Boli"/>
+        <a:font script="Deva" typeface="Mangal"/>
+        <a:font script="Telu" typeface="Gautami"/>
+        <a:font script="Taml" typeface="Latha"/>
+        <a:font script="Syrc" typeface="Estrangelo Edessa"/>
+        <a:font script="Orya" typeface="Kalinga"/>
+        <a:font script="Mlym" typeface="Kartika"/>
+        <a:font script="Laoo" typeface="DokChampa"/>
+        <a:font script="Sinh" typeface="Iskoola Pota"/>
+        <a:font script="Mong" typeface="Mongolian Baiti"/>
+        <a:font script="Viet" typeface="Arial"/>
+        <a:font script="Uigh" typeface="Microsoft Uighur"/>
+        <a:font script="Geor" typeface="Sylfaen"/>
+        <a:font script="Armn" typeface="Arial"/>
+        <a:font script="Bugi" typeface="Leelawadee UI"/>
+        <a:font script="Bopo" typeface="Microsoft JhengHei"/>
+        <a:font script="Java" typeface="Javanese Text"/>
+        <a:font script="Lisu" typeface="Segoe UI"/>
+        <a:font script="Mymr" typeface="Myanmar Text"/>
+        <a:font script="Nkoo" typeface="Ebrima"/>
+        <a:font script="Olck" typeface="Nirmala UI"/>
+        <a:font script="Osma" typeface="Ebrima"/>
+        <a:font script="Phag" typeface="Phagspa"/>
+        <a:font script="Syrn" typeface="Estrangelo Edessa"/>
+        <a:font script="Syrj" typeface="Estrangelo Edessa"/>
+        <a:font script="Syre" typeface="Estrangelo Edessa"/>
+        <a:font script="Sora" typeface="Nirmala UI"/>
+        <a:font script="Tale" typeface="Microsoft Tai Le"/>
+        <a:font script="Talu" typeface="Microsoft New Tai Lue"/>
+        <a:font script="Tfng" typeface="Ebrima"/>
+      </a:minorFont>
+    </a:fontScheme>
+    <a:fmtScheme name="Office">
+      <a:fillStyleLst>
+        <a:solidFill>
+          <a:schemeClr val="phClr"/>
+        </a:solidFill>
+        <a:gradFill rotWithShape="1">
+          <a:gsLst>
+            <a:gs pos="0">
+              <a:schemeClr val="phClr">
+                <a:lumMod val="110000"/>
+                <a:satMod val="105000"/>
+                <a:tint val="67000"/>
+              </a:schemeClr>
+            </a:gs>
+            <a:gs pos="50000">
+              <a:schemeClr val="phClr">
+                <a:lumMod val="105000"/>
+                <a:satMod val="103000"/>
+                <a:tint val="73000"/>
+              </a:schemeClr>
+            </a:gs>
+            <a:gs pos="100000">
+              <a:schemeClr val="phClr">
+                <a:lumMod val="105000"/>
+                <a:satMod val="109000"/>
+                <a:tint val="81000"/>
+              </a:schemeClr>
+            </a:gs>
+          </a:gsLst>
+          <a:lin ang="5400000" scaled="0"/>
+        </a:gradFill>
+        <a:gradFill rotWithShape="1">
+          <a:gsLst>
+            <a:gs pos="0">
+              <a:schemeClr val="phClr">
+                <a:satMod val="103000"/>
+                <a:lumMod val="102000"/>
+                <a:tint val="94000"/>
+              </a:schemeClr>
+            </a:gs>
+            <a:gs pos="50000">
+              <a:schemeClr val="phClr">
+                <a:satMod val="110000"/>
+                <a:lumMod val="100000"/>
+                <a:shade val="100000"/>
+              </a:schemeClr>
+            </a:gs>
+            <a:gs pos="100000">
+              <a:schemeClr val="phClr">
+                <a:lumMod val="99000"/>
+                <a:satMod val="120000"/>
+                <a:shade val="78000"/>
+              </a:schemeClr>
+            </a:gs>
+          </a:gsLst>
+          <a:lin ang="5400000" scaled="0"/>
+        </a:gradFill>
+      </a:fillStyleLst>
+      <a:lnStyleLst>
+        <a:ln w="6350" cap="flat" cmpd="sng" algn="ctr">
+          <a:solidFill>
+            <a:schemeClr val="phClr"/>
+          </a:solidFill>
+          <a:prstDash val="solid"/>
+          <a:miter lim="800000"/>
+        </a:ln>
+        <a:ln w="12700" cap="flat" cmpd="sng" algn="ctr">
+          <a:solidFill>
+            <a:schemeClr val="phClr"/>
+          </a:solidFill>
+          <a:prstDash val="solid"/>
+          <a:miter lim="800000"/>
+        </a:ln>
+        <a:ln w="19050" cap="flat" cmpd="sng" algn="ctr">
+          <a:solidFill>
+            <a:schemeClr val="phClr"/>
+          </a:solidFill>
+          <a:prstDash val="solid"/>
+          <a:miter lim="800000"/>
+        </a:ln>
+      </a:lnStyleLst>
+      <a:effectStyleLst>
+        <a:effectStyle>
+          <a:effectLst/>
+        </a:effectStyle>
+        <a:effectStyle>
+          <a:effectLst/>
+        </a:effectStyle>
+        <a:effectStyle>
+          <a:effectLst>
+            <a:outerShdw blurRad="57150" dist="19050" dir="5400000" algn="ctr" rotWithShape="0">
+              <a:srgbClr val="000000">
+                <a:alpha val="63000"/>
+              </a:srgbClr>
+            </a:outerShdw>
+          </a:effectLst>
+        </a:effectStyle>
+      </a:effectStyleLst>
+      <a:bgFillStyleLst>
+        <a:solidFill>
+          <a:schemeClr val="phClr"/>
+        </a:solidFill>
+        <a:solidFill>
+          <a:schemeClr val="phClr">
+            <a:tint val="95000"/>
+            <a:satMod val="170000"/>
+          </a:schemeClr>
+        </a:solidFill>
+        <a:gradFill rotWithShape="1">
+          <a:gsLst>
+            <a:gs pos="0">
+              <a:schemeClr val="phClr">
+                <a:tint val="93000"/>
+                <a:satMod val="150000"/>
+                <a:shade val="98000"/>
+                <a:lumMod val="102000"/>
+              </a:schemeClr>
+            </a:gs>
+            <a:gs pos="50000">
+              <a:schemeClr val="phClr">
+                <a:tint val="98000"/>
+                <a:satMod val="130000"/>
+                <a:shade val="90000"/>
+                <a:lumMod val="103000"/>
+              </a:schemeClr>
+            </a:gs>
+            <a:gs pos="100000">
+              <a:schemeClr val="phClr">
+                <a:shade val="63000"/>
+                <a:satMod val="120000"/>
+              </a:schemeClr>
+            </a:gs>
+          </a:gsLst>
+          <a:lin ang="5400000" scaled="0"/>
+        </a:gradFill>
+      </a:bgFillStyleLst>
+    </a:fmtScheme>
+  </a:themeElements>
+  <a:objectDefaults/>
+  <a:extraClrSchemeLst/>
+  <a:extLst>
+    <a:ext uri="{05A4C25C-085E-4340-85A3-A5531E510DB2}">
+      <thm15:themeFamily xmlns:thm15="http://schemas.microsoft.com/office/thememl/2012/main" name="Office Theme" id="{62F939B6-93AF-4DB8-9C6B-D6C7DFDC589F}" vid="{4A3C46E8-61CC-4603-A589-7422A47A8E4A}"/>
+    </a:ext>
+  </a:extLst>
+</a:theme>
 </file>